--- a/week08-react/juwon/week08_발표.pptx
+++ b/week08-react/juwon/week08_발표.pptx
@@ -11,6 +11,8 @@
     <p:sldId id="259" r:id="rId10"/>
     <p:sldId id="260" r:id="rId11"/>
     <p:sldId id="261" r:id="rId12"/>
+    <p:sldId id="262" r:id="rId13"/>
+    <p:sldId id="263" r:id="rId14"/>
   </p:sldIdLst>
   <p:sldSz cx="12188952" cy="6858000" type="screen4x3"/>
   <p:notesSz cx="6858000" cy="9144000"/>
@@ -3489,7 +3491,7 @@
                   <a:srgbClr val="FFFFFF"/>
                 </a:solidFill>
               </a:rPr>
-              <a:t>7주차 vs 8주차</a:t>
+              <a:t>AI Agent의 구성 요소와 디자인 패턴</a:t>
             </a:r>
           </a:p>
         </p:txBody>
@@ -3502,14 +3504,14 @@
         </p:nvSpPr>
         <p:spPr>
           <a:xfrm>
-            <a:off x="457200" y="1371600"/>
-            <a:ext cx="5303520" cy="4389120"/>
+            <a:off x="457200" y="1280160"/>
+            <a:ext cx="11247120" cy="822960"/>
           </a:xfrm>
           <a:prstGeom prst="rect">
             <a:avLst/>
           </a:prstGeom>
           <a:solidFill>
-            <a:srgbClr val="FFE5E5"/>
+            <a:srgbClr val="1E1E2E"/>
           </a:solidFill>
           <a:ln>
             <a:noFill/>
@@ -3545,320 +3547,48 @@
         </p:nvSpPr>
         <p:spPr>
           <a:xfrm>
-            <a:off x="640080" y="1508760"/>
-            <a:ext cx="4937760" cy="457200"/>
-          </a:xfrm>
-          <a:prstGeom prst="rect">
-            <a:avLst/>
-          </a:prstGeom>
-          <a:noFill/>
-        </p:spPr>
-        <p:txBody>
-          <a:bodyPr wrap="square">
-            <a:spAutoFit/>
-          </a:bodyPr>
-          <a:lstStyle/>
-          <a:p>
-            <a:pPr algn="l"/>
-            <a:r>
-              <a:rPr sz="1600" b="1">
-                <a:solidFill>
-                  <a:srgbClr val="CC0000"/>
-                </a:solidFill>
-              </a:rPr>
-              <a:t>7주차  Function Calling</a:t>
-            </a:r>
-          </a:p>
-        </p:txBody>
-      </p:sp>
-      <p:sp>
-        <p:nvSpPr>
-          <p:cNvPr id="6" name="TextBox 5"/>
-          <p:cNvSpPr txBox="1"/>
-          <p:nvPr/>
-        </p:nvSpPr>
-        <p:spPr>
-          <a:xfrm>
-            <a:off x="640080" y="2057400"/>
-            <a:ext cx="4937760" cy="411480"/>
-          </a:xfrm>
-          <a:prstGeom prst="rect">
-            <a:avLst/>
-          </a:prstGeom>
-          <a:noFill/>
-        </p:spPr>
-        <p:txBody>
-          <a:bodyPr wrap="square">
-            <a:spAutoFit/>
-          </a:bodyPr>
-          <a:lstStyle/>
-          <a:p>
-            <a:pPr algn="l"/>
-            <a:r>
-              <a:rPr sz="1300" b="0">
-                <a:solidFill>
-                  <a:srgbClr val="1E1E2E"/>
-                </a:solidFill>
-              </a:rPr>
-              <a:t>사용자: "제주도 날씨 알려줘"</a:t>
-            </a:r>
-          </a:p>
-        </p:txBody>
-      </p:sp>
-      <p:sp>
-        <p:nvSpPr>
-          <p:cNvPr id="7" name="TextBox 6"/>
-          <p:cNvSpPr txBox="1"/>
-          <p:nvPr/>
-        </p:nvSpPr>
-        <p:spPr>
-          <a:xfrm>
-            <a:off x="640080" y="2496312"/>
-            <a:ext cx="4937760" cy="411480"/>
-          </a:xfrm>
-          <a:prstGeom prst="rect">
-            <a:avLst/>
-          </a:prstGeom>
-          <a:noFill/>
-        </p:spPr>
-        <p:txBody>
-          <a:bodyPr wrap="square">
-            <a:spAutoFit/>
-          </a:bodyPr>
-          <a:lstStyle/>
-          <a:p>
-            <a:pPr algn="l"/>
-            <a:r>
-              <a:rPr sz="1300" b="0">
-                <a:solidFill>
-                  <a:srgbClr val="1E1E2E"/>
-                </a:solidFill>
-              </a:rPr>
-              <a:t/>
-            </a:r>
-          </a:p>
-        </p:txBody>
-      </p:sp>
-      <p:sp>
-        <p:nvSpPr>
-          <p:cNvPr id="8" name="TextBox 7"/>
-          <p:cNvSpPr txBox="1"/>
-          <p:nvPr/>
-        </p:nvSpPr>
-        <p:spPr>
-          <a:xfrm>
-            <a:off x="640080" y="2935224"/>
-            <a:ext cx="4937760" cy="411480"/>
-          </a:xfrm>
-          <a:prstGeom prst="rect">
-            <a:avLst/>
-          </a:prstGeom>
-          <a:noFill/>
-        </p:spPr>
-        <p:txBody>
-          <a:bodyPr wrap="square">
-            <a:spAutoFit/>
-          </a:bodyPr>
-          <a:lstStyle/>
-          <a:p>
-            <a:pPr algn="l"/>
-            <a:r>
-              <a:rPr sz="1300" b="0">
-                <a:solidFill>
-                  <a:srgbClr val="1E1E2E"/>
-                </a:solidFill>
-              </a:rPr>
-              <a:t>AI: get_weather 선택</a:t>
-            </a:r>
-          </a:p>
-        </p:txBody>
-      </p:sp>
-      <p:sp>
-        <p:nvSpPr>
-          <p:cNvPr id="9" name="TextBox 8"/>
-          <p:cNvSpPr txBox="1"/>
-          <p:nvPr/>
-        </p:nvSpPr>
-        <p:spPr>
-          <a:xfrm>
-            <a:off x="640080" y="3374136"/>
-            <a:ext cx="4937760" cy="411480"/>
-          </a:xfrm>
-          <a:prstGeom prst="rect">
-            <a:avLst/>
-          </a:prstGeom>
-          <a:noFill/>
-        </p:spPr>
-        <p:txBody>
-          <a:bodyPr wrap="square">
-            <a:spAutoFit/>
-          </a:bodyPr>
-          <a:lstStyle/>
-          <a:p>
-            <a:pPr algn="l"/>
-            <a:r>
-              <a:rPr sz="1300" b="0">
-                <a:solidFill>
-                  <a:srgbClr val="1E1E2E"/>
-                </a:solidFill>
-              </a:rPr>
-              <a:t>→ 함수 1번 호출</a:t>
-            </a:r>
-          </a:p>
-        </p:txBody>
-      </p:sp>
-      <p:sp>
-        <p:nvSpPr>
-          <p:cNvPr id="10" name="TextBox 9"/>
-          <p:cNvSpPr txBox="1"/>
-          <p:nvPr/>
-        </p:nvSpPr>
-        <p:spPr>
-          <a:xfrm>
-            <a:off x="640080" y="3813048"/>
-            <a:ext cx="4937760" cy="411480"/>
-          </a:xfrm>
-          <a:prstGeom prst="rect">
-            <a:avLst/>
-          </a:prstGeom>
-          <a:noFill/>
-        </p:spPr>
-        <p:txBody>
-          <a:bodyPr wrap="square">
-            <a:spAutoFit/>
-          </a:bodyPr>
-          <a:lstStyle/>
-          <a:p>
-            <a:pPr algn="l"/>
-            <a:r>
-              <a:rPr sz="1300" b="0">
-                <a:solidFill>
-                  <a:srgbClr val="1E1E2E"/>
-                </a:solidFill>
-              </a:rPr>
-              <a:t>→ 끝</a:t>
-            </a:r>
-          </a:p>
-        </p:txBody>
-      </p:sp>
-      <p:sp>
-        <p:nvSpPr>
-          <p:cNvPr id="11" name="TextBox 10"/>
-          <p:cNvSpPr txBox="1"/>
-          <p:nvPr/>
-        </p:nvSpPr>
-        <p:spPr>
-          <a:xfrm>
-            <a:off x="640080" y="4251960"/>
-            <a:ext cx="4937760" cy="411480"/>
-          </a:xfrm>
-          <a:prstGeom prst="rect">
-            <a:avLst/>
-          </a:prstGeom>
-          <a:noFill/>
-        </p:spPr>
-        <p:txBody>
-          <a:bodyPr wrap="square">
-            <a:spAutoFit/>
-          </a:bodyPr>
-          <a:lstStyle/>
-          <a:p>
-            <a:pPr algn="l"/>
-            <a:r>
-              <a:rPr sz="1300" b="0">
-                <a:solidFill>
-                  <a:srgbClr val="1E1E2E"/>
-                </a:solidFill>
-              </a:rPr>
-              <a:t/>
-            </a:r>
-          </a:p>
-        </p:txBody>
-      </p:sp>
-      <p:sp>
-        <p:nvSpPr>
-          <p:cNvPr id="12" name="TextBox 11"/>
-          <p:cNvSpPr txBox="1"/>
-          <p:nvPr/>
-        </p:nvSpPr>
-        <p:spPr>
-          <a:xfrm>
-            <a:off x="640080" y="4690872"/>
-            <a:ext cx="4937760" cy="411480"/>
-          </a:xfrm>
-          <a:prstGeom prst="rect">
-            <a:avLst/>
-          </a:prstGeom>
-          <a:noFill/>
-        </p:spPr>
-        <p:txBody>
-          <a:bodyPr wrap="square">
-            <a:spAutoFit/>
-          </a:bodyPr>
-          <a:lstStyle/>
-          <a:p>
-            <a:pPr algn="l"/>
-            <a:r>
-              <a:rPr sz="1300" b="1">
-                <a:solidFill>
-                  <a:srgbClr val="7F0000"/>
-                </a:solidFill>
-              </a:rPr>
-              <a:t>✔ 단순한 질문만 해결 가능</a:t>
-            </a:r>
-          </a:p>
-        </p:txBody>
-      </p:sp>
-      <p:sp>
-        <p:nvSpPr>
-          <p:cNvPr id="13" name="TextBox 12"/>
-          <p:cNvSpPr txBox="1"/>
-          <p:nvPr/>
-        </p:nvSpPr>
-        <p:spPr>
-          <a:xfrm>
-            <a:off x="640080" y="5129783"/>
-            <a:ext cx="4937760" cy="411480"/>
-          </a:xfrm>
-          <a:prstGeom prst="rect">
-            <a:avLst/>
-          </a:prstGeom>
-          <a:noFill/>
-        </p:spPr>
-        <p:txBody>
-          <a:bodyPr wrap="square">
-            <a:spAutoFit/>
-          </a:bodyPr>
-          <a:lstStyle/>
-          <a:p>
-            <a:pPr algn="l"/>
-            <a:r>
-              <a:rPr sz="1300" b="1">
-                <a:solidFill>
-                  <a:srgbClr val="7F0000"/>
-                </a:solidFill>
-              </a:rPr>
-              <a:t>✔ 함수 1개로 1개 답변</a:t>
-            </a:r>
-          </a:p>
-        </p:txBody>
-      </p:sp>
-      <p:sp>
-        <p:nvSpPr>
-          <p:cNvPr id="14" name="Rectangle 13"/>
+            <a:off x="548640" y="1371600"/>
+            <a:ext cx="11064240" cy="640080"/>
+          </a:xfrm>
+          <a:prstGeom prst="rect">
+            <a:avLst/>
+          </a:prstGeom>
+          <a:noFill/>
+        </p:spPr>
+        <p:txBody>
+          <a:bodyPr wrap="square">
+            <a:spAutoFit/>
+          </a:bodyPr>
+          <a:lstStyle/>
+          <a:p>
+            <a:pPr algn="ctr"/>
+            <a:r>
+              <a:rPr sz="1800" b="1">
+                <a:solidFill>
+                  <a:srgbClr val="FFFFFF"/>
+                </a:solidFill>
+              </a:rPr>
+              <a:t>Agent  =  LLM  +  도구(Tools)  +  메모리  +  실행 전략(Design Pattern)</a:t>
+            </a:r>
+          </a:p>
+        </p:txBody>
+      </p:sp>
+      <p:sp>
+        <p:nvSpPr>
+          <p:cNvPr id="6" name="Rectangle 5"/>
           <p:cNvSpPr/>
           <p:nvPr/>
         </p:nvSpPr>
         <p:spPr>
           <a:xfrm>
-            <a:off x="6400800" y="1371600"/>
-            <a:ext cx="5303520" cy="4389120"/>
+            <a:off x="365760" y="2286000"/>
+            <a:ext cx="2743200" cy="1645920"/>
           </a:xfrm>
           <a:prstGeom prst="rect">
             <a:avLst/>
           </a:prstGeom>
           <a:solidFill>
-            <a:srgbClr val="E5FFED"/>
+            <a:srgbClr val="E8F0FF"/>
           </a:solidFill>
           <a:ln>
             <a:noFill/>
@@ -3888,35 +3618,337 @@
       </p:sp>
       <p:sp>
         <p:nvSpPr>
-          <p:cNvPr id="15" name="TextBox 14"/>
-          <p:cNvSpPr txBox="1"/>
-          <p:nvPr/>
-        </p:nvSpPr>
-        <p:spPr>
-          <a:xfrm>
-            <a:off x="6583680" y="1508760"/>
-            <a:ext cx="4937760" cy="457200"/>
-          </a:xfrm>
-          <a:prstGeom prst="rect">
-            <a:avLst/>
-          </a:prstGeom>
-          <a:noFill/>
-        </p:spPr>
-        <p:txBody>
-          <a:bodyPr wrap="square">
-            <a:spAutoFit/>
-          </a:bodyPr>
-          <a:lstStyle/>
-          <a:p>
-            <a:pPr algn="l"/>
-            <a:r>
-              <a:rPr sz="1600" b="1">
+          <p:cNvPr id="7" name="TextBox 6"/>
+          <p:cNvSpPr txBox="1"/>
+          <p:nvPr/>
+        </p:nvSpPr>
+        <p:spPr>
+          <a:xfrm>
+            <a:off x="475488" y="2395728"/>
+            <a:ext cx="2523744" cy="502920"/>
+          </a:xfrm>
+          <a:prstGeom prst="rect">
+            <a:avLst/>
+          </a:prstGeom>
+          <a:noFill/>
+        </p:spPr>
+        <p:txBody>
+          <a:bodyPr wrap="square">
+            <a:spAutoFit/>
+          </a:bodyPr>
+          <a:lstStyle/>
+          <a:p>
+            <a:pPr algn="l"/>
+            <a:r>
+              <a:rPr sz="1400" b="1">
+                <a:solidFill>
+                  <a:srgbClr val="265DC8"/>
+                </a:solidFill>
+              </a:rPr>
+              <a:t>🧠 LLM</a:t>
+            </a:r>
+          </a:p>
+        </p:txBody>
+      </p:sp>
+      <p:sp>
+        <p:nvSpPr>
+          <p:cNvPr id="8" name="TextBox 7"/>
+          <p:cNvSpPr txBox="1"/>
+          <p:nvPr/>
+        </p:nvSpPr>
+        <p:spPr>
+          <a:xfrm>
+            <a:off x="475488" y="2907792"/>
+            <a:ext cx="2523744" cy="868680"/>
+          </a:xfrm>
+          <a:prstGeom prst="rect">
+            <a:avLst/>
+          </a:prstGeom>
+          <a:noFill/>
+        </p:spPr>
+        <p:txBody>
+          <a:bodyPr wrap="square">
+            <a:spAutoFit/>
+          </a:bodyPr>
+          <a:lstStyle/>
+          <a:p>
+            <a:pPr algn="l"/>
+            <a:r>
+              <a:rPr sz="1200" b="0">
+                <a:solidFill>
+                  <a:srgbClr val="1E1E2E"/>
+                </a:solidFill>
+              </a:rPr>
+              <a:t>추론·판단 담당
+(GPT-4o-mini)</a:t>
+            </a:r>
+          </a:p>
+        </p:txBody>
+      </p:sp>
+      <p:sp>
+        <p:nvSpPr>
+          <p:cNvPr id="9" name="Rectangle 8"/>
+          <p:cNvSpPr/>
+          <p:nvPr/>
+        </p:nvSpPr>
+        <p:spPr>
+          <a:xfrm>
+            <a:off x="3291840" y="2286000"/>
+            <a:ext cx="2743200" cy="1645920"/>
+          </a:xfrm>
+          <a:prstGeom prst="rect">
+            <a:avLst/>
+          </a:prstGeom>
+          <a:solidFill>
+            <a:srgbClr val="FFF7E6"/>
+          </a:solidFill>
+          <a:ln>
+            <a:noFill/>
+          </a:ln>
+        </p:spPr>
+        <p:style>
+          <a:lnRef idx="1">
+            <a:schemeClr val="accent1"/>
+          </a:lnRef>
+          <a:fillRef idx="3">
+            <a:schemeClr val="accent1"/>
+          </a:fillRef>
+          <a:effectRef idx="2">
+            <a:schemeClr val="accent1"/>
+          </a:effectRef>
+          <a:fontRef idx="minor">
+            <a:schemeClr val="lt1"/>
+          </a:fontRef>
+        </p:style>
+        <p:txBody>
+          <a:bodyPr rtlCol="0" anchor="ctr"/>
+          <a:lstStyle/>
+          <a:p>
+            <a:pPr algn="ctr"/>
+          </a:p>
+        </p:txBody>
+      </p:sp>
+      <p:sp>
+        <p:nvSpPr>
+          <p:cNvPr id="10" name="TextBox 9"/>
+          <p:cNvSpPr txBox="1"/>
+          <p:nvPr/>
+        </p:nvSpPr>
+        <p:spPr>
+          <a:xfrm>
+            <a:off x="3401568" y="2395728"/>
+            <a:ext cx="2523744" cy="502920"/>
+          </a:xfrm>
+          <a:prstGeom prst="rect">
+            <a:avLst/>
+          </a:prstGeom>
+          <a:noFill/>
+        </p:spPr>
+        <p:txBody>
+          <a:bodyPr wrap="square">
+            <a:spAutoFit/>
+          </a:bodyPr>
+          <a:lstStyle/>
+          <a:p>
+            <a:pPr algn="l"/>
+            <a:r>
+              <a:rPr sz="1400" b="1">
+                <a:solidFill>
+                  <a:srgbClr val="EA580C"/>
+                </a:solidFill>
+              </a:rPr>
+              <a:t>🔧 Tools</a:t>
+            </a:r>
+          </a:p>
+        </p:txBody>
+      </p:sp>
+      <p:sp>
+        <p:nvSpPr>
+          <p:cNvPr id="11" name="TextBox 10"/>
+          <p:cNvSpPr txBox="1"/>
+          <p:nvPr/>
+        </p:nvSpPr>
+        <p:spPr>
+          <a:xfrm>
+            <a:off x="3401568" y="2907792"/>
+            <a:ext cx="2523744" cy="868680"/>
+          </a:xfrm>
+          <a:prstGeom prst="rect">
+            <a:avLst/>
+          </a:prstGeom>
+          <a:noFill/>
+        </p:spPr>
+        <p:txBody>
+          <a:bodyPr wrap="square">
+            <a:spAutoFit/>
+          </a:bodyPr>
+          <a:lstStyle/>
+          <a:p>
+            <a:pPr algn="l"/>
+            <a:r>
+              <a:rPr sz="1200" b="0">
+                <a:solidFill>
+                  <a:srgbClr val="1E1E2E"/>
+                </a:solidFill>
+              </a:rPr>
+              <a:t>외부 기능 호출
+(날씨·맛집·숙소…)</a:t>
+            </a:r>
+          </a:p>
+        </p:txBody>
+      </p:sp>
+      <p:sp>
+        <p:nvSpPr>
+          <p:cNvPr id="12" name="Rectangle 11"/>
+          <p:cNvSpPr/>
+          <p:nvPr/>
+        </p:nvSpPr>
+        <p:spPr>
+          <a:xfrm>
+            <a:off x="6217920" y="2286000"/>
+            <a:ext cx="2743200" cy="1645920"/>
+          </a:xfrm>
+          <a:prstGeom prst="rect">
+            <a:avLst/>
+          </a:prstGeom>
+          <a:solidFill>
+            <a:srgbClr val="F0FFF4"/>
+          </a:solidFill>
+          <a:ln>
+            <a:noFill/>
+          </a:ln>
+        </p:spPr>
+        <p:style>
+          <a:lnRef idx="1">
+            <a:schemeClr val="accent1"/>
+          </a:lnRef>
+          <a:fillRef idx="3">
+            <a:schemeClr val="accent1"/>
+          </a:fillRef>
+          <a:effectRef idx="2">
+            <a:schemeClr val="accent1"/>
+          </a:effectRef>
+          <a:fontRef idx="minor">
+            <a:schemeClr val="lt1"/>
+          </a:fontRef>
+        </p:style>
+        <p:txBody>
+          <a:bodyPr rtlCol="0" anchor="ctr"/>
+          <a:lstStyle/>
+          <a:p>
+            <a:pPr algn="ctr"/>
+          </a:p>
+        </p:txBody>
+      </p:sp>
+      <p:sp>
+        <p:nvSpPr>
+          <p:cNvPr id="13" name="TextBox 12"/>
+          <p:cNvSpPr txBox="1"/>
+          <p:nvPr/>
+        </p:nvSpPr>
+        <p:spPr>
+          <a:xfrm>
+            <a:off x="6327648" y="2395728"/>
+            <a:ext cx="2523744" cy="502920"/>
+          </a:xfrm>
+          <a:prstGeom prst="rect">
+            <a:avLst/>
+          </a:prstGeom>
+          <a:noFill/>
+        </p:spPr>
+        <p:txBody>
+          <a:bodyPr wrap="square">
+            <a:spAutoFit/>
+          </a:bodyPr>
+          <a:lstStyle/>
+          <a:p>
+            <a:pPr algn="l"/>
+            <a:r>
+              <a:rPr sz="1400" b="1">
                 <a:solidFill>
                   <a:srgbClr val="16A34A"/>
                 </a:solidFill>
               </a:rPr>
-              <a:t>8주차  ReAct + Plan-and-Execute</a:t>
-            </a:r>
+              <a:t>💾 Memory</a:t>
+            </a:r>
+          </a:p>
+        </p:txBody>
+      </p:sp>
+      <p:sp>
+        <p:nvSpPr>
+          <p:cNvPr id="14" name="TextBox 13"/>
+          <p:cNvSpPr txBox="1"/>
+          <p:nvPr/>
+        </p:nvSpPr>
+        <p:spPr>
+          <a:xfrm>
+            <a:off x="6327648" y="2907792"/>
+            <a:ext cx="2523744" cy="868680"/>
+          </a:xfrm>
+          <a:prstGeom prst="rect">
+            <a:avLst/>
+          </a:prstGeom>
+          <a:noFill/>
+        </p:spPr>
+        <p:txBody>
+          <a:bodyPr wrap="square">
+            <a:spAutoFit/>
+          </a:bodyPr>
+          <a:lstStyle/>
+          <a:p>
+            <a:pPr algn="l"/>
+            <a:r>
+              <a:rPr sz="1200" b="0">
+                <a:solidFill>
+                  <a:srgbClr val="1E1E2E"/>
+                </a:solidFill>
+              </a:rPr>
+              <a:t>대화 히스토리
+누적·관리</a:t>
+            </a:r>
+          </a:p>
+        </p:txBody>
+      </p:sp>
+      <p:sp>
+        <p:nvSpPr>
+          <p:cNvPr id="15" name="Rectangle 14"/>
+          <p:cNvSpPr/>
+          <p:nvPr/>
+        </p:nvSpPr>
+        <p:spPr>
+          <a:xfrm>
+            <a:off x="9144000" y="2286000"/>
+            <a:ext cx="2743200" cy="1645920"/>
+          </a:xfrm>
+          <a:prstGeom prst="rect">
+            <a:avLst/>
+          </a:prstGeom>
+          <a:solidFill>
+            <a:srgbClr val="FFE5F5"/>
+          </a:solidFill>
+          <a:ln>
+            <a:noFill/>
+          </a:ln>
+        </p:spPr>
+        <p:style>
+          <a:lnRef idx="1">
+            <a:schemeClr val="accent1"/>
+          </a:lnRef>
+          <a:fillRef idx="3">
+            <a:schemeClr val="accent1"/>
+          </a:fillRef>
+          <a:effectRef idx="2">
+            <a:schemeClr val="accent1"/>
+          </a:effectRef>
+          <a:fontRef idx="minor">
+            <a:schemeClr val="lt1"/>
+          </a:fontRef>
+        </p:style>
+        <p:txBody>
+          <a:bodyPr rtlCol="0" anchor="ctr"/>
+          <a:lstStyle/>
+          <a:p>
+            <a:pPr algn="ctr"/>
           </a:p>
         </p:txBody>
       </p:sp>
@@ -3928,280 +3960,727 @@
         </p:nvSpPr>
         <p:spPr>
           <a:xfrm>
-            <a:off x="6583680" y="2057400"/>
-            <a:ext cx="4937760" cy="411480"/>
-          </a:xfrm>
-          <a:prstGeom prst="rect">
-            <a:avLst/>
-          </a:prstGeom>
-          <a:noFill/>
-        </p:spPr>
-        <p:txBody>
-          <a:bodyPr wrap="square">
-            <a:spAutoFit/>
-          </a:bodyPr>
-          <a:lstStyle/>
-          <a:p>
-            <a:pPr algn="l"/>
-            <a:r>
-              <a:rPr sz="1300" b="0">
+            <a:off x="9253728" y="2395728"/>
+            <a:ext cx="2523744" cy="502920"/>
+          </a:xfrm>
+          <a:prstGeom prst="rect">
+            <a:avLst/>
+          </a:prstGeom>
+          <a:noFill/>
+        </p:spPr>
+        <p:txBody>
+          <a:bodyPr wrap="square">
+            <a:spAutoFit/>
+          </a:bodyPr>
+          <a:lstStyle/>
+          <a:p>
+            <a:pPr algn="l"/>
+            <a:r>
+              <a:rPr sz="1400" b="1">
+                <a:solidFill>
+                  <a:srgbClr val="9B59B6"/>
+                </a:solidFill>
+              </a:rPr>
+              <a:t>🗺 Design Pattern</a:t>
+            </a:r>
+          </a:p>
+        </p:txBody>
+      </p:sp>
+      <p:sp>
+        <p:nvSpPr>
+          <p:cNvPr id="17" name="TextBox 16"/>
+          <p:cNvSpPr txBox="1"/>
+          <p:nvPr/>
+        </p:nvSpPr>
+        <p:spPr>
+          <a:xfrm>
+            <a:off x="9253728" y="2907792"/>
+            <a:ext cx="2523744" cy="868680"/>
+          </a:xfrm>
+          <a:prstGeom prst="rect">
+            <a:avLst/>
+          </a:prstGeom>
+          <a:noFill/>
+        </p:spPr>
+        <p:txBody>
+          <a:bodyPr wrap="square">
+            <a:spAutoFit/>
+          </a:bodyPr>
+          <a:lstStyle/>
+          <a:p>
+            <a:pPr algn="l"/>
+            <a:r>
+              <a:rPr sz="1200" b="0">
                 <a:solidFill>
                   <a:srgbClr val="1E1E2E"/>
                 </a:solidFill>
               </a:rPr>
-              <a:t>사용자: "제주 3박4일 완벽하게 짜줘"</a:t>
-            </a:r>
-          </a:p>
-        </p:txBody>
-      </p:sp>
-      <p:sp>
-        <p:nvSpPr>
-          <p:cNvPr id="17" name="TextBox 16"/>
-          <p:cNvSpPr txBox="1"/>
-          <p:nvPr/>
-        </p:nvSpPr>
-        <p:spPr>
-          <a:xfrm>
-            <a:off x="6583680" y="2496312"/>
-            <a:ext cx="4937760" cy="411480"/>
-          </a:xfrm>
-          <a:prstGeom prst="rect">
-            <a:avLst/>
-          </a:prstGeom>
-          <a:noFill/>
-        </p:spPr>
-        <p:txBody>
-          <a:bodyPr wrap="square">
-            <a:spAutoFit/>
-          </a:bodyPr>
-          <a:lstStyle/>
-          <a:p>
-            <a:pPr algn="l"/>
-            <a:r>
-              <a:rPr sz="1300" b="0">
+              <a:t>실행 전략 결정
+(ReAct, Plan…)</a:t>
+            </a:r>
+          </a:p>
+        </p:txBody>
+      </p:sp>
+      <p:sp>
+        <p:nvSpPr>
+          <p:cNvPr id="18" name="TextBox 17"/>
+          <p:cNvSpPr txBox="1"/>
+          <p:nvPr/>
+        </p:nvSpPr>
+        <p:spPr>
+          <a:xfrm>
+            <a:off x="457200" y="4114800"/>
+            <a:ext cx="5486400" cy="411480"/>
+          </a:xfrm>
+          <a:prstGeom prst="rect">
+            <a:avLst/>
+          </a:prstGeom>
+          <a:noFill/>
+        </p:spPr>
+        <p:txBody>
+          <a:bodyPr wrap="square">
+            <a:spAutoFit/>
+          </a:bodyPr>
+          <a:lstStyle/>
+          <a:p>
+            <a:pPr algn="l"/>
+            <a:r>
+              <a:rPr sz="1500" b="1">
                 <a:solidFill>
                   <a:srgbClr val="1E1E2E"/>
                 </a:solidFill>
               </a:rPr>
-              <a:t/>
-            </a:r>
-          </a:p>
-        </p:txBody>
-      </p:sp>
-      <p:sp>
-        <p:nvSpPr>
-          <p:cNvPr id="18" name="TextBox 17"/>
-          <p:cNvSpPr txBox="1"/>
-          <p:nvPr/>
-        </p:nvSpPr>
-        <p:spPr>
-          <a:xfrm>
-            <a:off x="6583680" y="2935224"/>
-            <a:ext cx="4937760" cy="411480"/>
-          </a:xfrm>
-          <a:prstGeom prst="rect">
-            <a:avLst/>
-          </a:prstGeom>
-          <a:noFill/>
-        </p:spPr>
-        <p:txBody>
-          <a:bodyPr wrap="square">
-            <a:spAutoFit/>
-          </a:bodyPr>
-          <a:lstStyle/>
-          <a:p>
-            <a:pPr algn="l"/>
-            <a:r>
-              <a:rPr sz="1300" b="0">
+              <a:t>Agent Design Pattern 종류</a:t>
+            </a:r>
+          </a:p>
+        </p:txBody>
+      </p:sp>
+      <p:sp>
+        <p:nvSpPr>
+          <p:cNvPr id="19" name="Rectangle 18"/>
+          <p:cNvSpPr/>
+          <p:nvPr/>
+        </p:nvSpPr>
+        <p:spPr>
+          <a:xfrm>
+            <a:off x="365760" y="4617720"/>
+            <a:ext cx="5577840" cy="658368"/>
+          </a:xfrm>
+          <a:prstGeom prst="rect">
+            <a:avLst/>
+          </a:prstGeom>
+          <a:solidFill>
+            <a:srgbClr val="FFFFFF"/>
+          </a:solidFill>
+          <a:ln>
+            <a:noFill/>
+          </a:ln>
+        </p:spPr>
+        <p:style>
+          <a:lnRef idx="1">
+            <a:schemeClr val="accent1"/>
+          </a:lnRef>
+          <a:fillRef idx="3">
+            <a:schemeClr val="accent1"/>
+          </a:fillRef>
+          <a:effectRef idx="2">
+            <a:schemeClr val="accent1"/>
+          </a:effectRef>
+          <a:fontRef idx="minor">
+            <a:schemeClr val="lt1"/>
+          </a:fontRef>
+        </p:style>
+        <p:txBody>
+          <a:bodyPr rtlCol="0" anchor="ctr"/>
+          <a:lstStyle/>
+          <a:p>
+            <a:pPr algn="ctr"/>
+          </a:p>
+        </p:txBody>
+      </p:sp>
+      <p:sp>
+        <p:nvSpPr>
+          <p:cNvPr id="20" name="Rectangle 19"/>
+          <p:cNvSpPr/>
+          <p:nvPr/>
+        </p:nvSpPr>
+        <p:spPr>
+          <a:xfrm>
+            <a:off x="365760" y="4617720"/>
+            <a:ext cx="1645920" cy="658368"/>
+          </a:xfrm>
+          <a:prstGeom prst="rect">
+            <a:avLst/>
+          </a:prstGeom>
+          <a:solidFill>
+            <a:srgbClr val="265DC8"/>
+          </a:solidFill>
+          <a:ln>
+            <a:noFill/>
+          </a:ln>
+        </p:spPr>
+        <p:style>
+          <a:lnRef idx="1">
+            <a:schemeClr val="accent1"/>
+          </a:lnRef>
+          <a:fillRef idx="3">
+            <a:schemeClr val="accent1"/>
+          </a:fillRef>
+          <a:effectRef idx="2">
+            <a:schemeClr val="accent1"/>
+          </a:effectRef>
+          <a:fontRef idx="minor">
+            <a:schemeClr val="lt1"/>
+          </a:fontRef>
+        </p:style>
+        <p:txBody>
+          <a:bodyPr rtlCol="0" anchor="ctr"/>
+          <a:lstStyle/>
+          <a:p>
+            <a:pPr algn="ctr"/>
+          </a:p>
+        </p:txBody>
+      </p:sp>
+      <p:sp>
+        <p:nvSpPr>
+          <p:cNvPr id="21" name="TextBox 20"/>
+          <p:cNvSpPr txBox="1"/>
+          <p:nvPr/>
+        </p:nvSpPr>
+        <p:spPr>
+          <a:xfrm>
+            <a:off x="457200" y="4754880"/>
+            <a:ext cx="1463040" cy="411480"/>
+          </a:xfrm>
+          <a:prstGeom prst="rect">
+            <a:avLst/>
+          </a:prstGeom>
+          <a:noFill/>
+        </p:spPr>
+        <p:txBody>
+          <a:bodyPr wrap="square">
+            <a:spAutoFit/>
+          </a:bodyPr>
+          <a:lstStyle/>
+          <a:p>
+            <a:pPr algn="l"/>
+            <a:r>
+              <a:rPr sz="1200" b="1">
+                <a:solidFill>
+                  <a:srgbClr val="FFFFFF"/>
+                </a:solidFill>
+              </a:rPr>
+              <a:t>ReAct</a:t>
+            </a:r>
+          </a:p>
+        </p:txBody>
+      </p:sp>
+      <p:sp>
+        <p:nvSpPr>
+          <p:cNvPr id="22" name="TextBox 21"/>
+          <p:cNvSpPr txBox="1"/>
+          <p:nvPr/>
+        </p:nvSpPr>
+        <p:spPr>
+          <a:xfrm>
+            <a:off x="2148840" y="4782312"/>
+            <a:ext cx="3657600" cy="411480"/>
+          </a:xfrm>
+          <a:prstGeom prst="rect">
+            <a:avLst/>
+          </a:prstGeom>
+          <a:noFill/>
+        </p:spPr>
+        <p:txBody>
+          <a:bodyPr wrap="square">
+            <a:spAutoFit/>
+          </a:bodyPr>
+          <a:lstStyle/>
+          <a:p>
+            <a:pPr algn="l"/>
+            <a:r>
+              <a:rPr sz="1200" b="0">
                 <a:solidFill>
                   <a:srgbClr val="1E1E2E"/>
                 </a:solidFill>
               </a:rPr>
-              <a:t>AI: 계획 수립 → 날씨 → 관광지</a:t>
-            </a:r>
-          </a:p>
-        </p:txBody>
-      </p:sp>
-      <p:sp>
-        <p:nvSpPr>
-          <p:cNvPr id="19" name="TextBox 18"/>
-          <p:cNvSpPr txBox="1"/>
-          <p:nvPr/>
-        </p:nvSpPr>
-        <p:spPr>
-          <a:xfrm>
-            <a:off x="6583680" y="3374136"/>
-            <a:ext cx="4937760" cy="411480"/>
-          </a:xfrm>
-          <a:prstGeom prst="rect">
-            <a:avLst/>
-          </a:prstGeom>
-          <a:noFill/>
-        </p:spPr>
-        <p:txBody>
-          <a:bodyPr wrap="square">
-            <a:spAutoFit/>
-          </a:bodyPr>
-          <a:lstStyle/>
-          <a:p>
-            <a:pPr algn="l"/>
-            <a:r>
-              <a:rPr sz="1300" b="0">
+              <a:t>생각하고 행동하며 반복 → 유연한 실행</a:t>
+            </a:r>
+          </a:p>
+        </p:txBody>
+      </p:sp>
+      <p:sp>
+        <p:nvSpPr>
+          <p:cNvPr id="23" name="Rectangle 22"/>
+          <p:cNvSpPr/>
+          <p:nvPr/>
+        </p:nvSpPr>
+        <p:spPr>
+          <a:xfrm>
+            <a:off x="6217920" y="4617720"/>
+            <a:ext cx="5577840" cy="658368"/>
+          </a:xfrm>
+          <a:prstGeom prst="rect">
+            <a:avLst/>
+          </a:prstGeom>
+          <a:solidFill>
+            <a:srgbClr val="FFFFFF"/>
+          </a:solidFill>
+          <a:ln>
+            <a:noFill/>
+          </a:ln>
+        </p:spPr>
+        <p:style>
+          <a:lnRef idx="1">
+            <a:schemeClr val="accent1"/>
+          </a:lnRef>
+          <a:fillRef idx="3">
+            <a:schemeClr val="accent1"/>
+          </a:fillRef>
+          <a:effectRef idx="2">
+            <a:schemeClr val="accent1"/>
+          </a:effectRef>
+          <a:fontRef idx="minor">
+            <a:schemeClr val="lt1"/>
+          </a:fontRef>
+        </p:style>
+        <p:txBody>
+          <a:bodyPr rtlCol="0" anchor="ctr"/>
+          <a:lstStyle/>
+          <a:p>
+            <a:pPr algn="ctr"/>
+          </a:p>
+        </p:txBody>
+      </p:sp>
+      <p:sp>
+        <p:nvSpPr>
+          <p:cNvPr id="24" name="Rectangle 23"/>
+          <p:cNvSpPr/>
+          <p:nvPr/>
+        </p:nvSpPr>
+        <p:spPr>
+          <a:xfrm>
+            <a:off x="6217920" y="4617720"/>
+            <a:ext cx="1645920" cy="658368"/>
+          </a:xfrm>
+          <a:prstGeom prst="rect">
+            <a:avLst/>
+          </a:prstGeom>
+          <a:solidFill>
+            <a:srgbClr val="16A34A"/>
+          </a:solidFill>
+          <a:ln>
+            <a:noFill/>
+          </a:ln>
+        </p:spPr>
+        <p:style>
+          <a:lnRef idx="1">
+            <a:schemeClr val="accent1"/>
+          </a:lnRef>
+          <a:fillRef idx="3">
+            <a:schemeClr val="accent1"/>
+          </a:fillRef>
+          <a:effectRef idx="2">
+            <a:schemeClr val="accent1"/>
+          </a:effectRef>
+          <a:fontRef idx="minor">
+            <a:schemeClr val="lt1"/>
+          </a:fontRef>
+        </p:style>
+        <p:txBody>
+          <a:bodyPr rtlCol="0" anchor="ctr"/>
+          <a:lstStyle/>
+          <a:p>
+            <a:pPr algn="ctr"/>
+          </a:p>
+        </p:txBody>
+      </p:sp>
+      <p:sp>
+        <p:nvSpPr>
+          <p:cNvPr id="25" name="TextBox 24"/>
+          <p:cNvSpPr txBox="1"/>
+          <p:nvPr/>
+        </p:nvSpPr>
+        <p:spPr>
+          <a:xfrm>
+            <a:off x="6309360" y="4754880"/>
+            <a:ext cx="1463040" cy="411480"/>
+          </a:xfrm>
+          <a:prstGeom prst="rect">
+            <a:avLst/>
+          </a:prstGeom>
+          <a:noFill/>
+        </p:spPr>
+        <p:txBody>
+          <a:bodyPr wrap="square">
+            <a:spAutoFit/>
+          </a:bodyPr>
+          <a:lstStyle/>
+          <a:p>
+            <a:pPr algn="l"/>
+            <a:r>
+              <a:rPr sz="1200" b="1">
+                <a:solidFill>
+                  <a:srgbClr val="FFFFFF"/>
+                </a:solidFill>
+              </a:rPr>
+              <a:t>Plan-and-Execute</a:t>
+            </a:r>
+          </a:p>
+        </p:txBody>
+      </p:sp>
+      <p:sp>
+        <p:nvSpPr>
+          <p:cNvPr id="26" name="TextBox 25"/>
+          <p:cNvSpPr txBox="1"/>
+          <p:nvPr/>
+        </p:nvSpPr>
+        <p:spPr>
+          <a:xfrm>
+            <a:off x="8001000" y="4782312"/>
+            <a:ext cx="3657600" cy="411480"/>
+          </a:xfrm>
+          <a:prstGeom prst="rect">
+            <a:avLst/>
+          </a:prstGeom>
+          <a:noFill/>
+        </p:spPr>
+        <p:txBody>
+          <a:bodyPr wrap="square">
+            <a:spAutoFit/>
+          </a:bodyPr>
+          <a:lstStyle/>
+          <a:p>
+            <a:pPr algn="l"/>
+            <a:r>
+              <a:rPr sz="1200" b="0">
                 <a:solidFill>
                   <a:srgbClr val="1E1E2E"/>
                 </a:solidFill>
               </a:rPr>
-              <a:t>    → 맛집 → 숙소 → 교통</a:t>
-            </a:r>
-          </a:p>
-        </p:txBody>
-      </p:sp>
-      <p:sp>
-        <p:nvSpPr>
-          <p:cNvPr id="20" name="TextBox 19"/>
-          <p:cNvSpPr txBox="1"/>
-          <p:nvPr/>
-        </p:nvSpPr>
-        <p:spPr>
-          <a:xfrm>
-            <a:off x="6583680" y="3813048"/>
-            <a:ext cx="4937760" cy="411480"/>
-          </a:xfrm>
-          <a:prstGeom prst="rect">
-            <a:avLst/>
-          </a:prstGeom>
-          <a:noFill/>
-        </p:spPr>
-        <p:txBody>
-          <a:bodyPr wrap="square">
-            <a:spAutoFit/>
-          </a:bodyPr>
-          <a:lstStyle/>
-          <a:p>
-            <a:pPr algn="l"/>
-            <a:r>
-              <a:rPr sz="1300" b="0">
+              <a:t>먼저 계획, 그 다음 실행 → 체계적</a:t>
+            </a:r>
+          </a:p>
+        </p:txBody>
+      </p:sp>
+      <p:sp>
+        <p:nvSpPr>
+          <p:cNvPr id="27" name="Rectangle 26"/>
+          <p:cNvSpPr/>
+          <p:nvPr/>
+        </p:nvSpPr>
+        <p:spPr>
+          <a:xfrm>
+            <a:off x="365760" y="5422392"/>
+            <a:ext cx="5577840" cy="658368"/>
+          </a:xfrm>
+          <a:prstGeom prst="rect">
+            <a:avLst/>
+          </a:prstGeom>
+          <a:solidFill>
+            <a:srgbClr val="FFFFFF"/>
+          </a:solidFill>
+          <a:ln>
+            <a:noFill/>
+          </a:ln>
+        </p:spPr>
+        <p:style>
+          <a:lnRef idx="1">
+            <a:schemeClr val="accent1"/>
+          </a:lnRef>
+          <a:fillRef idx="3">
+            <a:schemeClr val="accent1"/>
+          </a:fillRef>
+          <a:effectRef idx="2">
+            <a:schemeClr val="accent1"/>
+          </a:effectRef>
+          <a:fontRef idx="minor">
+            <a:schemeClr val="lt1"/>
+          </a:fontRef>
+        </p:style>
+        <p:txBody>
+          <a:bodyPr rtlCol="0" anchor="ctr"/>
+          <a:lstStyle/>
+          <a:p>
+            <a:pPr algn="ctr"/>
+          </a:p>
+        </p:txBody>
+      </p:sp>
+      <p:sp>
+        <p:nvSpPr>
+          <p:cNvPr id="28" name="Rectangle 27"/>
+          <p:cNvSpPr/>
+          <p:nvPr/>
+        </p:nvSpPr>
+        <p:spPr>
+          <a:xfrm>
+            <a:off x="365760" y="5422392"/>
+            <a:ext cx="1645920" cy="658368"/>
+          </a:xfrm>
+          <a:prstGeom prst="rect">
+            <a:avLst/>
+          </a:prstGeom>
+          <a:solidFill>
+            <a:srgbClr val="EA580C"/>
+          </a:solidFill>
+          <a:ln>
+            <a:noFill/>
+          </a:ln>
+        </p:spPr>
+        <p:style>
+          <a:lnRef idx="1">
+            <a:schemeClr val="accent1"/>
+          </a:lnRef>
+          <a:fillRef idx="3">
+            <a:schemeClr val="accent1"/>
+          </a:fillRef>
+          <a:effectRef idx="2">
+            <a:schemeClr val="accent1"/>
+          </a:effectRef>
+          <a:fontRef idx="minor">
+            <a:schemeClr val="lt1"/>
+          </a:fontRef>
+        </p:style>
+        <p:txBody>
+          <a:bodyPr rtlCol="0" anchor="ctr"/>
+          <a:lstStyle/>
+          <a:p>
+            <a:pPr algn="ctr"/>
+          </a:p>
+        </p:txBody>
+      </p:sp>
+      <p:sp>
+        <p:nvSpPr>
+          <p:cNvPr id="29" name="TextBox 28"/>
+          <p:cNvSpPr txBox="1"/>
+          <p:nvPr/>
+        </p:nvSpPr>
+        <p:spPr>
+          <a:xfrm>
+            <a:off x="457200" y="5559552"/>
+            <a:ext cx="1463040" cy="411480"/>
+          </a:xfrm>
+          <a:prstGeom prst="rect">
+            <a:avLst/>
+          </a:prstGeom>
+          <a:noFill/>
+        </p:spPr>
+        <p:txBody>
+          <a:bodyPr wrap="square">
+            <a:spAutoFit/>
+          </a:bodyPr>
+          <a:lstStyle/>
+          <a:p>
+            <a:pPr algn="l"/>
+            <a:r>
+              <a:rPr sz="1200" b="1">
+                <a:solidFill>
+                  <a:srgbClr val="FFFFFF"/>
+                </a:solidFill>
+              </a:rPr>
+              <a:t>Tool Use</a:t>
+            </a:r>
+          </a:p>
+        </p:txBody>
+      </p:sp>
+      <p:sp>
+        <p:nvSpPr>
+          <p:cNvPr id="30" name="TextBox 29"/>
+          <p:cNvSpPr txBox="1"/>
+          <p:nvPr/>
+        </p:nvSpPr>
+        <p:spPr>
+          <a:xfrm>
+            <a:off x="2148840" y="5586983"/>
+            <a:ext cx="3657600" cy="411480"/>
+          </a:xfrm>
+          <a:prstGeom prst="rect">
+            <a:avLst/>
+          </a:prstGeom>
+          <a:noFill/>
+        </p:spPr>
+        <p:txBody>
+          <a:bodyPr wrap="square">
+            <a:spAutoFit/>
+          </a:bodyPr>
+          <a:lstStyle/>
+          <a:p>
+            <a:pPr algn="l"/>
+            <a:r>
+              <a:rPr sz="1200" b="0">
                 <a:solidFill>
                   <a:srgbClr val="1E1E2E"/>
                 </a:solidFill>
               </a:rPr>
-              <a:t>    → 예산 → 일정표 ...</a:t>
-            </a:r>
-          </a:p>
-        </p:txBody>
-      </p:sp>
-      <p:sp>
-        <p:nvSpPr>
-          <p:cNvPr id="21" name="TextBox 20"/>
-          <p:cNvSpPr txBox="1"/>
-          <p:nvPr/>
-        </p:nvSpPr>
-        <p:spPr>
-          <a:xfrm>
-            <a:off x="6583680" y="4251960"/>
-            <a:ext cx="4937760" cy="411480"/>
-          </a:xfrm>
-          <a:prstGeom prst="rect">
-            <a:avLst/>
-          </a:prstGeom>
-          <a:noFill/>
-        </p:spPr>
-        <p:txBody>
-          <a:bodyPr wrap="square">
-            <a:spAutoFit/>
-          </a:bodyPr>
-          <a:lstStyle/>
-          <a:p>
-            <a:pPr algn="l"/>
-            <a:r>
-              <a:rPr sz="1300" b="0">
+              <a:t>외부 도구 호출 → 실제 데이터 사용</a:t>
+            </a:r>
+          </a:p>
+        </p:txBody>
+      </p:sp>
+      <p:sp>
+        <p:nvSpPr>
+          <p:cNvPr id="31" name="Rectangle 30"/>
+          <p:cNvSpPr/>
+          <p:nvPr/>
+        </p:nvSpPr>
+        <p:spPr>
+          <a:xfrm>
+            <a:off x="6217920" y="5422392"/>
+            <a:ext cx="5577840" cy="658368"/>
+          </a:xfrm>
+          <a:prstGeom prst="rect">
+            <a:avLst/>
+          </a:prstGeom>
+          <a:solidFill>
+            <a:srgbClr val="FFFFFF"/>
+          </a:solidFill>
+          <a:ln>
+            <a:noFill/>
+          </a:ln>
+        </p:spPr>
+        <p:style>
+          <a:lnRef idx="1">
+            <a:schemeClr val="accent1"/>
+          </a:lnRef>
+          <a:fillRef idx="3">
+            <a:schemeClr val="accent1"/>
+          </a:fillRef>
+          <a:effectRef idx="2">
+            <a:schemeClr val="accent1"/>
+          </a:effectRef>
+          <a:fontRef idx="minor">
+            <a:schemeClr val="lt1"/>
+          </a:fontRef>
+        </p:style>
+        <p:txBody>
+          <a:bodyPr rtlCol="0" anchor="ctr"/>
+          <a:lstStyle/>
+          <a:p>
+            <a:pPr algn="ctr"/>
+          </a:p>
+        </p:txBody>
+      </p:sp>
+      <p:sp>
+        <p:nvSpPr>
+          <p:cNvPr id="32" name="Rectangle 31"/>
+          <p:cNvSpPr/>
+          <p:nvPr/>
+        </p:nvSpPr>
+        <p:spPr>
+          <a:xfrm>
+            <a:off x="6217920" y="5422392"/>
+            <a:ext cx="1645920" cy="658368"/>
+          </a:xfrm>
+          <a:prstGeom prst="rect">
+            <a:avLst/>
+          </a:prstGeom>
+          <a:solidFill>
+            <a:srgbClr val="9B59B6"/>
+          </a:solidFill>
+          <a:ln>
+            <a:noFill/>
+          </a:ln>
+        </p:spPr>
+        <p:style>
+          <a:lnRef idx="1">
+            <a:schemeClr val="accent1"/>
+          </a:lnRef>
+          <a:fillRef idx="3">
+            <a:schemeClr val="accent1"/>
+          </a:fillRef>
+          <a:effectRef idx="2">
+            <a:schemeClr val="accent1"/>
+          </a:effectRef>
+          <a:fontRef idx="minor">
+            <a:schemeClr val="lt1"/>
+          </a:fontRef>
+        </p:style>
+        <p:txBody>
+          <a:bodyPr rtlCol="0" anchor="ctr"/>
+          <a:lstStyle/>
+          <a:p>
+            <a:pPr algn="ctr"/>
+          </a:p>
+        </p:txBody>
+      </p:sp>
+      <p:sp>
+        <p:nvSpPr>
+          <p:cNvPr id="33" name="TextBox 32"/>
+          <p:cNvSpPr txBox="1"/>
+          <p:nvPr/>
+        </p:nvSpPr>
+        <p:spPr>
+          <a:xfrm>
+            <a:off x="6309360" y="5559552"/>
+            <a:ext cx="1463040" cy="411480"/>
+          </a:xfrm>
+          <a:prstGeom prst="rect">
+            <a:avLst/>
+          </a:prstGeom>
+          <a:noFill/>
+        </p:spPr>
+        <p:txBody>
+          <a:bodyPr wrap="square">
+            <a:spAutoFit/>
+          </a:bodyPr>
+          <a:lstStyle/>
+          <a:p>
+            <a:pPr algn="l"/>
+            <a:r>
+              <a:rPr sz="1200" b="1">
+                <a:solidFill>
+                  <a:srgbClr val="FFFFFF"/>
+                </a:solidFill>
+              </a:rPr>
+              <a:t>CoT</a:t>
+            </a:r>
+          </a:p>
+        </p:txBody>
+      </p:sp>
+      <p:sp>
+        <p:nvSpPr>
+          <p:cNvPr id="34" name="TextBox 33"/>
+          <p:cNvSpPr txBox="1"/>
+          <p:nvPr/>
+        </p:nvSpPr>
+        <p:spPr>
+          <a:xfrm>
+            <a:off x="8001000" y="5586983"/>
+            <a:ext cx="3657600" cy="411480"/>
+          </a:xfrm>
+          <a:prstGeom prst="rect">
+            <a:avLst/>
+          </a:prstGeom>
+          <a:noFill/>
+        </p:spPr>
+        <p:txBody>
+          <a:bodyPr wrap="square">
+            <a:spAutoFit/>
+          </a:bodyPr>
+          <a:lstStyle/>
+          <a:p>
+            <a:pPr algn="l"/>
+            <a:r>
+              <a:rPr sz="1200" b="0">
                 <a:solidFill>
                   <a:srgbClr val="1E1E2E"/>
                 </a:solidFill>
               </a:rPr>
-              <a:t/>
-            </a:r>
-          </a:p>
-        </p:txBody>
-      </p:sp>
-      <p:sp>
-        <p:nvSpPr>
-          <p:cNvPr id="22" name="TextBox 21"/>
-          <p:cNvSpPr txBox="1"/>
-          <p:nvPr/>
-        </p:nvSpPr>
-        <p:spPr>
-          <a:xfrm>
-            <a:off x="6583680" y="4690872"/>
-            <a:ext cx="4937760" cy="411480"/>
-          </a:xfrm>
-          <a:prstGeom prst="rect">
-            <a:avLst/>
-          </a:prstGeom>
-          <a:noFill/>
-        </p:spPr>
-        <p:txBody>
-          <a:bodyPr wrap="square">
-            <a:spAutoFit/>
-          </a:bodyPr>
-          <a:lstStyle/>
-          <a:p>
-            <a:pPr algn="l"/>
-            <a:r>
-              <a:rPr sz="1300" b="1">
-                <a:solidFill>
-                  <a:srgbClr val="16A34A"/>
-                </a:solidFill>
-              </a:rPr>
-              <a:t>✔ 복잡한 질문 자율 해결</a:t>
-            </a:r>
-          </a:p>
-        </p:txBody>
-      </p:sp>
-      <p:sp>
-        <p:nvSpPr>
-          <p:cNvPr id="23" name="TextBox 22"/>
-          <p:cNvSpPr txBox="1"/>
-          <p:nvPr/>
-        </p:nvSpPr>
-        <p:spPr>
-          <a:xfrm>
-            <a:off x="6583680" y="5129783"/>
-            <a:ext cx="4937760" cy="411480"/>
-          </a:xfrm>
-          <a:prstGeom prst="rect">
-            <a:avLst/>
-          </a:prstGeom>
-          <a:noFill/>
-        </p:spPr>
-        <p:txBody>
-          <a:bodyPr wrap="square">
-            <a:spAutoFit/>
-          </a:bodyPr>
-          <a:lstStyle/>
-          <a:p>
-            <a:pPr algn="l"/>
-            <a:r>
-              <a:rPr sz="1300" b="1">
-                <a:solidFill>
-                  <a:srgbClr val="16A34A"/>
-                </a:solidFill>
-              </a:rPr>
-              <a:t>✔ 10개 도구 스스로 조합</a:t>
-            </a:r>
-          </a:p>
-        </p:txBody>
-      </p:sp>
-      <p:sp>
-        <p:nvSpPr>
-          <p:cNvPr id="24" name="TextBox 23"/>
-          <p:cNvSpPr txBox="1"/>
-          <p:nvPr/>
-        </p:nvSpPr>
-        <p:spPr>
-          <a:xfrm>
-            <a:off x="457200" y="5943600"/>
-            <a:ext cx="11247120" cy="457200"/>
+              <a:t>Chain of Thought → 단계별 추론</a:t>
+            </a:r>
+          </a:p>
+        </p:txBody>
+      </p:sp>
+      <p:sp>
+        <p:nvSpPr>
+          <p:cNvPr id="35" name="TextBox 34"/>
+          <p:cNvSpPr txBox="1"/>
+          <p:nvPr/>
+        </p:nvSpPr>
+        <p:spPr>
+          <a:xfrm>
+            <a:off x="365760" y="6263640"/>
+            <a:ext cx="11430000" cy="365760"/>
           </a:xfrm>
           <a:prstGeom prst="rect">
             <a:avLst/>
@@ -4216,12 +4695,12 @@
           <a:p>
             <a:pPr algn="ctr"/>
             <a:r>
-              <a:rPr sz="1500" b="1">
+              <a:rPr sz="1400" b="1">
                 <a:solidFill>
                   <a:srgbClr val="265DC8"/>
                 </a:solidFill>
               </a:rPr>
-              <a:t>핵심 차이:  while 루프 하나가 추가되어 AI가 스스로 반복 판단</a:t>
+              <a:t>이번 주: ReAct + Plan-and-Execute 두 패턴을 조합해서 구현</a:t>
             </a:r>
           </a:p>
         </p:txBody>
@@ -4319,67 +4798,32 @@
           <a:p>
             <a:pPr algn="l"/>
             <a:r>
-              <a:rPr sz="2800" b="1">
+              <a:rPr sz="3000" b="1">
                 <a:solidFill>
                   <a:srgbClr val="FFFFFF"/>
                 </a:solidFill>
               </a:rPr>
-              <a:t>Plan-and-Execute: 계획 먼저, 실행 나중</a:t>
-            </a:r>
-          </a:p>
-        </p:txBody>
-      </p:sp>
-      <p:sp>
-        <p:nvSpPr>
-          <p:cNvPr id="4" name="TextBox 3"/>
-          <p:cNvSpPr txBox="1"/>
+              <a:t>7주차 vs 8주차</a:t>
+            </a:r>
+          </a:p>
+        </p:txBody>
+      </p:sp>
+      <p:sp>
+        <p:nvSpPr>
+          <p:cNvPr id="4" name="Rectangle 3"/>
+          <p:cNvSpPr/>
           <p:nvPr/>
         </p:nvSpPr>
         <p:spPr>
           <a:xfrm>
             <a:off x="457200" y="1371600"/>
-            <a:ext cx="5029200" cy="731520"/>
-          </a:xfrm>
-          <a:prstGeom prst="rect">
-            <a:avLst/>
-          </a:prstGeom>
-          <a:noFill/>
-        </p:spPr>
-        <p:txBody>
-          <a:bodyPr wrap="square">
-            <a:spAutoFit/>
-          </a:bodyPr>
-          <a:lstStyle/>
-          <a:p>
-            <a:pPr algn="l"/>
-            <a:r>
-              <a:rPr sz="1500" b="0">
-                <a:solidFill>
-                  <a:srgbClr val="1E1E2E"/>
-                </a:solidFill>
-              </a:rPr>
-              <a:t>사용자 질문을 받으면 AI가
-먼저 전체 계획을 JSON으로 수립</a:t>
-            </a:r>
-          </a:p>
-        </p:txBody>
-      </p:sp>
-      <p:sp>
-        <p:nvSpPr>
-          <p:cNvPr id="5" name="Rectangle 4"/>
-          <p:cNvSpPr/>
-          <p:nvPr/>
-        </p:nvSpPr>
-        <p:spPr>
-          <a:xfrm>
-            <a:off x="457200" y="2194560"/>
-            <a:ext cx="2743200" cy="502920"/>
+            <a:ext cx="5303520" cy="4389120"/>
           </a:xfrm>
           <a:prstGeom prst="rect">
             <a:avLst/>
           </a:prstGeom>
           <a:solidFill>
-            <a:srgbClr val="265DC8"/>
+            <a:srgbClr val="FFE5E5"/>
           </a:solidFill>
           <a:ln>
             <a:noFill/>
@@ -4409,54 +4853,326 @@
       </p:sp>
       <p:sp>
         <p:nvSpPr>
+          <p:cNvPr id="5" name="TextBox 4"/>
+          <p:cNvSpPr txBox="1"/>
+          <p:nvPr/>
+        </p:nvSpPr>
+        <p:spPr>
+          <a:xfrm>
+            <a:off x="640080" y="1508760"/>
+            <a:ext cx="4937760" cy="457200"/>
+          </a:xfrm>
+          <a:prstGeom prst="rect">
+            <a:avLst/>
+          </a:prstGeom>
+          <a:noFill/>
+        </p:spPr>
+        <p:txBody>
+          <a:bodyPr wrap="square">
+            <a:spAutoFit/>
+          </a:bodyPr>
+          <a:lstStyle/>
+          <a:p>
+            <a:pPr algn="l"/>
+            <a:r>
+              <a:rPr sz="1600" b="1">
+                <a:solidFill>
+                  <a:srgbClr val="CC0000"/>
+                </a:solidFill>
+              </a:rPr>
+              <a:t>7주차  Function Calling</a:t>
+            </a:r>
+          </a:p>
+        </p:txBody>
+      </p:sp>
+      <p:sp>
+        <p:nvSpPr>
           <p:cNvPr id="6" name="TextBox 5"/>
           <p:cNvSpPr txBox="1"/>
           <p:nvPr/>
         </p:nvSpPr>
         <p:spPr>
           <a:xfrm>
-            <a:off x="548640" y="2267712"/>
-            <a:ext cx="2560320" cy="365760"/>
-          </a:xfrm>
-          <a:prstGeom prst="rect">
-            <a:avLst/>
-          </a:prstGeom>
-          <a:noFill/>
-        </p:spPr>
-        <p:txBody>
-          <a:bodyPr wrap="square">
-            <a:spAutoFit/>
-          </a:bodyPr>
-          <a:lstStyle/>
-          <a:p>
-            <a:pPr algn="l"/>
-            <a:r>
-              <a:rPr sz="1200" b="1">
-                <a:solidFill>
-                  <a:srgbClr val="FFFFFF"/>
-                </a:solidFill>
-              </a:rPr>
-              <a:t>1. 날씨 및 여행 시기 확인</a:t>
-            </a:r>
-          </a:p>
-        </p:txBody>
-      </p:sp>
-      <p:sp>
-        <p:nvSpPr>
-          <p:cNvPr id="7" name="Rectangle 6"/>
+            <a:off x="640080" y="2057400"/>
+            <a:ext cx="4937760" cy="411480"/>
+          </a:xfrm>
+          <a:prstGeom prst="rect">
+            <a:avLst/>
+          </a:prstGeom>
+          <a:noFill/>
+        </p:spPr>
+        <p:txBody>
+          <a:bodyPr wrap="square">
+            <a:spAutoFit/>
+          </a:bodyPr>
+          <a:lstStyle/>
+          <a:p>
+            <a:pPr algn="l"/>
+            <a:r>
+              <a:rPr sz="1300" b="0">
+                <a:solidFill>
+                  <a:srgbClr val="1E1E2E"/>
+                </a:solidFill>
+              </a:rPr>
+              <a:t>사용자: "제주도 날씨 알려줘"</a:t>
+            </a:r>
+          </a:p>
+        </p:txBody>
+      </p:sp>
+      <p:sp>
+        <p:nvSpPr>
+          <p:cNvPr id="7" name="TextBox 6"/>
+          <p:cNvSpPr txBox="1"/>
+          <p:nvPr/>
+        </p:nvSpPr>
+        <p:spPr>
+          <a:xfrm>
+            <a:off x="640080" y="2496312"/>
+            <a:ext cx="4937760" cy="411480"/>
+          </a:xfrm>
+          <a:prstGeom prst="rect">
+            <a:avLst/>
+          </a:prstGeom>
+          <a:noFill/>
+        </p:spPr>
+        <p:txBody>
+          <a:bodyPr wrap="square">
+            <a:spAutoFit/>
+          </a:bodyPr>
+          <a:lstStyle/>
+          <a:p>
+            <a:pPr algn="l"/>
+            <a:r>
+              <a:rPr sz="1300" b="0">
+                <a:solidFill>
+                  <a:srgbClr val="1E1E2E"/>
+                </a:solidFill>
+              </a:rPr>
+              <a:t/>
+            </a:r>
+          </a:p>
+        </p:txBody>
+      </p:sp>
+      <p:sp>
+        <p:nvSpPr>
+          <p:cNvPr id="8" name="TextBox 7"/>
+          <p:cNvSpPr txBox="1"/>
+          <p:nvPr/>
+        </p:nvSpPr>
+        <p:spPr>
+          <a:xfrm>
+            <a:off x="640080" y="2935224"/>
+            <a:ext cx="4937760" cy="411480"/>
+          </a:xfrm>
+          <a:prstGeom prst="rect">
+            <a:avLst/>
+          </a:prstGeom>
+          <a:noFill/>
+        </p:spPr>
+        <p:txBody>
+          <a:bodyPr wrap="square">
+            <a:spAutoFit/>
+          </a:bodyPr>
+          <a:lstStyle/>
+          <a:p>
+            <a:pPr algn="l"/>
+            <a:r>
+              <a:rPr sz="1300" b="0">
+                <a:solidFill>
+                  <a:srgbClr val="1E1E2E"/>
+                </a:solidFill>
+              </a:rPr>
+              <a:t>AI: get_weather 선택</a:t>
+            </a:r>
+          </a:p>
+        </p:txBody>
+      </p:sp>
+      <p:sp>
+        <p:nvSpPr>
+          <p:cNvPr id="9" name="TextBox 8"/>
+          <p:cNvSpPr txBox="1"/>
+          <p:nvPr/>
+        </p:nvSpPr>
+        <p:spPr>
+          <a:xfrm>
+            <a:off x="640080" y="3374136"/>
+            <a:ext cx="4937760" cy="411480"/>
+          </a:xfrm>
+          <a:prstGeom prst="rect">
+            <a:avLst/>
+          </a:prstGeom>
+          <a:noFill/>
+        </p:spPr>
+        <p:txBody>
+          <a:bodyPr wrap="square">
+            <a:spAutoFit/>
+          </a:bodyPr>
+          <a:lstStyle/>
+          <a:p>
+            <a:pPr algn="l"/>
+            <a:r>
+              <a:rPr sz="1300" b="0">
+                <a:solidFill>
+                  <a:srgbClr val="1E1E2E"/>
+                </a:solidFill>
+              </a:rPr>
+              <a:t>→ 함수 1번 호출</a:t>
+            </a:r>
+          </a:p>
+        </p:txBody>
+      </p:sp>
+      <p:sp>
+        <p:nvSpPr>
+          <p:cNvPr id="10" name="TextBox 9"/>
+          <p:cNvSpPr txBox="1"/>
+          <p:nvPr/>
+        </p:nvSpPr>
+        <p:spPr>
+          <a:xfrm>
+            <a:off x="640080" y="3813048"/>
+            <a:ext cx="4937760" cy="411480"/>
+          </a:xfrm>
+          <a:prstGeom prst="rect">
+            <a:avLst/>
+          </a:prstGeom>
+          <a:noFill/>
+        </p:spPr>
+        <p:txBody>
+          <a:bodyPr wrap="square">
+            <a:spAutoFit/>
+          </a:bodyPr>
+          <a:lstStyle/>
+          <a:p>
+            <a:pPr algn="l"/>
+            <a:r>
+              <a:rPr sz="1300" b="0">
+                <a:solidFill>
+                  <a:srgbClr val="1E1E2E"/>
+                </a:solidFill>
+              </a:rPr>
+              <a:t>→ 끝</a:t>
+            </a:r>
+          </a:p>
+        </p:txBody>
+      </p:sp>
+      <p:sp>
+        <p:nvSpPr>
+          <p:cNvPr id="11" name="TextBox 10"/>
+          <p:cNvSpPr txBox="1"/>
+          <p:nvPr/>
+        </p:nvSpPr>
+        <p:spPr>
+          <a:xfrm>
+            <a:off x="640080" y="4251960"/>
+            <a:ext cx="4937760" cy="411480"/>
+          </a:xfrm>
+          <a:prstGeom prst="rect">
+            <a:avLst/>
+          </a:prstGeom>
+          <a:noFill/>
+        </p:spPr>
+        <p:txBody>
+          <a:bodyPr wrap="square">
+            <a:spAutoFit/>
+          </a:bodyPr>
+          <a:lstStyle/>
+          <a:p>
+            <a:pPr algn="l"/>
+            <a:r>
+              <a:rPr sz="1300" b="0">
+                <a:solidFill>
+                  <a:srgbClr val="1E1E2E"/>
+                </a:solidFill>
+              </a:rPr>
+              <a:t/>
+            </a:r>
+          </a:p>
+        </p:txBody>
+      </p:sp>
+      <p:sp>
+        <p:nvSpPr>
+          <p:cNvPr id="12" name="TextBox 11"/>
+          <p:cNvSpPr txBox="1"/>
+          <p:nvPr/>
+        </p:nvSpPr>
+        <p:spPr>
+          <a:xfrm>
+            <a:off x="640080" y="4690872"/>
+            <a:ext cx="4937760" cy="411480"/>
+          </a:xfrm>
+          <a:prstGeom prst="rect">
+            <a:avLst/>
+          </a:prstGeom>
+          <a:noFill/>
+        </p:spPr>
+        <p:txBody>
+          <a:bodyPr wrap="square">
+            <a:spAutoFit/>
+          </a:bodyPr>
+          <a:lstStyle/>
+          <a:p>
+            <a:pPr algn="l"/>
+            <a:r>
+              <a:rPr sz="1300" b="1">
+                <a:solidFill>
+                  <a:srgbClr val="7F0000"/>
+                </a:solidFill>
+              </a:rPr>
+              <a:t>✔ 단순한 질문만 해결 가능</a:t>
+            </a:r>
+          </a:p>
+        </p:txBody>
+      </p:sp>
+      <p:sp>
+        <p:nvSpPr>
+          <p:cNvPr id="13" name="TextBox 12"/>
+          <p:cNvSpPr txBox="1"/>
+          <p:nvPr/>
+        </p:nvSpPr>
+        <p:spPr>
+          <a:xfrm>
+            <a:off x="640080" y="5129783"/>
+            <a:ext cx="4937760" cy="411480"/>
+          </a:xfrm>
+          <a:prstGeom prst="rect">
+            <a:avLst/>
+          </a:prstGeom>
+          <a:noFill/>
+        </p:spPr>
+        <p:txBody>
+          <a:bodyPr wrap="square">
+            <a:spAutoFit/>
+          </a:bodyPr>
+          <a:lstStyle/>
+          <a:p>
+            <a:pPr algn="l"/>
+            <a:r>
+              <a:rPr sz="1300" b="1">
+                <a:solidFill>
+                  <a:srgbClr val="7F0000"/>
+                </a:solidFill>
+              </a:rPr>
+              <a:t>✔ 함수 1개로 1개 답변</a:t>
+            </a:r>
+          </a:p>
+        </p:txBody>
+      </p:sp>
+      <p:sp>
+        <p:nvSpPr>
+          <p:cNvPr id="14" name="Rectangle 13"/>
           <p:cNvSpPr/>
           <p:nvPr/>
         </p:nvSpPr>
         <p:spPr>
           <a:xfrm>
-            <a:off x="457200" y="2852928"/>
-            <a:ext cx="2743200" cy="502920"/>
+            <a:off x="6400800" y="1371600"/>
+            <a:ext cx="5303520" cy="4389120"/>
           </a:xfrm>
           <a:prstGeom prst="rect">
             <a:avLst/>
           </a:prstGeom>
           <a:solidFill>
-            <a:srgbClr val="E8F0FF"/>
+            <a:srgbClr val="E5FFED"/>
           </a:solidFill>
           <a:ln>
             <a:noFill/>
@@ -4486,665 +5202,340 @@
       </p:sp>
       <p:sp>
         <p:nvSpPr>
-          <p:cNvPr id="8" name="TextBox 7"/>
-          <p:cNvSpPr txBox="1"/>
-          <p:nvPr/>
-        </p:nvSpPr>
-        <p:spPr>
-          <a:xfrm>
-            <a:off x="548640" y="2926080"/>
-            <a:ext cx="2560320" cy="365760"/>
-          </a:xfrm>
-          <a:prstGeom prst="rect">
-            <a:avLst/>
-          </a:prstGeom>
-          <a:noFill/>
-        </p:spPr>
-        <p:txBody>
-          <a:bodyPr wrap="square">
-            <a:spAutoFit/>
-          </a:bodyPr>
-          <a:lstStyle/>
-          <a:p>
-            <a:pPr algn="l"/>
-            <a:r>
-              <a:rPr sz="1200" b="0">
+          <p:cNvPr id="15" name="TextBox 14"/>
+          <p:cNvSpPr txBox="1"/>
+          <p:nvPr/>
+        </p:nvSpPr>
+        <p:spPr>
+          <a:xfrm>
+            <a:off x="6583680" y="1508760"/>
+            <a:ext cx="4937760" cy="457200"/>
+          </a:xfrm>
+          <a:prstGeom prst="rect">
+            <a:avLst/>
+          </a:prstGeom>
+          <a:noFill/>
+        </p:spPr>
+        <p:txBody>
+          <a:bodyPr wrap="square">
+            <a:spAutoFit/>
+          </a:bodyPr>
+          <a:lstStyle/>
+          <a:p>
+            <a:pPr algn="l"/>
+            <a:r>
+              <a:rPr sz="1600" b="1">
+                <a:solidFill>
+                  <a:srgbClr val="16A34A"/>
+                </a:solidFill>
+              </a:rPr>
+              <a:t>8주차  ReAct + Plan-and-Execute</a:t>
+            </a:r>
+          </a:p>
+        </p:txBody>
+      </p:sp>
+      <p:sp>
+        <p:nvSpPr>
+          <p:cNvPr id="16" name="TextBox 15"/>
+          <p:cNvSpPr txBox="1"/>
+          <p:nvPr/>
+        </p:nvSpPr>
+        <p:spPr>
+          <a:xfrm>
+            <a:off x="6583680" y="2057400"/>
+            <a:ext cx="4937760" cy="411480"/>
+          </a:xfrm>
+          <a:prstGeom prst="rect">
+            <a:avLst/>
+          </a:prstGeom>
+          <a:noFill/>
+        </p:spPr>
+        <p:txBody>
+          <a:bodyPr wrap="square">
+            <a:spAutoFit/>
+          </a:bodyPr>
+          <a:lstStyle/>
+          <a:p>
+            <a:pPr algn="l"/>
+            <a:r>
+              <a:rPr sz="1300" b="0">
                 <a:solidFill>
                   <a:srgbClr val="1E1E2E"/>
                 </a:solidFill>
               </a:rPr>
-              <a:t>2. 관광지 탐색</a:t>
-            </a:r>
-          </a:p>
-        </p:txBody>
-      </p:sp>
-      <p:sp>
-        <p:nvSpPr>
-          <p:cNvPr id="9" name="Rectangle 8"/>
-          <p:cNvSpPr/>
-          <p:nvPr/>
-        </p:nvSpPr>
-        <p:spPr>
-          <a:xfrm>
-            <a:off x="457200" y="3511296"/>
-            <a:ext cx="2743200" cy="502920"/>
-          </a:xfrm>
-          <a:prstGeom prst="rect">
-            <a:avLst/>
-          </a:prstGeom>
-          <a:solidFill>
-            <a:srgbClr val="E8F0FF"/>
-          </a:solidFill>
-          <a:ln>
-            <a:noFill/>
-          </a:ln>
-        </p:spPr>
-        <p:style>
-          <a:lnRef idx="1">
-            <a:schemeClr val="accent1"/>
-          </a:lnRef>
-          <a:fillRef idx="3">
-            <a:schemeClr val="accent1"/>
-          </a:fillRef>
-          <a:effectRef idx="2">
-            <a:schemeClr val="accent1"/>
-          </a:effectRef>
-          <a:fontRef idx="minor">
-            <a:schemeClr val="lt1"/>
-          </a:fontRef>
-        </p:style>
-        <p:txBody>
-          <a:bodyPr rtlCol="0" anchor="ctr"/>
+              <a:t>사용자: "제주 3박4일 완벽하게 짜줘"</a:t>
+            </a:r>
+          </a:p>
+        </p:txBody>
+      </p:sp>
+      <p:sp>
+        <p:nvSpPr>
+          <p:cNvPr id="17" name="TextBox 16"/>
+          <p:cNvSpPr txBox="1"/>
+          <p:nvPr/>
+        </p:nvSpPr>
+        <p:spPr>
+          <a:xfrm>
+            <a:off x="6583680" y="2496312"/>
+            <a:ext cx="4937760" cy="411480"/>
+          </a:xfrm>
+          <a:prstGeom prst="rect">
+            <a:avLst/>
+          </a:prstGeom>
+          <a:noFill/>
+        </p:spPr>
+        <p:txBody>
+          <a:bodyPr wrap="square">
+            <a:spAutoFit/>
+          </a:bodyPr>
+          <a:lstStyle/>
+          <a:p>
+            <a:pPr algn="l"/>
+            <a:r>
+              <a:rPr sz="1300" b="0">
+                <a:solidFill>
+                  <a:srgbClr val="1E1E2E"/>
+                </a:solidFill>
+              </a:rPr>
+              <a:t/>
+            </a:r>
+          </a:p>
+        </p:txBody>
+      </p:sp>
+      <p:sp>
+        <p:nvSpPr>
+          <p:cNvPr id="18" name="TextBox 17"/>
+          <p:cNvSpPr txBox="1"/>
+          <p:nvPr/>
+        </p:nvSpPr>
+        <p:spPr>
+          <a:xfrm>
+            <a:off x="6583680" y="2935224"/>
+            <a:ext cx="4937760" cy="411480"/>
+          </a:xfrm>
+          <a:prstGeom prst="rect">
+            <a:avLst/>
+          </a:prstGeom>
+          <a:noFill/>
+        </p:spPr>
+        <p:txBody>
+          <a:bodyPr wrap="square">
+            <a:spAutoFit/>
+          </a:bodyPr>
+          <a:lstStyle/>
+          <a:p>
+            <a:pPr algn="l"/>
+            <a:r>
+              <a:rPr sz="1300" b="0">
+                <a:solidFill>
+                  <a:srgbClr val="1E1E2E"/>
+                </a:solidFill>
+              </a:rPr>
+              <a:t>AI: 계획 수립 → 날씨 → 관광지</a:t>
+            </a:r>
+          </a:p>
+        </p:txBody>
+      </p:sp>
+      <p:sp>
+        <p:nvSpPr>
+          <p:cNvPr id="19" name="TextBox 18"/>
+          <p:cNvSpPr txBox="1"/>
+          <p:nvPr/>
+        </p:nvSpPr>
+        <p:spPr>
+          <a:xfrm>
+            <a:off x="6583680" y="3374136"/>
+            <a:ext cx="4937760" cy="411480"/>
+          </a:xfrm>
+          <a:prstGeom prst="rect">
+            <a:avLst/>
+          </a:prstGeom>
+          <a:noFill/>
+        </p:spPr>
+        <p:txBody>
+          <a:bodyPr wrap="square">
+            <a:spAutoFit/>
+          </a:bodyPr>
+          <a:lstStyle/>
+          <a:p>
+            <a:pPr algn="l"/>
+            <a:r>
+              <a:rPr sz="1300" b="0">
+                <a:solidFill>
+                  <a:srgbClr val="1E1E2E"/>
+                </a:solidFill>
+              </a:rPr>
+              <a:t>    → 맛집 → 숙소 → 교통</a:t>
+            </a:r>
+          </a:p>
+        </p:txBody>
+      </p:sp>
+      <p:sp>
+        <p:nvSpPr>
+          <p:cNvPr id="20" name="TextBox 19"/>
+          <p:cNvSpPr txBox="1"/>
+          <p:nvPr/>
+        </p:nvSpPr>
+        <p:spPr>
+          <a:xfrm>
+            <a:off x="6583680" y="3813048"/>
+            <a:ext cx="4937760" cy="411480"/>
+          </a:xfrm>
+          <a:prstGeom prst="rect">
+            <a:avLst/>
+          </a:prstGeom>
+          <a:noFill/>
+        </p:spPr>
+        <p:txBody>
+          <a:bodyPr wrap="square">
+            <a:spAutoFit/>
+          </a:bodyPr>
+          <a:lstStyle/>
+          <a:p>
+            <a:pPr algn="l"/>
+            <a:r>
+              <a:rPr sz="1300" b="0">
+                <a:solidFill>
+                  <a:srgbClr val="1E1E2E"/>
+                </a:solidFill>
+              </a:rPr>
+              <a:t>    → 예산 → 일정표 ...</a:t>
+            </a:r>
+          </a:p>
+        </p:txBody>
+      </p:sp>
+      <p:sp>
+        <p:nvSpPr>
+          <p:cNvPr id="21" name="TextBox 20"/>
+          <p:cNvSpPr txBox="1"/>
+          <p:nvPr/>
+        </p:nvSpPr>
+        <p:spPr>
+          <a:xfrm>
+            <a:off x="6583680" y="4251960"/>
+            <a:ext cx="4937760" cy="411480"/>
+          </a:xfrm>
+          <a:prstGeom prst="rect">
+            <a:avLst/>
+          </a:prstGeom>
+          <a:noFill/>
+        </p:spPr>
+        <p:txBody>
+          <a:bodyPr wrap="square">
+            <a:spAutoFit/>
+          </a:bodyPr>
+          <a:lstStyle/>
+          <a:p>
+            <a:pPr algn="l"/>
+            <a:r>
+              <a:rPr sz="1300" b="0">
+                <a:solidFill>
+                  <a:srgbClr val="1E1E2E"/>
+                </a:solidFill>
+              </a:rPr>
+              <a:t/>
+            </a:r>
+          </a:p>
+        </p:txBody>
+      </p:sp>
+      <p:sp>
+        <p:nvSpPr>
+          <p:cNvPr id="22" name="TextBox 21"/>
+          <p:cNvSpPr txBox="1"/>
+          <p:nvPr/>
+        </p:nvSpPr>
+        <p:spPr>
+          <a:xfrm>
+            <a:off x="6583680" y="4690872"/>
+            <a:ext cx="4937760" cy="411480"/>
+          </a:xfrm>
+          <a:prstGeom prst="rect">
+            <a:avLst/>
+          </a:prstGeom>
+          <a:noFill/>
+        </p:spPr>
+        <p:txBody>
+          <a:bodyPr wrap="square">
+            <a:spAutoFit/>
+          </a:bodyPr>
+          <a:lstStyle/>
+          <a:p>
+            <a:pPr algn="l"/>
+            <a:r>
+              <a:rPr sz="1300" b="1">
+                <a:solidFill>
+                  <a:srgbClr val="16A34A"/>
+                </a:solidFill>
+              </a:rPr>
+              <a:t>✔ 복잡한 질문 자율 해결</a:t>
+            </a:r>
+          </a:p>
+        </p:txBody>
+      </p:sp>
+      <p:sp>
+        <p:nvSpPr>
+          <p:cNvPr id="23" name="TextBox 22"/>
+          <p:cNvSpPr txBox="1"/>
+          <p:nvPr/>
+        </p:nvSpPr>
+        <p:spPr>
+          <a:xfrm>
+            <a:off x="6583680" y="5129783"/>
+            <a:ext cx="4937760" cy="411480"/>
+          </a:xfrm>
+          <a:prstGeom prst="rect">
+            <a:avLst/>
+          </a:prstGeom>
+          <a:noFill/>
+        </p:spPr>
+        <p:txBody>
+          <a:bodyPr wrap="square">
+            <a:spAutoFit/>
+          </a:bodyPr>
+          <a:lstStyle/>
+          <a:p>
+            <a:pPr algn="l"/>
+            <a:r>
+              <a:rPr sz="1300" b="1">
+                <a:solidFill>
+                  <a:srgbClr val="16A34A"/>
+                </a:solidFill>
+              </a:rPr>
+              <a:t>✔ 10개 도구 스스로 조합</a:t>
+            </a:r>
+          </a:p>
+        </p:txBody>
+      </p:sp>
+      <p:sp>
+        <p:nvSpPr>
+          <p:cNvPr id="24" name="TextBox 23"/>
+          <p:cNvSpPr txBox="1"/>
+          <p:nvPr/>
+        </p:nvSpPr>
+        <p:spPr>
+          <a:xfrm>
+            <a:off x="457200" y="5943600"/>
+            <a:ext cx="11247120" cy="457200"/>
+          </a:xfrm>
+          <a:prstGeom prst="rect">
+            <a:avLst/>
+          </a:prstGeom>
+          <a:noFill/>
+        </p:spPr>
+        <p:txBody>
+          <a:bodyPr wrap="square">
+            <a:spAutoFit/>
+          </a:bodyPr>
           <a:lstStyle/>
           <a:p>
             <a:pPr algn="ctr"/>
-          </a:p>
-        </p:txBody>
-      </p:sp>
-      <p:sp>
-        <p:nvSpPr>
-          <p:cNvPr id="10" name="TextBox 9"/>
-          <p:cNvSpPr txBox="1"/>
-          <p:nvPr/>
-        </p:nvSpPr>
-        <p:spPr>
-          <a:xfrm>
-            <a:off x="548640" y="3584448"/>
-            <a:ext cx="2560320" cy="365760"/>
-          </a:xfrm>
-          <a:prstGeom prst="rect">
-            <a:avLst/>
-          </a:prstGeom>
-          <a:noFill/>
-        </p:spPr>
-        <p:txBody>
-          <a:bodyPr wrap="square">
-            <a:spAutoFit/>
-          </a:bodyPr>
-          <a:lstStyle/>
-          <a:p>
-            <a:pPr algn="l"/>
-            <a:r>
-              <a:rPr sz="1200" b="0">
-                <a:solidFill>
-                  <a:srgbClr val="1E1E2E"/>
-                </a:solidFill>
-              </a:rPr>
-              <a:t>3. 맛집 검색</a:t>
-            </a:r>
-          </a:p>
-        </p:txBody>
-      </p:sp>
-      <p:sp>
-        <p:nvSpPr>
-          <p:cNvPr id="11" name="Rectangle 10"/>
-          <p:cNvSpPr/>
-          <p:nvPr/>
-        </p:nvSpPr>
-        <p:spPr>
-          <a:xfrm>
-            <a:off x="457200" y="4169664"/>
-            <a:ext cx="2743200" cy="502920"/>
-          </a:xfrm>
-          <a:prstGeom prst="rect">
-            <a:avLst/>
-          </a:prstGeom>
-          <a:solidFill>
-            <a:srgbClr val="E8F0FF"/>
-          </a:solidFill>
-          <a:ln>
-            <a:noFill/>
-          </a:ln>
-        </p:spPr>
-        <p:style>
-          <a:lnRef idx="1">
-            <a:schemeClr val="accent1"/>
-          </a:lnRef>
-          <a:fillRef idx="3">
-            <a:schemeClr val="accent1"/>
-          </a:fillRef>
-          <a:effectRef idx="2">
-            <a:schemeClr val="accent1"/>
-          </a:effectRef>
-          <a:fontRef idx="minor">
-            <a:schemeClr val="lt1"/>
-          </a:fontRef>
-        </p:style>
-        <p:txBody>
-          <a:bodyPr rtlCol="0" anchor="ctr"/>
-          <a:lstStyle/>
-          <a:p>
-            <a:pPr algn="ctr"/>
-          </a:p>
-        </p:txBody>
-      </p:sp>
-      <p:sp>
-        <p:nvSpPr>
-          <p:cNvPr id="12" name="TextBox 11"/>
-          <p:cNvSpPr txBox="1"/>
-          <p:nvPr/>
-        </p:nvSpPr>
-        <p:spPr>
-          <a:xfrm>
-            <a:off x="548640" y="4242816"/>
-            <a:ext cx="2560320" cy="365760"/>
-          </a:xfrm>
-          <a:prstGeom prst="rect">
-            <a:avLst/>
-          </a:prstGeom>
-          <a:noFill/>
-        </p:spPr>
-        <p:txBody>
-          <a:bodyPr wrap="square">
-            <a:spAutoFit/>
-          </a:bodyPr>
-          <a:lstStyle/>
-          <a:p>
-            <a:pPr algn="l"/>
-            <a:r>
-              <a:rPr sz="1200" b="0">
-                <a:solidFill>
-                  <a:srgbClr val="1E1E2E"/>
-                </a:solidFill>
-              </a:rPr>
-              <a:t>4. 숙소 추천</a:t>
-            </a:r>
-          </a:p>
-        </p:txBody>
-      </p:sp>
-      <p:sp>
-        <p:nvSpPr>
-          <p:cNvPr id="13" name="Rectangle 12"/>
-          <p:cNvSpPr/>
-          <p:nvPr/>
-        </p:nvSpPr>
-        <p:spPr>
-          <a:xfrm>
-            <a:off x="457200" y="4828031"/>
-            <a:ext cx="2743200" cy="502920"/>
-          </a:xfrm>
-          <a:prstGeom prst="rect">
-            <a:avLst/>
-          </a:prstGeom>
-          <a:solidFill>
-            <a:srgbClr val="E8F0FF"/>
-          </a:solidFill>
-          <a:ln>
-            <a:noFill/>
-          </a:ln>
-        </p:spPr>
-        <p:style>
-          <a:lnRef idx="1">
-            <a:schemeClr val="accent1"/>
-          </a:lnRef>
-          <a:fillRef idx="3">
-            <a:schemeClr val="accent1"/>
-          </a:fillRef>
-          <a:effectRef idx="2">
-            <a:schemeClr val="accent1"/>
-          </a:effectRef>
-          <a:fontRef idx="minor">
-            <a:schemeClr val="lt1"/>
-          </a:fontRef>
-        </p:style>
-        <p:txBody>
-          <a:bodyPr rtlCol="0" anchor="ctr"/>
-          <a:lstStyle/>
-          <a:p>
-            <a:pPr algn="ctr"/>
-          </a:p>
-        </p:txBody>
-      </p:sp>
-      <p:sp>
-        <p:nvSpPr>
-          <p:cNvPr id="14" name="TextBox 13"/>
-          <p:cNvSpPr txBox="1"/>
-          <p:nvPr/>
-        </p:nvSpPr>
-        <p:spPr>
-          <a:xfrm>
-            <a:off x="548640" y="4901183"/>
-            <a:ext cx="2560320" cy="365760"/>
-          </a:xfrm>
-          <a:prstGeom prst="rect">
-            <a:avLst/>
-          </a:prstGeom>
-          <a:noFill/>
-        </p:spPr>
-        <p:txBody>
-          <a:bodyPr wrap="square">
-            <a:spAutoFit/>
-          </a:bodyPr>
-          <a:lstStyle/>
-          <a:p>
-            <a:pPr algn="l"/>
-            <a:r>
-              <a:rPr sz="1200" b="0">
-                <a:solidFill>
-                  <a:srgbClr val="1E1E2E"/>
-                </a:solidFill>
-              </a:rPr>
-              <a:t>5. 교통편 확인</a:t>
-            </a:r>
-          </a:p>
-        </p:txBody>
-      </p:sp>
-      <p:sp>
-        <p:nvSpPr>
-          <p:cNvPr id="15" name="Rectangle 14"/>
-          <p:cNvSpPr/>
-          <p:nvPr/>
-        </p:nvSpPr>
-        <p:spPr>
-          <a:xfrm>
-            <a:off x="3383280" y="2194560"/>
-            <a:ext cx="2743200" cy="502920"/>
-          </a:xfrm>
-          <a:prstGeom prst="rect">
-            <a:avLst/>
-          </a:prstGeom>
-          <a:solidFill>
-            <a:srgbClr val="E8F0FF"/>
-          </a:solidFill>
-          <a:ln>
-            <a:noFill/>
-          </a:ln>
-        </p:spPr>
-        <p:style>
-          <a:lnRef idx="1">
-            <a:schemeClr val="accent1"/>
-          </a:lnRef>
-          <a:fillRef idx="3">
-            <a:schemeClr val="accent1"/>
-          </a:fillRef>
-          <a:effectRef idx="2">
-            <a:schemeClr val="accent1"/>
-          </a:effectRef>
-          <a:fontRef idx="minor">
-            <a:schemeClr val="lt1"/>
-          </a:fontRef>
-        </p:style>
-        <p:txBody>
-          <a:bodyPr rtlCol="0" anchor="ctr"/>
-          <a:lstStyle/>
-          <a:p>
-            <a:pPr algn="ctr"/>
-          </a:p>
-        </p:txBody>
-      </p:sp>
-      <p:sp>
-        <p:nvSpPr>
-          <p:cNvPr id="16" name="TextBox 15"/>
-          <p:cNvSpPr txBox="1"/>
-          <p:nvPr/>
-        </p:nvSpPr>
-        <p:spPr>
-          <a:xfrm>
-            <a:off x="3474720" y="2267712"/>
-            <a:ext cx="2560320" cy="365760"/>
-          </a:xfrm>
-          <a:prstGeom prst="rect">
-            <a:avLst/>
-          </a:prstGeom>
-          <a:noFill/>
-        </p:spPr>
-        <p:txBody>
-          <a:bodyPr wrap="square">
-            <a:spAutoFit/>
-          </a:bodyPr>
-          <a:lstStyle/>
-          <a:p>
-            <a:pPr algn="l"/>
-            <a:r>
-              <a:rPr sz="1200" b="0">
-                <a:solidFill>
-                  <a:srgbClr val="1E1E2E"/>
-                </a:solidFill>
-              </a:rPr>
-              <a:t>6. 예산 계산</a:t>
-            </a:r>
-          </a:p>
-        </p:txBody>
-      </p:sp>
-      <p:sp>
-        <p:nvSpPr>
-          <p:cNvPr id="17" name="Rectangle 16"/>
-          <p:cNvSpPr/>
-          <p:nvPr/>
-        </p:nvSpPr>
-        <p:spPr>
-          <a:xfrm>
-            <a:off x="3383280" y="2852928"/>
-            <a:ext cx="2743200" cy="502920"/>
-          </a:xfrm>
-          <a:prstGeom prst="rect">
-            <a:avLst/>
-          </a:prstGeom>
-          <a:solidFill>
-            <a:srgbClr val="E8F0FF"/>
-          </a:solidFill>
-          <a:ln>
-            <a:noFill/>
-          </a:ln>
-        </p:spPr>
-        <p:style>
-          <a:lnRef idx="1">
-            <a:schemeClr val="accent1"/>
-          </a:lnRef>
-          <a:fillRef idx="3">
-            <a:schemeClr val="accent1"/>
-          </a:fillRef>
-          <a:effectRef idx="2">
-            <a:schemeClr val="accent1"/>
-          </a:effectRef>
-          <a:fontRef idx="minor">
-            <a:schemeClr val="lt1"/>
-          </a:fontRef>
-        </p:style>
-        <p:txBody>
-          <a:bodyPr rtlCol="0" anchor="ctr"/>
-          <a:lstStyle/>
-          <a:p>
-            <a:pPr algn="ctr"/>
-          </a:p>
-        </p:txBody>
-      </p:sp>
-      <p:sp>
-        <p:nvSpPr>
-          <p:cNvPr id="18" name="TextBox 17"/>
-          <p:cNvSpPr txBox="1"/>
-          <p:nvPr/>
-        </p:nvSpPr>
-        <p:spPr>
-          <a:xfrm>
-            <a:off x="3474720" y="2926080"/>
-            <a:ext cx="2560320" cy="365760"/>
-          </a:xfrm>
-          <a:prstGeom prst="rect">
-            <a:avLst/>
-          </a:prstGeom>
-          <a:noFill/>
-        </p:spPr>
-        <p:txBody>
-          <a:bodyPr wrap="square">
-            <a:spAutoFit/>
-          </a:bodyPr>
-          <a:lstStyle/>
-          <a:p>
-            <a:pPr algn="l"/>
-            <a:r>
-              <a:rPr sz="1200" b="0">
-                <a:solidFill>
-                  <a:srgbClr val="1E1E2E"/>
-                </a:solidFill>
-              </a:rPr>
-              <a:t>7. 축제 및 행사 확인</a:t>
-            </a:r>
-          </a:p>
-        </p:txBody>
-      </p:sp>
-      <p:sp>
-        <p:nvSpPr>
-          <p:cNvPr id="19" name="Rectangle 18"/>
-          <p:cNvSpPr/>
-          <p:nvPr/>
-        </p:nvSpPr>
-        <p:spPr>
-          <a:xfrm>
-            <a:off x="3383280" y="3511296"/>
-            <a:ext cx="2743200" cy="502920"/>
-          </a:xfrm>
-          <a:prstGeom prst="rect">
-            <a:avLst/>
-          </a:prstGeom>
-          <a:solidFill>
-            <a:srgbClr val="E8F0FF"/>
-          </a:solidFill>
-          <a:ln>
-            <a:noFill/>
-          </a:ln>
-        </p:spPr>
-        <p:style>
-          <a:lnRef idx="1">
-            <a:schemeClr val="accent1"/>
-          </a:lnRef>
-          <a:fillRef idx="3">
-            <a:schemeClr val="accent1"/>
-          </a:fillRef>
-          <a:effectRef idx="2">
-            <a:schemeClr val="accent1"/>
-          </a:effectRef>
-          <a:fontRef idx="minor">
-            <a:schemeClr val="lt1"/>
-          </a:fontRef>
-        </p:style>
-        <p:txBody>
-          <a:bodyPr rtlCol="0" anchor="ctr"/>
-          <a:lstStyle/>
-          <a:p>
-            <a:pPr algn="ctr"/>
-          </a:p>
-        </p:txBody>
-      </p:sp>
-      <p:sp>
-        <p:nvSpPr>
-          <p:cNvPr id="20" name="TextBox 19"/>
-          <p:cNvSpPr txBox="1"/>
-          <p:nvPr/>
-        </p:nvSpPr>
-        <p:spPr>
-          <a:xfrm>
-            <a:off x="3474720" y="3584448"/>
-            <a:ext cx="2560320" cy="365760"/>
-          </a:xfrm>
-          <a:prstGeom prst="rect">
-            <a:avLst/>
-          </a:prstGeom>
-          <a:noFill/>
-        </p:spPr>
-        <p:txBody>
-          <a:bodyPr wrap="square">
-            <a:spAutoFit/>
-          </a:bodyPr>
-          <a:lstStyle/>
-          <a:p>
-            <a:pPr algn="l"/>
-            <a:r>
-              <a:rPr sz="1200" b="0">
-                <a:solidFill>
-                  <a:srgbClr val="1E1E2E"/>
-                </a:solidFill>
-              </a:rPr>
-              <a:t>8. 꿀팁 수집</a:t>
-            </a:r>
-          </a:p>
-        </p:txBody>
-      </p:sp>
-      <p:sp>
-        <p:nvSpPr>
-          <p:cNvPr id="21" name="Rectangle 20"/>
-          <p:cNvSpPr/>
-          <p:nvPr/>
-        </p:nvSpPr>
-        <p:spPr>
-          <a:xfrm>
-            <a:off x="3383280" y="4169664"/>
-            <a:ext cx="2743200" cy="502920"/>
-          </a:xfrm>
-          <a:prstGeom prst="rect">
-            <a:avLst/>
-          </a:prstGeom>
-          <a:solidFill>
-            <a:srgbClr val="E8F0FF"/>
-          </a:solidFill>
-          <a:ln>
-            <a:noFill/>
-          </a:ln>
-        </p:spPr>
-        <p:style>
-          <a:lnRef idx="1">
-            <a:schemeClr val="accent1"/>
-          </a:lnRef>
-          <a:fillRef idx="3">
-            <a:schemeClr val="accent1"/>
-          </a:fillRef>
-          <a:effectRef idx="2">
-            <a:schemeClr val="accent1"/>
-          </a:effectRef>
-          <a:fontRef idx="minor">
-            <a:schemeClr val="lt1"/>
-          </a:fontRef>
-        </p:style>
-        <p:txBody>
-          <a:bodyPr rtlCol="0" anchor="ctr"/>
-          <a:lstStyle/>
-          <a:p>
-            <a:pPr algn="ctr"/>
-          </a:p>
-        </p:txBody>
-      </p:sp>
-      <p:sp>
-        <p:nvSpPr>
-          <p:cNvPr id="22" name="TextBox 21"/>
-          <p:cNvSpPr txBox="1"/>
-          <p:nvPr/>
-        </p:nvSpPr>
-        <p:spPr>
-          <a:xfrm>
-            <a:off x="3474720" y="4242816"/>
-            <a:ext cx="2560320" cy="365760"/>
-          </a:xfrm>
-          <a:prstGeom prst="rect">
-            <a:avLst/>
-          </a:prstGeom>
-          <a:noFill/>
-        </p:spPr>
-        <p:txBody>
-          <a:bodyPr wrap="square">
-            <a:spAutoFit/>
-          </a:bodyPr>
-          <a:lstStyle/>
-          <a:p>
-            <a:pPr algn="l"/>
-            <a:r>
-              <a:rPr sz="1200" b="0">
-                <a:solidFill>
-                  <a:srgbClr val="1E1E2E"/>
-                </a:solidFill>
-              </a:rPr>
-              <a:t>9. 날짜별 일정표 생성</a:t>
-            </a:r>
-          </a:p>
-        </p:txBody>
-      </p:sp>
-      <p:sp>
-        <p:nvSpPr>
-          <p:cNvPr id="23" name="Rectangle 22"/>
-          <p:cNvSpPr/>
-          <p:nvPr/>
-        </p:nvSpPr>
-        <p:spPr>
-          <a:xfrm>
-            <a:off x="6400800" y="1371600"/>
-            <a:ext cx="5394960" cy="5120640"/>
-          </a:xfrm>
-          <a:prstGeom prst="rect">
-            <a:avLst/>
-          </a:prstGeom>
-          <a:solidFill>
-            <a:srgbClr val="1E1E2E"/>
-          </a:solidFill>
-          <a:ln>
-            <a:noFill/>
-          </a:ln>
-        </p:spPr>
-        <p:style>
-          <a:lnRef idx="1">
-            <a:schemeClr val="accent1"/>
-          </a:lnRef>
-          <a:fillRef idx="3">
-            <a:schemeClr val="accent1"/>
-          </a:fillRef>
-          <a:effectRef idx="2">
-            <a:schemeClr val="accent1"/>
-          </a:effectRef>
-          <a:fontRef idx="minor">
-            <a:schemeClr val="lt1"/>
-          </a:fontRef>
-        </p:style>
-        <p:txBody>
-          <a:bodyPr rtlCol="0" anchor="ctr"/>
-          <a:lstStyle/>
-          <a:p>
-            <a:pPr algn="ctr"/>
-          </a:p>
-        </p:txBody>
-      </p:sp>
-      <p:sp>
-        <p:nvSpPr>
-          <p:cNvPr id="24" name="TextBox 23"/>
-          <p:cNvSpPr txBox="1"/>
-          <p:nvPr/>
-        </p:nvSpPr>
-        <p:spPr>
-          <a:xfrm>
-            <a:off x="6583680" y="1508760"/>
-            <a:ext cx="5120640" cy="4846320"/>
-          </a:xfrm>
-          <a:prstGeom prst="rect">
-            <a:avLst/>
-          </a:prstGeom>
-          <a:noFill/>
-        </p:spPr>
-        <p:txBody>
-          <a:bodyPr wrap="square">
-            <a:spAutoFit/>
-          </a:bodyPr>
-          <a:lstStyle/>
-          <a:p>
-            <a:pPr algn="l"/>
-            <a:r>
-              <a:rPr sz="1100" b="0">
-                <a:solidFill>
-                  <a:srgbClr val="A8E6FF"/>
-                </a:solidFill>
-              </a:rPr>
-              <a:t>def plan_phase(user_query):
-    response = client.chat(
-        messages=[
-            system_prompt,
-            user_query
-        ],
-        # JSON 형식으로만 응답
-        response_format={
-            "type": "json_object"
-        }
-    )
-    # 실행 계획 반환
-    # {"city": "제주",
-    #  "days": 4,
-    #  "steps": [...]}
-    return json.loads(response)</a:t>
+            <a:r>
+              <a:rPr sz="1500" b="1">
+                <a:solidFill>
+                  <a:srgbClr val="265DC8"/>
+                </a:solidFill>
+              </a:rPr>
+              <a:t>핵심 차이:  while 루프 하나가 추가되어 AI가 스스로 반복 판단</a:t>
             </a:r>
           </a:p>
         </p:txBody>
@@ -5247,21 +5638,133 @@
                   <a:srgbClr val="FFFFFF"/>
                 </a:solidFill>
               </a:rPr>
-              <a:t>ReAct: Reasoning + Acting  반복 루프</a:t>
-            </a:r>
-          </a:p>
-        </p:txBody>
-      </p:sp>
-      <p:sp>
-        <p:nvSpPr>
-          <p:cNvPr id="4" name="Rectangle 3"/>
+              <a:t>Plan-and-Execute: 계획 먼저, 실행 나중</a:t>
+            </a:r>
+          </a:p>
+        </p:txBody>
+      </p:sp>
+      <p:sp>
+        <p:nvSpPr>
+          <p:cNvPr id="4" name="TextBox 3"/>
+          <p:cNvSpPr txBox="1"/>
+          <p:nvPr/>
+        </p:nvSpPr>
+        <p:spPr>
+          <a:xfrm>
+            <a:off x="457200" y="1371600"/>
+            <a:ext cx="5029200" cy="731520"/>
+          </a:xfrm>
+          <a:prstGeom prst="rect">
+            <a:avLst/>
+          </a:prstGeom>
+          <a:noFill/>
+        </p:spPr>
+        <p:txBody>
+          <a:bodyPr wrap="square">
+            <a:spAutoFit/>
+          </a:bodyPr>
+          <a:lstStyle/>
+          <a:p>
+            <a:pPr algn="l"/>
+            <a:r>
+              <a:rPr sz="1500" b="0">
+                <a:solidFill>
+                  <a:srgbClr val="1E1E2E"/>
+                </a:solidFill>
+              </a:rPr>
+              <a:t>사용자 질문을 받으면 AI가
+먼저 전체 계획을 JSON으로 수립</a:t>
+            </a:r>
+          </a:p>
+        </p:txBody>
+      </p:sp>
+      <p:sp>
+        <p:nvSpPr>
+          <p:cNvPr id="5" name="Rectangle 4"/>
           <p:cNvSpPr/>
           <p:nvPr/>
         </p:nvSpPr>
         <p:spPr>
           <a:xfrm>
-            <a:off x="457200" y="1463040"/>
-            <a:ext cx="5303520" cy="1097280"/>
+            <a:off x="457200" y="2194560"/>
+            <a:ext cx="2743200" cy="502920"/>
+          </a:xfrm>
+          <a:prstGeom prst="rect">
+            <a:avLst/>
+          </a:prstGeom>
+          <a:solidFill>
+            <a:srgbClr val="265DC8"/>
+          </a:solidFill>
+          <a:ln>
+            <a:noFill/>
+          </a:ln>
+        </p:spPr>
+        <p:style>
+          <a:lnRef idx="1">
+            <a:schemeClr val="accent1"/>
+          </a:lnRef>
+          <a:fillRef idx="3">
+            <a:schemeClr val="accent1"/>
+          </a:fillRef>
+          <a:effectRef idx="2">
+            <a:schemeClr val="accent1"/>
+          </a:effectRef>
+          <a:fontRef idx="minor">
+            <a:schemeClr val="lt1"/>
+          </a:fontRef>
+        </p:style>
+        <p:txBody>
+          <a:bodyPr rtlCol="0" anchor="ctr"/>
+          <a:lstStyle/>
+          <a:p>
+            <a:pPr algn="ctr"/>
+          </a:p>
+        </p:txBody>
+      </p:sp>
+      <p:sp>
+        <p:nvSpPr>
+          <p:cNvPr id="6" name="TextBox 5"/>
+          <p:cNvSpPr txBox="1"/>
+          <p:nvPr/>
+        </p:nvSpPr>
+        <p:spPr>
+          <a:xfrm>
+            <a:off x="548640" y="2267712"/>
+            <a:ext cx="2560320" cy="365760"/>
+          </a:xfrm>
+          <a:prstGeom prst="rect">
+            <a:avLst/>
+          </a:prstGeom>
+          <a:noFill/>
+        </p:spPr>
+        <p:txBody>
+          <a:bodyPr wrap="square">
+            <a:spAutoFit/>
+          </a:bodyPr>
+          <a:lstStyle/>
+          <a:p>
+            <a:pPr algn="l"/>
+            <a:r>
+              <a:rPr sz="1200" b="1">
+                <a:solidFill>
+                  <a:srgbClr val="FFFFFF"/>
+                </a:solidFill>
+              </a:rPr>
+              <a:t>1. 날씨 및 여행 시기 확인</a:t>
+            </a:r>
+          </a:p>
+        </p:txBody>
+      </p:sp>
+      <p:sp>
+        <p:nvSpPr>
+          <p:cNvPr id="7" name="Rectangle 6"/>
+          <p:cNvSpPr/>
+          <p:nvPr/>
+        </p:nvSpPr>
+        <p:spPr>
+          <a:xfrm>
+            <a:off x="457200" y="2852928"/>
+            <a:ext cx="2743200" cy="502920"/>
           </a:xfrm>
           <a:prstGeom prst="rect">
             <a:avLst/>
@@ -5297,122 +5800,54 @@
       </p:sp>
       <p:sp>
         <p:nvSpPr>
-          <p:cNvPr id="5" name="TextBox 4"/>
-          <p:cNvSpPr txBox="1"/>
-          <p:nvPr/>
-        </p:nvSpPr>
-        <p:spPr>
-          <a:xfrm>
-            <a:off x="640080" y="1600200"/>
-            <a:ext cx="2286000" cy="457200"/>
-          </a:xfrm>
-          <a:prstGeom prst="rect">
-            <a:avLst/>
-          </a:prstGeom>
-          <a:noFill/>
-        </p:spPr>
-        <p:txBody>
-          <a:bodyPr wrap="square">
-            <a:spAutoFit/>
-          </a:bodyPr>
-          <a:lstStyle/>
-          <a:p>
-            <a:pPr algn="l"/>
-            <a:r>
-              <a:rPr sz="1800" b="1">
-                <a:solidFill>
-                  <a:srgbClr val="265DC8"/>
-                </a:solidFill>
-              </a:rPr>
-              <a:t>🧠 Thought</a:t>
-            </a:r>
-          </a:p>
-        </p:txBody>
-      </p:sp>
-      <p:sp>
-        <p:nvSpPr>
-          <p:cNvPr id="6" name="TextBox 5"/>
-          <p:cNvSpPr txBox="1"/>
-          <p:nvPr/>
-        </p:nvSpPr>
-        <p:spPr>
-          <a:xfrm>
-            <a:off x="3017520" y="1691640"/>
-            <a:ext cx="2743200" cy="457200"/>
-          </a:xfrm>
-          <a:prstGeom prst="rect">
-            <a:avLst/>
-          </a:prstGeom>
-          <a:noFill/>
-        </p:spPr>
-        <p:txBody>
-          <a:bodyPr wrap="square">
-            <a:spAutoFit/>
-          </a:bodyPr>
-          <a:lstStyle/>
-          <a:p>
-            <a:pPr algn="l"/>
-            <a:r>
-              <a:rPr sz="1300" b="0">
+          <p:cNvPr id="8" name="TextBox 7"/>
+          <p:cNvSpPr txBox="1"/>
+          <p:nvPr/>
+        </p:nvSpPr>
+        <p:spPr>
+          <a:xfrm>
+            <a:off x="548640" y="2926080"/>
+            <a:ext cx="2560320" cy="365760"/>
+          </a:xfrm>
+          <a:prstGeom prst="rect">
+            <a:avLst/>
+          </a:prstGeom>
+          <a:noFill/>
+        </p:spPr>
+        <p:txBody>
+          <a:bodyPr wrap="square">
+            <a:spAutoFit/>
+          </a:bodyPr>
+          <a:lstStyle/>
+          <a:p>
+            <a:pPr algn="l"/>
+            <a:r>
+              <a:rPr sz="1200" b="0">
                 <a:solidFill>
                   <a:srgbClr val="1E1E2E"/>
                 </a:solidFill>
               </a:rPr>
-              <a:t>다음에 뭘 해야 할지 생각</a:t>
-            </a:r>
-          </a:p>
-        </p:txBody>
-      </p:sp>
-      <p:sp>
-        <p:nvSpPr>
-          <p:cNvPr id="7" name="TextBox 6"/>
-          <p:cNvSpPr txBox="1"/>
-          <p:nvPr/>
-        </p:nvSpPr>
-        <p:spPr>
-          <a:xfrm>
-            <a:off x="3017520" y="2514600"/>
-            <a:ext cx="914400" cy="365760"/>
-          </a:xfrm>
-          <a:prstGeom prst="rect">
-            <a:avLst/>
-          </a:prstGeom>
-          <a:noFill/>
-        </p:spPr>
-        <p:txBody>
-          <a:bodyPr wrap="square">
-            <a:spAutoFit/>
-          </a:bodyPr>
-          <a:lstStyle/>
-          <a:p>
-            <a:pPr algn="l"/>
-            <a:r>
-              <a:rPr sz="2000" b="1">
-                <a:solidFill>
-                  <a:srgbClr val="265DC8"/>
-                </a:solidFill>
-              </a:rPr>
-              <a:t>↓</a:t>
-            </a:r>
-          </a:p>
-        </p:txBody>
-      </p:sp>
-      <p:sp>
-        <p:nvSpPr>
-          <p:cNvPr id="8" name="Rectangle 7"/>
+              <a:t>2. 관광지 탐색</a:t>
+            </a:r>
+          </a:p>
+        </p:txBody>
+      </p:sp>
+      <p:sp>
+        <p:nvSpPr>
+          <p:cNvPr id="9" name="Rectangle 8"/>
           <p:cNvSpPr/>
           <p:nvPr/>
         </p:nvSpPr>
         <p:spPr>
           <a:xfrm>
-            <a:off x="457200" y="2834640"/>
-            <a:ext cx="5303520" cy="1097280"/>
+            <a:off x="457200" y="3511296"/>
+            <a:ext cx="2743200" cy="502920"/>
           </a:xfrm>
           <a:prstGeom prst="rect">
             <a:avLst/>
           </a:prstGeom>
           <a:solidFill>
-            <a:srgbClr val="FFF7E6"/>
+            <a:srgbClr val="E8F0FF"/>
           </a:solidFill>
           <a:ln>
             <a:noFill/>
@@ -5442,122 +5877,54 @@
       </p:sp>
       <p:sp>
         <p:nvSpPr>
-          <p:cNvPr id="9" name="TextBox 8"/>
-          <p:cNvSpPr txBox="1"/>
-          <p:nvPr/>
-        </p:nvSpPr>
-        <p:spPr>
-          <a:xfrm>
-            <a:off x="640080" y="2971800"/>
-            <a:ext cx="2286000" cy="457200"/>
-          </a:xfrm>
-          <a:prstGeom prst="rect">
-            <a:avLst/>
-          </a:prstGeom>
-          <a:noFill/>
-        </p:spPr>
-        <p:txBody>
-          <a:bodyPr wrap="square">
-            <a:spAutoFit/>
-          </a:bodyPr>
-          <a:lstStyle/>
-          <a:p>
-            <a:pPr algn="l"/>
-            <a:r>
-              <a:rPr sz="1800" b="1">
-                <a:solidFill>
-                  <a:srgbClr val="EA580C"/>
-                </a:solidFill>
-              </a:rPr>
-              <a:t>⚡ Action</a:t>
-            </a:r>
-          </a:p>
-        </p:txBody>
-      </p:sp>
-      <p:sp>
-        <p:nvSpPr>
           <p:cNvPr id="10" name="TextBox 9"/>
           <p:cNvSpPr txBox="1"/>
           <p:nvPr/>
         </p:nvSpPr>
         <p:spPr>
           <a:xfrm>
-            <a:off x="3017520" y="3063240"/>
-            <a:ext cx="2743200" cy="457200"/>
-          </a:xfrm>
-          <a:prstGeom prst="rect">
-            <a:avLst/>
-          </a:prstGeom>
-          <a:noFill/>
-        </p:spPr>
-        <p:txBody>
-          <a:bodyPr wrap="square">
-            <a:spAutoFit/>
-          </a:bodyPr>
-          <a:lstStyle/>
-          <a:p>
-            <a:pPr algn="l"/>
-            <a:r>
-              <a:rPr sz="1300" b="0">
+            <a:off x="548640" y="3584448"/>
+            <a:ext cx="2560320" cy="365760"/>
+          </a:xfrm>
+          <a:prstGeom prst="rect">
+            <a:avLst/>
+          </a:prstGeom>
+          <a:noFill/>
+        </p:spPr>
+        <p:txBody>
+          <a:bodyPr wrap="square">
+            <a:spAutoFit/>
+          </a:bodyPr>
+          <a:lstStyle/>
+          <a:p>
+            <a:pPr algn="l"/>
+            <a:r>
+              <a:rPr sz="1200" b="0">
                 <a:solidFill>
                   <a:srgbClr val="1E1E2E"/>
                 </a:solidFill>
               </a:rPr>
-              <a:t>적절한 도구 호출</a:t>
-            </a:r>
-          </a:p>
-        </p:txBody>
-      </p:sp>
-      <p:sp>
-        <p:nvSpPr>
-          <p:cNvPr id="11" name="TextBox 10"/>
-          <p:cNvSpPr txBox="1"/>
-          <p:nvPr/>
-        </p:nvSpPr>
-        <p:spPr>
-          <a:xfrm>
-            <a:off x="3017520" y="3886200"/>
-            <a:ext cx="914400" cy="365760"/>
-          </a:xfrm>
-          <a:prstGeom prst="rect">
-            <a:avLst/>
-          </a:prstGeom>
-          <a:noFill/>
-        </p:spPr>
-        <p:txBody>
-          <a:bodyPr wrap="square">
-            <a:spAutoFit/>
-          </a:bodyPr>
-          <a:lstStyle/>
-          <a:p>
-            <a:pPr algn="l"/>
-            <a:r>
-              <a:rPr sz="2000" b="1">
-                <a:solidFill>
-                  <a:srgbClr val="265DC8"/>
-                </a:solidFill>
-              </a:rPr>
-              <a:t>↓</a:t>
-            </a:r>
-          </a:p>
-        </p:txBody>
-      </p:sp>
-      <p:sp>
-        <p:nvSpPr>
-          <p:cNvPr id="12" name="Rectangle 11"/>
+              <a:t>3. 맛집 검색</a:t>
+            </a:r>
+          </a:p>
+        </p:txBody>
+      </p:sp>
+      <p:sp>
+        <p:nvSpPr>
+          <p:cNvPr id="11" name="Rectangle 10"/>
           <p:cNvSpPr/>
           <p:nvPr/>
         </p:nvSpPr>
         <p:spPr>
           <a:xfrm>
-            <a:off x="457200" y="4206240"/>
-            <a:ext cx="5303520" cy="1097280"/>
+            <a:off x="457200" y="4169664"/>
+            <a:ext cx="2743200" cy="502920"/>
           </a:xfrm>
           <a:prstGeom prst="rect">
             <a:avLst/>
           </a:prstGeom>
           <a:solidFill>
-            <a:srgbClr val="F0FFF4"/>
+            <a:srgbClr val="E8F0FF"/>
           </a:solidFill>
           <a:ln>
             <a:noFill/>
@@ -5587,35 +5954,78 @@
       </p:sp>
       <p:sp>
         <p:nvSpPr>
-          <p:cNvPr id="13" name="TextBox 12"/>
-          <p:cNvSpPr txBox="1"/>
-          <p:nvPr/>
-        </p:nvSpPr>
-        <p:spPr>
-          <a:xfrm>
-            <a:off x="640080" y="4343400"/>
-            <a:ext cx="2286000" cy="457200"/>
-          </a:xfrm>
-          <a:prstGeom prst="rect">
-            <a:avLst/>
-          </a:prstGeom>
-          <a:noFill/>
-        </p:spPr>
-        <p:txBody>
-          <a:bodyPr wrap="square">
-            <a:spAutoFit/>
-          </a:bodyPr>
-          <a:lstStyle/>
-          <a:p>
-            <a:pPr algn="l"/>
-            <a:r>
-              <a:rPr sz="1800" b="1">
-                <a:solidFill>
-                  <a:srgbClr val="16A34A"/>
-                </a:solidFill>
-              </a:rPr>
-              <a:t>👁 Observe</a:t>
-            </a:r>
+          <p:cNvPr id="12" name="TextBox 11"/>
+          <p:cNvSpPr txBox="1"/>
+          <p:nvPr/>
+        </p:nvSpPr>
+        <p:spPr>
+          <a:xfrm>
+            <a:off x="548640" y="4242816"/>
+            <a:ext cx="2560320" cy="365760"/>
+          </a:xfrm>
+          <a:prstGeom prst="rect">
+            <a:avLst/>
+          </a:prstGeom>
+          <a:noFill/>
+        </p:spPr>
+        <p:txBody>
+          <a:bodyPr wrap="square">
+            <a:spAutoFit/>
+          </a:bodyPr>
+          <a:lstStyle/>
+          <a:p>
+            <a:pPr algn="l"/>
+            <a:r>
+              <a:rPr sz="1200" b="0">
+                <a:solidFill>
+                  <a:srgbClr val="1E1E2E"/>
+                </a:solidFill>
+              </a:rPr>
+              <a:t>4. 숙소 추천</a:t>
+            </a:r>
+          </a:p>
+        </p:txBody>
+      </p:sp>
+      <p:sp>
+        <p:nvSpPr>
+          <p:cNvPr id="13" name="Rectangle 12"/>
+          <p:cNvSpPr/>
+          <p:nvPr/>
+        </p:nvSpPr>
+        <p:spPr>
+          <a:xfrm>
+            <a:off x="457200" y="4828031"/>
+            <a:ext cx="2743200" cy="502920"/>
+          </a:xfrm>
+          <a:prstGeom prst="rect">
+            <a:avLst/>
+          </a:prstGeom>
+          <a:solidFill>
+            <a:srgbClr val="E8F0FF"/>
+          </a:solidFill>
+          <a:ln>
+            <a:noFill/>
+          </a:ln>
+        </p:spPr>
+        <p:style>
+          <a:lnRef idx="1">
+            <a:schemeClr val="accent1"/>
+          </a:lnRef>
+          <a:fillRef idx="3">
+            <a:schemeClr val="accent1"/>
+          </a:fillRef>
+          <a:effectRef idx="2">
+            <a:schemeClr val="accent1"/>
+          </a:effectRef>
+          <a:fontRef idx="minor">
+            <a:schemeClr val="lt1"/>
+          </a:fontRef>
+        </p:style>
+        <p:txBody>
+          <a:bodyPr rtlCol="0" anchor="ctr"/>
+          <a:lstStyle/>
+          <a:p>
+            <a:pPr algn="ctr"/>
           </a:p>
         </p:txBody>
       </p:sp>
@@ -5627,76 +6037,350 @@
         </p:nvSpPr>
         <p:spPr>
           <a:xfrm>
-            <a:off x="3017520" y="4434840"/>
-            <a:ext cx="2743200" cy="457200"/>
-          </a:xfrm>
-          <a:prstGeom prst="rect">
-            <a:avLst/>
-          </a:prstGeom>
-          <a:noFill/>
-        </p:spPr>
-        <p:txBody>
-          <a:bodyPr wrap="square">
-            <a:spAutoFit/>
-          </a:bodyPr>
-          <a:lstStyle/>
-          <a:p>
-            <a:pPr algn="l"/>
-            <a:r>
-              <a:rPr sz="1300" b="0">
+            <a:off x="548640" y="4901183"/>
+            <a:ext cx="2560320" cy="365760"/>
+          </a:xfrm>
+          <a:prstGeom prst="rect">
+            <a:avLst/>
+          </a:prstGeom>
+          <a:noFill/>
+        </p:spPr>
+        <p:txBody>
+          <a:bodyPr wrap="square">
+            <a:spAutoFit/>
+          </a:bodyPr>
+          <a:lstStyle/>
+          <a:p>
+            <a:pPr algn="l"/>
+            <a:r>
+              <a:rPr sz="1200" b="0">
                 <a:solidFill>
                   <a:srgbClr val="1E1E2E"/>
                 </a:solidFill>
               </a:rPr>
-              <a:t>결과 확인 후 다음 결정</a:t>
-            </a:r>
-          </a:p>
-        </p:txBody>
-      </p:sp>
-      <p:sp>
-        <p:nvSpPr>
-          <p:cNvPr id="15" name="TextBox 14"/>
-          <p:cNvSpPr txBox="1"/>
-          <p:nvPr/>
-        </p:nvSpPr>
-        <p:spPr>
-          <a:xfrm>
-            <a:off x="457200" y="5669280"/>
-            <a:ext cx="5303520" cy="457200"/>
-          </a:xfrm>
-          <a:prstGeom prst="rect">
-            <a:avLst/>
-          </a:prstGeom>
-          <a:noFill/>
-        </p:spPr>
-        <p:txBody>
-          <a:bodyPr wrap="square">
-            <a:spAutoFit/>
-          </a:bodyPr>
+              <a:t>5. 교통편 확인</a:t>
+            </a:r>
+          </a:p>
+        </p:txBody>
+      </p:sp>
+      <p:sp>
+        <p:nvSpPr>
+          <p:cNvPr id="15" name="Rectangle 14"/>
+          <p:cNvSpPr/>
+          <p:nvPr/>
+        </p:nvSpPr>
+        <p:spPr>
+          <a:xfrm>
+            <a:off x="3383280" y="2194560"/>
+            <a:ext cx="2743200" cy="502920"/>
+          </a:xfrm>
+          <a:prstGeom prst="rect">
+            <a:avLst/>
+          </a:prstGeom>
+          <a:solidFill>
+            <a:srgbClr val="E8F0FF"/>
+          </a:solidFill>
+          <a:ln>
+            <a:noFill/>
+          </a:ln>
+        </p:spPr>
+        <p:style>
+          <a:lnRef idx="1">
+            <a:schemeClr val="accent1"/>
+          </a:lnRef>
+          <a:fillRef idx="3">
+            <a:schemeClr val="accent1"/>
+          </a:fillRef>
+          <a:effectRef idx="2">
+            <a:schemeClr val="accent1"/>
+          </a:effectRef>
+          <a:fontRef idx="minor">
+            <a:schemeClr val="lt1"/>
+          </a:fontRef>
+        </p:style>
+        <p:txBody>
+          <a:bodyPr rtlCol="0" anchor="ctr"/>
           <a:lstStyle/>
           <a:p>
             <a:pPr algn="ctr"/>
-            <a:r>
-              <a:rPr sz="1300" b="1">
-                <a:solidFill>
-                  <a:srgbClr val="265DC8"/>
-                </a:solidFill>
-              </a:rPr>
-              <a:t>AI가 '완료'라고 판단할 때까지 반복</a:t>
-            </a:r>
-          </a:p>
-        </p:txBody>
-      </p:sp>
-      <p:sp>
-        <p:nvSpPr>
-          <p:cNvPr id="16" name="Rectangle 15"/>
+          </a:p>
+        </p:txBody>
+      </p:sp>
+      <p:sp>
+        <p:nvSpPr>
+          <p:cNvPr id="16" name="TextBox 15"/>
+          <p:cNvSpPr txBox="1"/>
+          <p:nvPr/>
+        </p:nvSpPr>
+        <p:spPr>
+          <a:xfrm>
+            <a:off x="3474720" y="2267712"/>
+            <a:ext cx="2560320" cy="365760"/>
+          </a:xfrm>
+          <a:prstGeom prst="rect">
+            <a:avLst/>
+          </a:prstGeom>
+          <a:noFill/>
+        </p:spPr>
+        <p:txBody>
+          <a:bodyPr wrap="square">
+            <a:spAutoFit/>
+          </a:bodyPr>
+          <a:lstStyle/>
+          <a:p>
+            <a:pPr algn="l"/>
+            <a:r>
+              <a:rPr sz="1200" b="0">
+                <a:solidFill>
+                  <a:srgbClr val="1E1E2E"/>
+                </a:solidFill>
+              </a:rPr>
+              <a:t>6. 예산 계산</a:t>
+            </a:r>
+          </a:p>
+        </p:txBody>
+      </p:sp>
+      <p:sp>
+        <p:nvSpPr>
+          <p:cNvPr id="17" name="Rectangle 16"/>
           <p:cNvSpPr/>
           <p:nvPr/>
         </p:nvSpPr>
         <p:spPr>
           <a:xfrm>
-            <a:off x="6217920" y="1280160"/>
-            <a:ext cx="5577840" cy="5212080"/>
+            <a:off x="3383280" y="2852928"/>
+            <a:ext cx="2743200" cy="502920"/>
+          </a:xfrm>
+          <a:prstGeom prst="rect">
+            <a:avLst/>
+          </a:prstGeom>
+          <a:solidFill>
+            <a:srgbClr val="E8F0FF"/>
+          </a:solidFill>
+          <a:ln>
+            <a:noFill/>
+          </a:ln>
+        </p:spPr>
+        <p:style>
+          <a:lnRef idx="1">
+            <a:schemeClr val="accent1"/>
+          </a:lnRef>
+          <a:fillRef idx="3">
+            <a:schemeClr val="accent1"/>
+          </a:fillRef>
+          <a:effectRef idx="2">
+            <a:schemeClr val="accent1"/>
+          </a:effectRef>
+          <a:fontRef idx="minor">
+            <a:schemeClr val="lt1"/>
+          </a:fontRef>
+        </p:style>
+        <p:txBody>
+          <a:bodyPr rtlCol="0" anchor="ctr"/>
+          <a:lstStyle/>
+          <a:p>
+            <a:pPr algn="ctr"/>
+          </a:p>
+        </p:txBody>
+      </p:sp>
+      <p:sp>
+        <p:nvSpPr>
+          <p:cNvPr id="18" name="TextBox 17"/>
+          <p:cNvSpPr txBox="1"/>
+          <p:nvPr/>
+        </p:nvSpPr>
+        <p:spPr>
+          <a:xfrm>
+            <a:off x="3474720" y="2926080"/>
+            <a:ext cx="2560320" cy="365760"/>
+          </a:xfrm>
+          <a:prstGeom prst="rect">
+            <a:avLst/>
+          </a:prstGeom>
+          <a:noFill/>
+        </p:spPr>
+        <p:txBody>
+          <a:bodyPr wrap="square">
+            <a:spAutoFit/>
+          </a:bodyPr>
+          <a:lstStyle/>
+          <a:p>
+            <a:pPr algn="l"/>
+            <a:r>
+              <a:rPr sz="1200" b="0">
+                <a:solidFill>
+                  <a:srgbClr val="1E1E2E"/>
+                </a:solidFill>
+              </a:rPr>
+              <a:t>7. 축제 및 행사 확인</a:t>
+            </a:r>
+          </a:p>
+        </p:txBody>
+      </p:sp>
+      <p:sp>
+        <p:nvSpPr>
+          <p:cNvPr id="19" name="Rectangle 18"/>
+          <p:cNvSpPr/>
+          <p:nvPr/>
+        </p:nvSpPr>
+        <p:spPr>
+          <a:xfrm>
+            <a:off x="3383280" y="3511296"/>
+            <a:ext cx="2743200" cy="502920"/>
+          </a:xfrm>
+          <a:prstGeom prst="rect">
+            <a:avLst/>
+          </a:prstGeom>
+          <a:solidFill>
+            <a:srgbClr val="E8F0FF"/>
+          </a:solidFill>
+          <a:ln>
+            <a:noFill/>
+          </a:ln>
+        </p:spPr>
+        <p:style>
+          <a:lnRef idx="1">
+            <a:schemeClr val="accent1"/>
+          </a:lnRef>
+          <a:fillRef idx="3">
+            <a:schemeClr val="accent1"/>
+          </a:fillRef>
+          <a:effectRef idx="2">
+            <a:schemeClr val="accent1"/>
+          </a:effectRef>
+          <a:fontRef idx="minor">
+            <a:schemeClr val="lt1"/>
+          </a:fontRef>
+        </p:style>
+        <p:txBody>
+          <a:bodyPr rtlCol="0" anchor="ctr"/>
+          <a:lstStyle/>
+          <a:p>
+            <a:pPr algn="ctr"/>
+          </a:p>
+        </p:txBody>
+      </p:sp>
+      <p:sp>
+        <p:nvSpPr>
+          <p:cNvPr id="20" name="TextBox 19"/>
+          <p:cNvSpPr txBox="1"/>
+          <p:nvPr/>
+        </p:nvSpPr>
+        <p:spPr>
+          <a:xfrm>
+            <a:off x="3474720" y="3584448"/>
+            <a:ext cx="2560320" cy="365760"/>
+          </a:xfrm>
+          <a:prstGeom prst="rect">
+            <a:avLst/>
+          </a:prstGeom>
+          <a:noFill/>
+        </p:spPr>
+        <p:txBody>
+          <a:bodyPr wrap="square">
+            <a:spAutoFit/>
+          </a:bodyPr>
+          <a:lstStyle/>
+          <a:p>
+            <a:pPr algn="l"/>
+            <a:r>
+              <a:rPr sz="1200" b="0">
+                <a:solidFill>
+                  <a:srgbClr val="1E1E2E"/>
+                </a:solidFill>
+              </a:rPr>
+              <a:t>8. 꿀팁 수집</a:t>
+            </a:r>
+          </a:p>
+        </p:txBody>
+      </p:sp>
+      <p:sp>
+        <p:nvSpPr>
+          <p:cNvPr id="21" name="Rectangle 20"/>
+          <p:cNvSpPr/>
+          <p:nvPr/>
+        </p:nvSpPr>
+        <p:spPr>
+          <a:xfrm>
+            <a:off x="3383280" y="4169664"/>
+            <a:ext cx="2743200" cy="502920"/>
+          </a:xfrm>
+          <a:prstGeom prst="rect">
+            <a:avLst/>
+          </a:prstGeom>
+          <a:solidFill>
+            <a:srgbClr val="E8F0FF"/>
+          </a:solidFill>
+          <a:ln>
+            <a:noFill/>
+          </a:ln>
+        </p:spPr>
+        <p:style>
+          <a:lnRef idx="1">
+            <a:schemeClr val="accent1"/>
+          </a:lnRef>
+          <a:fillRef idx="3">
+            <a:schemeClr val="accent1"/>
+          </a:fillRef>
+          <a:effectRef idx="2">
+            <a:schemeClr val="accent1"/>
+          </a:effectRef>
+          <a:fontRef idx="minor">
+            <a:schemeClr val="lt1"/>
+          </a:fontRef>
+        </p:style>
+        <p:txBody>
+          <a:bodyPr rtlCol="0" anchor="ctr"/>
+          <a:lstStyle/>
+          <a:p>
+            <a:pPr algn="ctr"/>
+          </a:p>
+        </p:txBody>
+      </p:sp>
+      <p:sp>
+        <p:nvSpPr>
+          <p:cNvPr id="22" name="TextBox 21"/>
+          <p:cNvSpPr txBox="1"/>
+          <p:nvPr/>
+        </p:nvSpPr>
+        <p:spPr>
+          <a:xfrm>
+            <a:off x="3474720" y="4242816"/>
+            <a:ext cx="2560320" cy="365760"/>
+          </a:xfrm>
+          <a:prstGeom prst="rect">
+            <a:avLst/>
+          </a:prstGeom>
+          <a:noFill/>
+        </p:spPr>
+        <p:txBody>
+          <a:bodyPr wrap="square">
+            <a:spAutoFit/>
+          </a:bodyPr>
+          <a:lstStyle/>
+          <a:p>
+            <a:pPr algn="l"/>
+            <a:r>
+              <a:rPr sz="1200" b="0">
+                <a:solidFill>
+                  <a:srgbClr val="1E1E2E"/>
+                </a:solidFill>
+              </a:rPr>
+              <a:t>9. 날짜별 일정표 생성</a:t>
+            </a:r>
+          </a:p>
+        </p:txBody>
+      </p:sp>
+      <p:sp>
+        <p:nvSpPr>
+          <p:cNvPr id="23" name="Rectangle 22"/>
+          <p:cNvSpPr/>
+          <p:nvPr/>
+        </p:nvSpPr>
+        <p:spPr>
+          <a:xfrm>
+            <a:off x="6400800" y="1371600"/>
+            <a:ext cx="5394960" cy="5120640"/>
           </a:xfrm>
           <a:prstGeom prst="rect">
             <a:avLst/>
@@ -5732,14 +6416,14 @@
       </p:sp>
       <p:sp>
         <p:nvSpPr>
-          <p:cNvPr id="17" name="TextBox 16"/>
-          <p:cNvSpPr txBox="1"/>
-          <p:nvPr/>
-        </p:nvSpPr>
-        <p:spPr>
-          <a:xfrm>
-            <a:off x="6400800" y="1417320"/>
-            <a:ext cx="5303520" cy="4937760"/>
+          <p:cNvPr id="24" name="TextBox 23"/>
+          <p:cNvSpPr txBox="1"/>
+          <p:nvPr/>
+        </p:nvSpPr>
+        <p:spPr>
+          <a:xfrm>
+            <a:off x="6583680" y="1508760"/>
+            <a:ext cx="5120640" cy="4846320"/>
           </a:xfrm>
           <a:prstGeom prst="rect">
             <a:avLst/>
@@ -5759,22 +6443,22 @@
                   <a:srgbClr val="A8E6FF"/>
                 </a:solidFill>
               </a:rPr>
-              <a:t>def react_execute(plan, query):
-    while iteration &lt; 25:
-        # Thought
-        response = client.chat(
-            messages=messages,
-            tools=TOOLS
-        )
-        # Action
-        if message.tool_calls:
-            result = execute_tool()
-            messages.append(result)
-        # Observe → 다음 반복
-        # 완료 판단
-        else:
-            break  # 루프 종료
-    return collected_results</a:t>
+              <a:t>def plan_phase(user_query):
+    response = client.chat(
+        messages=[
+            system_prompt,
+            user_query
+        ],
+        # JSON 형식으로만 응답
+        response_format={
+            "type": "json_object"
+        }
+    )
+    # 실행 계획 반환
+    # {"city": "제주",
+    #  "days": 4,
+    #  "steps": [...]}
+    return json.loads(response)</a:t>
             </a:r>
           </a:p>
         </p:txBody>
@@ -5872,12 +6556,12 @@
           <a:p>
             <a:pPr algn="l"/>
             <a:r>
-              <a:rPr sz="3000" b="1">
+              <a:rPr sz="2800" b="1">
                 <a:solidFill>
                   <a:srgbClr val="FFFFFF"/>
                 </a:solidFill>
               </a:rPr>
-              <a:t>전체 흐름 &amp; 파일 구조</a:t>
+              <a:t>ReAct: Reasoning + Acting  반복 루프</a:t>
             </a:r>
           </a:p>
         </p:txBody>
@@ -5890,8 +6574,8 @@
         </p:nvSpPr>
         <p:spPr>
           <a:xfrm>
-            <a:off x="365760" y="1371600"/>
-            <a:ext cx="3657600" cy="3474720"/>
+            <a:off x="457200" y="1463040"/>
+            <a:ext cx="5303520" cy="1097280"/>
           </a:xfrm>
           <a:prstGeom prst="rect">
             <a:avLst/>
@@ -5933,28 +6617,28 @@
         </p:nvSpPr>
         <p:spPr>
           <a:xfrm>
-            <a:off x="502920" y="1508760"/>
-            <a:ext cx="3383280" cy="411480"/>
-          </a:xfrm>
-          <a:prstGeom prst="rect">
-            <a:avLst/>
-          </a:prstGeom>
-          <a:noFill/>
-        </p:spPr>
-        <p:txBody>
-          <a:bodyPr wrap="square">
-            <a:spAutoFit/>
-          </a:bodyPr>
-          <a:lstStyle/>
-          <a:p>
-            <a:pPr algn="l"/>
-            <a:r>
-              <a:rPr sz="1200" b="1">
+            <a:off x="640080" y="1600200"/>
+            <a:ext cx="2286000" cy="457200"/>
+          </a:xfrm>
+          <a:prstGeom prst="rect">
+            <a:avLst/>
+          </a:prstGeom>
+          <a:noFill/>
+        </p:spPr>
+        <p:txBody>
+          <a:bodyPr wrap="square">
+            <a:spAutoFit/>
+          </a:bodyPr>
+          <a:lstStyle/>
+          <a:p>
+            <a:pPr algn="l"/>
+            <a:r>
+              <a:rPr sz="1800" b="1">
                 <a:solidFill>
                   <a:srgbClr val="265DC8"/>
                 </a:solidFill>
               </a:rPr>
-              <a:t>Phase 1</a:t>
+              <a:t>🧠 Thought</a:t>
             </a:r>
           </a:p>
         </p:txBody>
@@ -5967,42 +6651,366 @@
         </p:nvSpPr>
         <p:spPr>
           <a:xfrm>
-            <a:off x="502920" y="1920240"/>
-            <a:ext cx="3383280" cy="640080"/>
-          </a:xfrm>
-          <a:prstGeom prst="rect">
-            <a:avLst/>
-          </a:prstGeom>
-          <a:noFill/>
-        </p:spPr>
-        <p:txBody>
-          <a:bodyPr wrap="square">
-            <a:spAutoFit/>
-          </a:bodyPr>
-          <a:lstStyle/>
-          <a:p>
-            <a:pPr algn="l"/>
-            <a:r>
-              <a:rPr sz="2400" b="1">
+            <a:off x="3017520" y="1691640"/>
+            <a:ext cx="2743200" cy="457200"/>
+          </a:xfrm>
+          <a:prstGeom prst="rect">
+            <a:avLst/>
+          </a:prstGeom>
+          <a:noFill/>
+        </p:spPr>
+        <p:txBody>
+          <a:bodyPr wrap="square">
+            <a:spAutoFit/>
+          </a:bodyPr>
+          <a:lstStyle/>
+          <a:p>
+            <a:pPr algn="l"/>
+            <a:r>
+              <a:rPr sz="1300" b="0">
                 <a:solidFill>
                   <a:srgbClr val="1E1E2E"/>
                 </a:solidFill>
               </a:rPr>
-              <a:t>Plan</a:t>
-            </a:r>
-          </a:p>
-        </p:txBody>
-      </p:sp>
-      <p:sp>
-        <p:nvSpPr>
-          <p:cNvPr id="7" name="Rectangle 6"/>
+              <a:t>다음에 뭘 해야 할지 생각</a:t>
+            </a:r>
+          </a:p>
+        </p:txBody>
+      </p:sp>
+      <p:sp>
+        <p:nvSpPr>
+          <p:cNvPr id="7" name="TextBox 6"/>
+          <p:cNvSpPr txBox="1"/>
+          <p:nvPr/>
+        </p:nvSpPr>
+        <p:spPr>
+          <a:xfrm>
+            <a:off x="3017520" y="2514600"/>
+            <a:ext cx="914400" cy="365760"/>
+          </a:xfrm>
+          <a:prstGeom prst="rect">
+            <a:avLst/>
+          </a:prstGeom>
+          <a:noFill/>
+        </p:spPr>
+        <p:txBody>
+          <a:bodyPr wrap="square">
+            <a:spAutoFit/>
+          </a:bodyPr>
+          <a:lstStyle/>
+          <a:p>
+            <a:pPr algn="l"/>
+            <a:r>
+              <a:rPr sz="2000" b="1">
+                <a:solidFill>
+                  <a:srgbClr val="265DC8"/>
+                </a:solidFill>
+              </a:rPr>
+              <a:t>↓</a:t>
+            </a:r>
+          </a:p>
+        </p:txBody>
+      </p:sp>
+      <p:sp>
+        <p:nvSpPr>
+          <p:cNvPr id="8" name="Rectangle 7"/>
           <p:cNvSpPr/>
           <p:nvPr/>
         </p:nvSpPr>
         <p:spPr>
           <a:xfrm>
-            <a:off x="502920" y="2606040"/>
-            <a:ext cx="3383280" cy="457200"/>
+            <a:off x="457200" y="2834640"/>
+            <a:ext cx="5303520" cy="1097280"/>
+          </a:xfrm>
+          <a:prstGeom prst="rect">
+            <a:avLst/>
+          </a:prstGeom>
+          <a:solidFill>
+            <a:srgbClr val="FFF7E6"/>
+          </a:solidFill>
+          <a:ln>
+            <a:noFill/>
+          </a:ln>
+        </p:spPr>
+        <p:style>
+          <a:lnRef idx="1">
+            <a:schemeClr val="accent1"/>
+          </a:lnRef>
+          <a:fillRef idx="3">
+            <a:schemeClr val="accent1"/>
+          </a:fillRef>
+          <a:effectRef idx="2">
+            <a:schemeClr val="accent1"/>
+          </a:effectRef>
+          <a:fontRef idx="minor">
+            <a:schemeClr val="lt1"/>
+          </a:fontRef>
+        </p:style>
+        <p:txBody>
+          <a:bodyPr rtlCol="0" anchor="ctr"/>
+          <a:lstStyle/>
+          <a:p>
+            <a:pPr algn="ctr"/>
+          </a:p>
+        </p:txBody>
+      </p:sp>
+      <p:sp>
+        <p:nvSpPr>
+          <p:cNvPr id="9" name="TextBox 8"/>
+          <p:cNvSpPr txBox="1"/>
+          <p:nvPr/>
+        </p:nvSpPr>
+        <p:spPr>
+          <a:xfrm>
+            <a:off x="640080" y="2971800"/>
+            <a:ext cx="2286000" cy="457200"/>
+          </a:xfrm>
+          <a:prstGeom prst="rect">
+            <a:avLst/>
+          </a:prstGeom>
+          <a:noFill/>
+        </p:spPr>
+        <p:txBody>
+          <a:bodyPr wrap="square">
+            <a:spAutoFit/>
+          </a:bodyPr>
+          <a:lstStyle/>
+          <a:p>
+            <a:pPr algn="l"/>
+            <a:r>
+              <a:rPr sz="1800" b="1">
+                <a:solidFill>
+                  <a:srgbClr val="EA580C"/>
+                </a:solidFill>
+              </a:rPr>
+              <a:t>⚡ Action</a:t>
+            </a:r>
+          </a:p>
+        </p:txBody>
+      </p:sp>
+      <p:sp>
+        <p:nvSpPr>
+          <p:cNvPr id="10" name="TextBox 9"/>
+          <p:cNvSpPr txBox="1"/>
+          <p:nvPr/>
+        </p:nvSpPr>
+        <p:spPr>
+          <a:xfrm>
+            <a:off x="3017520" y="3063240"/>
+            <a:ext cx="2743200" cy="457200"/>
+          </a:xfrm>
+          <a:prstGeom prst="rect">
+            <a:avLst/>
+          </a:prstGeom>
+          <a:noFill/>
+        </p:spPr>
+        <p:txBody>
+          <a:bodyPr wrap="square">
+            <a:spAutoFit/>
+          </a:bodyPr>
+          <a:lstStyle/>
+          <a:p>
+            <a:pPr algn="l"/>
+            <a:r>
+              <a:rPr sz="1300" b="0">
+                <a:solidFill>
+                  <a:srgbClr val="1E1E2E"/>
+                </a:solidFill>
+              </a:rPr>
+              <a:t>적절한 도구 호출</a:t>
+            </a:r>
+          </a:p>
+        </p:txBody>
+      </p:sp>
+      <p:sp>
+        <p:nvSpPr>
+          <p:cNvPr id="11" name="TextBox 10"/>
+          <p:cNvSpPr txBox="1"/>
+          <p:nvPr/>
+        </p:nvSpPr>
+        <p:spPr>
+          <a:xfrm>
+            <a:off x="3017520" y="3886200"/>
+            <a:ext cx="914400" cy="365760"/>
+          </a:xfrm>
+          <a:prstGeom prst="rect">
+            <a:avLst/>
+          </a:prstGeom>
+          <a:noFill/>
+        </p:spPr>
+        <p:txBody>
+          <a:bodyPr wrap="square">
+            <a:spAutoFit/>
+          </a:bodyPr>
+          <a:lstStyle/>
+          <a:p>
+            <a:pPr algn="l"/>
+            <a:r>
+              <a:rPr sz="2000" b="1">
+                <a:solidFill>
+                  <a:srgbClr val="265DC8"/>
+                </a:solidFill>
+              </a:rPr>
+              <a:t>↓</a:t>
+            </a:r>
+          </a:p>
+        </p:txBody>
+      </p:sp>
+      <p:sp>
+        <p:nvSpPr>
+          <p:cNvPr id="12" name="Rectangle 11"/>
+          <p:cNvSpPr/>
+          <p:nvPr/>
+        </p:nvSpPr>
+        <p:spPr>
+          <a:xfrm>
+            <a:off x="457200" y="4206240"/>
+            <a:ext cx="5303520" cy="1097280"/>
+          </a:xfrm>
+          <a:prstGeom prst="rect">
+            <a:avLst/>
+          </a:prstGeom>
+          <a:solidFill>
+            <a:srgbClr val="F0FFF4"/>
+          </a:solidFill>
+          <a:ln>
+            <a:noFill/>
+          </a:ln>
+        </p:spPr>
+        <p:style>
+          <a:lnRef idx="1">
+            <a:schemeClr val="accent1"/>
+          </a:lnRef>
+          <a:fillRef idx="3">
+            <a:schemeClr val="accent1"/>
+          </a:fillRef>
+          <a:effectRef idx="2">
+            <a:schemeClr val="accent1"/>
+          </a:effectRef>
+          <a:fontRef idx="minor">
+            <a:schemeClr val="lt1"/>
+          </a:fontRef>
+        </p:style>
+        <p:txBody>
+          <a:bodyPr rtlCol="0" anchor="ctr"/>
+          <a:lstStyle/>
+          <a:p>
+            <a:pPr algn="ctr"/>
+          </a:p>
+        </p:txBody>
+      </p:sp>
+      <p:sp>
+        <p:nvSpPr>
+          <p:cNvPr id="13" name="TextBox 12"/>
+          <p:cNvSpPr txBox="1"/>
+          <p:nvPr/>
+        </p:nvSpPr>
+        <p:spPr>
+          <a:xfrm>
+            <a:off x="640080" y="4343400"/>
+            <a:ext cx="2286000" cy="457200"/>
+          </a:xfrm>
+          <a:prstGeom prst="rect">
+            <a:avLst/>
+          </a:prstGeom>
+          <a:noFill/>
+        </p:spPr>
+        <p:txBody>
+          <a:bodyPr wrap="square">
+            <a:spAutoFit/>
+          </a:bodyPr>
+          <a:lstStyle/>
+          <a:p>
+            <a:pPr algn="l"/>
+            <a:r>
+              <a:rPr sz="1800" b="1">
+                <a:solidFill>
+                  <a:srgbClr val="16A34A"/>
+                </a:solidFill>
+              </a:rPr>
+              <a:t>👁 Observe</a:t>
+            </a:r>
+          </a:p>
+        </p:txBody>
+      </p:sp>
+      <p:sp>
+        <p:nvSpPr>
+          <p:cNvPr id="14" name="TextBox 13"/>
+          <p:cNvSpPr txBox="1"/>
+          <p:nvPr/>
+        </p:nvSpPr>
+        <p:spPr>
+          <a:xfrm>
+            <a:off x="3017520" y="4434840"/>
+            <a:ext cx="2743200" cy="457200"/>
+          </a:xfrm>
+          <a:prstGeom prst="rect">
+            <a:avLst/>
+          </a:prstGeom>
+          <a:noFill/>
+        </p:spPr>
+        <p:txBody>
+          <a:bodyPr wrap="square">
+            <a:spAutoFit/>
+          </a:bodyPr>
+          <a:lstStyle/>
+          <a:p>
+            <a:pPr algn="l"/>
+            <a:r>
+              <a:rPr sz="1300" b="0">
+                <a:solidFill>
+                  <a:srgbClr val="1E1E2E"/>
+                </a:solidFill>
+              </a:rPr>
+              <a:t>결과 확인 후 다음 결정</a:t>
+            </a:r>
+          </a:p>
+        </p:txBody>
+      </p:sp>
+      <p:sp>
+        <p:nvSpPr>
+          <p:cNvPr id="15" name="TextBox 14"/>
+          <p:cNvSpPr txBox="1"/>
+          <p:nvPr/>
+        </p:nvSpPr>
+        <p:spPr>
+          <a:xfrm>
+            <a:off x="457200" y="5669280"/>
+            <a:ext cx="5303520" cy="457200"/>
+          </a:xfrm>
+          <a:prstGeom prst="rect">
+            <a:avLst/>
+          </a:prstGeom>
+          <a:noFill/>
+        </p:spPr>
+        <p:txBody>
+          <a:bodyPr wrap="square">
+            <a:spAutoFit/>
+          </a:bodyPr>
+          <a:lstStyle/>
+          <a:p>
+            <a:pPr algn="ctr"/>
+            <a:r>
+              <a:rPr sz="1300" b="1">
+                <a:solidFill>
+                  <a:srgbClr val="265DC8"/>
+                </a:solidFill>
+              </a:rPr>
+              <a:t>AI가 '완료'라고 판단할 때까지 반복</a:t>
+            </a:r>
+          </a:p>
+        </p:txBody>
+      </p:sp>
+      <p:sp>
+        <p:nvSpPr>
+          <p:cNvPr id="16" name="Rectangle 15"/>
+          <p:cNvSpPr/>
+          <p:nvPr/>
+        </p:nvSpPr>
+        <p:spPr>
+          <a:xfrm>
+            <a:off x="6217920" y="1280160"/>
+            <a:ext cx="5577840" cy="5212080"/>
           </a:xfrm>
           <a:prstGeom prst="rect">
             <a:avLst/>
@@ -6038,1233 +7046,49 @@
       </p:sp>
       <p:sp>
         <p:nvSpPr>
-          <p:cNvPr id="8" name="TextBox 7"/>
-          <p:cNvSpPr txBox="1"/>
-          <p:nvPr/>
-        </p:nvSpPr>
-        <p:spPr>
-          <a:xfrm>
-            <a:off x="548640" y="2633472"/>
-            <a:ext cx="3291840" cy="402336"/>
-          </a:xfrm>
-          <a:prstGeom prst="rect">
-            <a:avLst/>
-          </a:prstGeom>
-          <a:noFill/>
-        </p:spPr>
-        <p:txBody>
-          <a:bodyPr wrap="square">
-            <a:spAutoFit/>
-          </a:bodyPr>
-          <a:lstStyle/>
-          <a:p>
-            <a:pPr algn="l"/>
-            <a:r>
-              <a:rPr sz="1200" b="1">
+          <p:cNvPr id="17" name="TextBox 16"/>
+          <p:cNvSpPr txBox="1"/>
+          <p:nvPr/>
+        </p:nvSpPr>
+        <p:spPr>
+          <a:xfrm>
+            <a:off x="6400800" y="1417320"/>
+            <a:ext cx="5303520" cy="4937760"/>
+          </a:xfrm>
+          <a:prstGeom prst="rect">
+            <a:avLst/>
+          </a:prstGeom>
+          <a:noFill/>
+        </p:spPr>
+        <p:txBody>
+          <a:bodyPr wrap="square">
+            <a:spAutoFit/>
+          </a:bodyPr>
+          <a:lstStyle/>
+          <a:p>
+            <a:pPr algn="l"/>
+            <a:r>
+              <a:rPr sz="1100" b="0">
                 <a:solidFill>
                   <a:srgbClr val="A8E6FF"/>
                 </a:solidFill>
               </a:rPr>
-              <a:t>plan_phase()</a:t>
-            </a:r>
-          </a:p>
-        </p:txBody>
-      </p:sp>
-      <p:sp>
-        <p:nvSpPr>
-          <p:cNvPr id="9" name="TextBox 8"/>
-          <p:cNvSpPr txBox="1"/>
-          <p:nvPr/>
-        </p:nvSpPr>
-        <p:spPr>
-          <a:xfrm>
-            <a:off x="502920" y="3154680"/>
-            <a:ext cx="3383280" cy="822960"/>
-          </a:xfrm>
-          <a:prstGeom prst="rect">
-            <a:avLst/>
-          </a:prstGeom>
-          <a:noFill/>
-        </p:spPr>
-        <p:txBody>
-          <a:bodyPr wrap="square">
-            <a:spAutoFit/>
-          </a:bodyPr>
-          <a:lstStyle/>
-          <a:p>
-            <a:pPr algn="l"/>
-            <a:r>
-              <a:rPr sz="1300" b="0">
-                <a:solidFill>
-                  <a:srgbClr val="1E1E2E"/>
-                </a:solidFill>
-              </a:rPr>
-              <a:t>계획 수립
-JSON 반환</a:t>
-            </a:r>
-          </a:p>
-        </p:txBody>
-      </p:sp>
-      <p:sp>
-        <p:nvSpPr>
-          <p:cNvPr id="10" name="TextBox 9"/>
-          <p:cNvSpPr txBox="1"/>
-          <p:nvPr/>
-        </p:nvSpPr>
-        <p:spPr>
-          <a:xfrm>
-            <a:off x="4069080" y="2651760"/>
-            <a:ext cx="457200" cy="457200"/>
-          </a:xfrm>
-          <a:prstGeom prst="rect">
-            <a:avLst/>
-          </a:prstGeom>
-          <a:noFill/>
-        </p:spPr>
-        <p:txBody>
-          <a:bodyPr wrap="square">
-            <a:spAutoFit/>
-          </a:bodyPr>
-          <a:lstStyle/>
-          <a:p>
-            <a:pPr algn="l"/>
-            <a:r>
-              <a:rPr sz="2800" b="1">
-                <a:solidFill>
-                  <a:srgbClr val="265DC8"/>
-                </a:solidFill>
-              </a:rPr>
-              <a:t>→</a:t>
-            </a:r>
-          </a:p>
-        </p:txBody>
-      </p:sp>
-      <p:sp>
-        <p:nvSpPr>
-          <p:cNvPr id="11" name="Rectangle 10"/>
-          <p:cNvSpPr/>
-          <p:nvPr/>
-        </p:nvSpPr>
-        <p:spPr>
-          <a:xfrm>
-            <a:off x="4297680" y="1371600"/>
-            <a:ext cx="3657600" cy="3474720"/>
-          </a:xfrm>
-          <a:prstGeom prst="rect">
-            <a:avLst/>
-          </a:prstGeom>
-          <a:solidFill>
-            <a:srgbClr val="E8FFF0"/>
-          </a:solidFill>
-          <a:ln>
-            <a:noFill/>
-          </a:ln>
-        </p:spPr>
-        <p:style>
-          <a:lnRef idx="1">
-            <a:schemeClr val="accent1"/>
-          </a:lnRef>
-          <a:fillRef idx="3">
-            <a:schemeClr val="accent1"/>
-          </a:fillRef>
-          <a:effectRef idx="2">
-            <a:schemeClr val="accent1"/>
-          </a:effectRef>
-          <a:fontRef idx="minor">
-            <a:schemeClr val="lt1"/>
-          </a:fontRef>
-        </p:style>
-        <p:txBody>
-          <a:bodyPr rtlCol="0" anchor="ctr"/>
-          <a:lstStyle/>
-          <a:p>
-            <a:pPr algn="ctr"/>
-          </a:p>
-        </p:txBody>
-      </p:sp>
-      <p:sp>
-        <p:nvSpPr>
-          <p:cNvPr id="12" name="TextBox 11"/>
-          <p:cNvSpPr txBox="1"/>
-          <p:nvPr/>
-        </p:nvSpPr>
-        <p:spPr>
-          <a:xfrm>
-            <a:off x="4434840" y="1508760"/>
-            <a:ext cx="3383280" cy="411480"/>
-          </a:xfrm>
-          <a:prstGeom prst="rect">
-            <a:avLst/>
-          </a:prstGeom>
-          <a:noFill/>
-        </p:spPr>
-        <p:txBody>
-          <a:bodyPr wrap="square">
-            <a:spAutoFit/>
-          </a:bodyPr>
-          <a:lstStyle/>
-          <a:p>
-            <a:pPr algn="l"/>
-            <a:r>
-              <a:rPr sz="1200" b="1">
-                <a:solidFill>
-                  <a:srgbClr val="265DC8"/>
-                </a:solidFill>
-              </a:rPr>
-              <a:t>Phase 2</a:t>
-            </a:r>
-          </a:p>
-        </p:txBody>
-      </p:sp>
-      <p:sp>
-        <p:nvSpPr>
-          <p:cNvPr id="13" name="TextBox 12"/>
-          <p:cNvSpPr txBox="1"/>
-          <p:nvPr/>
-        </p:nvSpPr>
-        <p:spPr>
-          <a:xfrm>
-            <a:off x="4434840" y="1920240"/>
-            <a:ext cx="3383280" cy="640080"/>
-          </a:xfrm>
-          <a:prstGeom prst="rect">
-            <a:avLst/>
-          </a:prstGeom>
-          <a:noFill/>
-        </p:spPr>
-        <p:txBody>
-          <a:bodyPr wrap="square">
-            <a:spAutoFit/>
-          </a:bodyPr>
-          <a:lstStyle/>
-          <a:p>
-            <a:pPr algn="l"/>
-            <a:r>
-              <a:rPr sz="2400" b="1">
-                <a:solidFill>
-                  <a:srgbClr val="1E1E2E"/>
-                </a:solidFill>
-              </a:rPr>
-              <a:t>ReAct</a:t>
-            </a:r>
-          </a:p>
-        </p:txBody>
-      </p:sp>
-      <p:sp>
-        <p:nvSpPr>
-          <p:cNvPr id="14" name="Rectangle 13"/>
-          <p:cNvSpPr/>
-          <p:nvPr/>
-        </p:nvSpPr>
-        <p:spPr>
-          <a:xfrm>
-            <a:off x="4434840" y="2606040"/>
-            <a:ext cx="3383280" cy="457200"/>
-          </a:xfrm>
-          <a:prstGeom prst="rect">
-            <a:avLst/>
-          </a:prstGeom>
-          <a:solidFill>
-            <a:srgbClr val="1E1E2E"/>
-          </a:solidFill>
-          <a:ln>
-            <a:noFill/>
-          </a:ln>
-        </p:spPr>
-        <p:style>
-          <a:lnRef idx="1">
-            <a:schemeClr val="accent1"/>
-          </a:lnRef>
-          <a:fillRef idx="3">
-            <a:schemeClr val="accent1"/>
-          </a:fillRef>
-          <a:effectRef idx="2">
-            <a:schemeClr val="accent1"/>
-          </a:effectRef>
-          <a:fontRef idx="minor">
-            <a:schemeClr val="lt1"/>
-          </a:fontRef>
-        </p:style>
-        <p:txBody>
-          <a:bodyPr rtlCol="0" anchor="ctr"/>
-          <a:lstStyle/>
-          <a:p>
-            <a:pPr algn="ctr"/>
-          </a:p>
-        </p:txBody>
-      </p:sp>
-      <p:sp>
-        <p:nvSpPr>
-          <p:cNvPr id="15" name="TextBox 14"/>
-          <p:cNvSpPr txBox="1"/>
-          <p:nvPr/>
-        </p:nvSpPr>
-        <p:spPr>
-          <a:xfrm>
-            <a:off x="4480560" y="2633472"/>
-            <a:ext cx="3291840" cy="402336"/>
-          </a:xfrm>
-          <a:prstGeom prst="rect">
-            <a:avLst/>
-          </a:prstGeom>
-          <a:noFill/>
-        </p:spPr>
-        <p:txBody>
-          <a:bodyPr wrap="square">
-            <a:spAutoFit/>
-          </a:bodyPr>
-          <a:lstStyle/>
-          <a:p>
-            <a:pPr algn="l"/>
-            <a:r>
-              <a:rPr sz="1200" b="1">
-                <a:solidFill>
-                  <a:srgbClr val="A8E6FF"/>
-                </a:solidFill>
-              </a:rPr>
-              <a:t>react_execute()</a:t>
-            </a:r>
-          </a:p>
-        </p:txBody>
-      </p:sp>
-      <p:sp>
-        <p:nvSpPr>
-          <p:cNvPr id="16" name="TextBox 15"/>
-          <p:cNvSpPr txBox="1"/>
-          <p:nvPr/>
-        </p:nvSpPr>
-        <p:spPr>
-          <a:xfrm>
-            <a:off x="4434840" y="3154680"/>
-            <a:ext cx="3383280" cy="822960"/>
-          </a:xfrm>
-          <a:prstGeom prst="rect">
-            <a:avLst/>
-          </a:prstGeom>
-          <a:noFill/>
-        </p:spPr>
-        <p:txBody>
-          <a:bodyPr wrap="square">
-            <a:spAutoFit/>
-          </a:bodyPr>
-          <a:lstStyle/>
-          <a:p>
-            <a:pPr algn="l"/>
-            <a:r>
-              <a:rPr sz="1300" b="0">
-                <a:solidFill>
-                  <a:srgbClr val="1E1E2E"/>
-                </a:solidFill>
-              </a:rPr>
-              <a:t>10개 도구
-자율 호출</a:t>
-            </a:r>
-          </a:p>
-        </p:txBody>
-      </p:sp>
-      <p:sp>
-        <p:nvSpPr>
-          <p:cNvPr id="17" name="TextBox 16"/>
-          <p:cNvSpPr txBox="1"/>
-          <p:nvPr/>
-        </p:nvSpPr>
-        <p:spPr>
-          <a:xfrm>
-            <a:off x="8001000" y="2651760"/>
-            <a:ext cx="457200" cy="457200"/>
-          </a:xfrm>
-          <a:prstGeom prst="rect">
-            <a:avLst/>
-          </a:prstGeom>
-          <a:noFill/>
-        </p:spPr>
-        <p:txBody>
-          <a:bodyPr wrap="square">
-            <a:spAutoFit/>
-          </a:bodyPr>
-          <a:lstStyle/>
-          <a:p>
-            <a:pPr algn="l"/>
-            <a:r>
-              <a:rPr sz="2800" b="1">
-                <a:solidFill>
-                  <a:srgbClr val="265DC8"/>
-                </a:solidFill>
-              </a:rPr>
-              <a:t>→</a:t>
-            </a:r>
-          </a:p>
-        </p:txBody>
-      </p:sp>
-      <p:sp>
-        <p:nvSpPr>
-          <p:cNvPr id="18" name="Rectangle 17"/>
-          <p:cNvSpPr/>
-          <p:nvPr/>
-        </p:nvSpPr>
-        <p:spPr>
-          <a:xfrm>
-            <a:off x="8229600" y="1371600"/>
-            <a:ext cx="3657600" cy="3474720"/>
-          </a:xfrm>
-          <a:prstGeom prst="rect">
-            <a:avLst/>
-          </a:prstGeom>
-          <a:solidFill>
-            <a:srgbClr val="FFF7E6"/>
-          </a:solidFill>
-          <a:ln>
-            <a:noFill/>
-          </a:ln>
-        </p:spPr>
-        <p:style>
-          <a:lnRef idx="1">
-            <a:schemeClr val="accent1"/>
-          </a:lnRef>
-          <a:fillRef idx="3">
-            <a:schemeClr val="accent1"/>
-          </a:fillRef>
-          <a:effectRef idx="2">
-            <a:schemeClr val="accent1"/>
-          </a:effectRef>
-          <a:fontRef idx="minor">
-            <a:schemeClr val="lt1"/>
-          </a:fontRef>
-        </p:style>
-        <p:txBody>
-          <a:bodyPr rtlCol="0" anchor="ctr"/>
-          <a:lstStyle/>
-          <a:p>
-            <a:pPr algn="ctr"/>
-          </a:p>
-        </p:txBody>
-      </p:sp>
-      <p:sp>
-        <p:nvSpPr>
-          <p:cNvPr id="19" name="TextBox 18"/>
-          <p:cNvSpPr txBox="1"/>
-          <p:nvPr/>
-        </p:nvSpPr>
-        <p:spPr>
-          <a:xfrm>
-            <a:off x="8366760" y="1508760"/>
-            <a:ext cx="3383280" cy="411480"/>
-          </a:xfrm>
-          <a:prstGeom prst="rect">
-            <a:avLst/>
-          </a:prstGeom>
-          <a:noFill/>
-        </p:spPr>
-        <p:txBody>
-          <a:bodyPr wrap="square">
-            <a:spAutoFit/>
-          </a:bodyPr>
-          <a:lstStyle/>
-          <a:p>
-            <a:pPr algn="l"/>
-            <a:r>
-              <a:rPr sz="1200" b="1">
-                <a:solidFill>
-                  <a:srgbClr val="265DC8"/>
-                </a:solidFill>
-              </a:rPr>
-              <a:t>Phase 3</a:t>
-            </a:r>
-          </a:p>
-        </p:txBody>
-      </p:sp>
-      <p:sp>
-        <p:nvSpPr>
-          <p:cNvPr id="20" name="TextBox 19"/>
-          <p:cNvSpPr txBox="1"/>
-          <p:nvPr/>
-        </p:nvSpPr>
-        <p:spPr>
-          <a:xfrm>
-            <a:off x="8366760" y="1920240"/>
-            <a:ext cx="3383280" cy="640080"/>
-          </a:xfrm>
-          <a:prstGeom prst="rect">
-            <a:avLst/>
-          </a:prstGeom>
-          <a:noFill/>
-        </p:spPr>
-        <p:txBody>
-          <a:bodyPr wrap="square">
-            <a:spAutoFit/>
-          </a:bodyPr>
-          <a:lstStyle/>
-          <a:p>
-            <a:pPr algn="l"/>
-            <a:r>
-              <a:rPr sz="2400" b="1">
-                <a:solidFill>
-                  <a:srgbClr val="1E1E2E"/>
-                </a:solidFill>
-              </a:rPr>
-              <a:t>Output</a:t>
-            </a:r>
-          </a:p>
-        </p:txBody>
-      </p:sp>
-      <p:sp>
-        <p:nvSpPr>
-          <p:cNvPr id="21" name="Rectangle 20"/>
-          <p:cNvSpPr/>
-          <p:nvPr/>
-        </p:nvSpPr>
-        <p:spPr>
-          <a:xfrm>
-            <a:off x="8366760" y="2606040"/>
-            <a:ext cx="3383280" cy="457200"/>
-          </a:xfrm>
-          <a:prstGeom prst="rect">
-            <a:avLst/>
-          </a:prstGeom>
-          <a:solidFill>
-            <a:srgbClr val="1E1E2E"/>
-          </a:solidFill>
-          <a:ln>
-            <a:noFill/>
-          </a:ln>
-        </p:spPr>
-        <p:style>
-          <a:lnRef idx="1">
-            <a:schemeClr val="accent1"/>
-          </a:lnRef>
-          <a:fillRef idx="3">
-            <a:schemeClr val="accent1"/>
-          </a:fillRef>
-          <a:effectRef idx="2">
-            <a:schemeClr val="accent1"/>
-          </a:effectRef>
-          <a:fontRef idx="minor">
-            <a:schemeClr val="lt1"/>
-          </a:fontRef>
-        </p:style>
-        <p:txBody>
-          <a:bodyPr rtlCol="0" anchor="ctr"/>
-          <a:lstStyle/>
-          <a:p>
-            <a:pPr algn="ctr"/>
-          </a:p>
-        </p:txBody>
-      </p:sp>
-      <p:sp>
-        <p:nvSpPr>
-          <p:cNvPr id="22" name="TextBox 21"/>
-          <p:cNvSpPr txBox="1"/>
-          <p:nvPr/>
-        </p:nvSpPr>
-        <p:spPr>
-          <a:xfrm>
-            <a:off x="8412480" y="2633472"/>
-            <a:ext cx="3291840" cy="402336"/>
-          </a:xfrm>
-          <a:prstGeom prst="rect">
-            <a:avLst/>
-          </a:prstGeom>
-          <a:noFill/>
-        </p:spPr>
-        <p:txBody>
-          <a:bodyPr wrap="square">
-            <a:spAutoFit/>
-          </a:bodyPr>
-          <a:lstStyle/>
-          <a:p>
-            <a:pPr algn="l"/>
-            <a:r>
-              <a:rPr sz="1200" b="1">
-                <a:solidFill>
-                  <a:srgbClr val="A8E6FF"/>
-                </a:solidFill>
-              </a:rPr>
-              <a:t>generate_html()</a:t>
-            </a:r>
-          </a:p>
-        </p:txBody>
-      </p:sp>
-      <p:sp>
-        <p:nvSpPr>
-          <p:cNvPr id="23" name="TextBox 22"/>
-          <p:cNvSpPr txBox="1"/>
-          <p:nvPr/>
-        </p:nvSpPr>
-        <p:spPr>
-          <a:xfrm>
-            <a:off x="8366760" y="3154680"/>
-            <a:ext cx="3383280" cy="822960"/>
-          </a:xfrm>
-          <a:prstGeom prst="rect">
-            <a:avLst/>
-          </a:prstGeom>
-          <a:noFill/>
-        </p:spPr>
-        <p:txBody>
-          <a:bodyPr wrap="square">
-            <a:spAutoFit/>
-          </a:bodyPr>
-          <a:lstStyle/>
-          <a:p>
-            <a:pPr algn="l"/>
-            <a:r>
-              <a:rPr sz="1300" b="0">
-                <a:solidFill>
-                  <a:srgbClr val="1E1E2E"/>
-                </a:solidFill>
-              </a:rPr>
-              <a:t>HTML
-보고서 생성</a:t>
-            </a:r>
-          </a:p>
-        </p:txBody>
-      </p:sp>
-      <p:sp>
-        <p:nvSpPr>
-          <p:cNvPr id="24" name="TextBox 23"/>
-          <p:cNvSpPr txBox="1"/>
-          <p:nvPr/>
-        </p:nvSpPr>
-        <p:spPr>
-          <a:xfrm>
-            <a:off x="365760" y="5074920"/>
-            <a:ext cx="2743200" cy="365760"/>
-          </a:xfrm>
-          <a:prstGeom prst="rect">
-            <a:avLst/>
-          </a:prstGeom>
-          <a:noFill/>
-        </p:spPr>
-        <p:txBody>
-          <a:bodyPr wrap="square">
-            <a:spAutoFit/>
-          </a:bodyPr>
-          <a:lstStyle/>
-          <a:p>
-            <a:pPr algn="l"/>
-            <a:r>
-              <a:rPr sz="1400" b="1">
-                <a:solidFill>
-                  <a:srgbClr val="1E1E2E"/>
-                </a:solidFill>
-              </a:rPr>
-              <a:t>파일 구조</a:t>
-            </a:r>
-          </a:p>
-        </p:txBody>
-      </p:sp>
-      <p:sp>
-        <p:nvSpPr>
-          <p:cNvPr id="25" name="Rectangle 24"/>
-          <p:cNvSpPr/>
-          <p:nvPr/>
-        </p:nvSpPr>
-        <p:spPr>
-          <a:xfrm>
-            <a:off x="365760" y="5440680"/>
-            <a:ext cx="2788920" cy="1051560"/>
-          </a:xfrm>
-          <a:prstGeom prst="rect">
-            <a:avLst/>
-          </a:prstGeom>
-          <a:solidFill>
-            <a:srgbClr val="FFFFFF"/>
-          </a:solidFill>
-          <a:ln>
-            <a:noFill/>
-          </a:ln>
-        </p:spPr>
-        <p:style>
-          <a:lnRef idx="1">
-            <a:schemeClr val="accent1"/>
-          </a:lnRef>
-          <a:fillRef idx="3">
-            <a:schemeClr val="accent1"/>
-          </a:fillRef>
-          <a:effectRef idx="2">
-            <a:schemeClr val="accent1"/>
-          </a:effectRef>
-          <a:fontRef idx="minor">
-            <a:schemeClr val="lt1"/>
-          </a:fontRef>
-        </p:style>
-        <p:txBody>
-          <a:bodyPr rtlCol="0" anchor="ctr"/>
-          <a:lstStyle/>
-          <a:p>
-            <a:pPr algn="ctr"/>
-          </a:p>
-        </p:txBody>
-      </p:sp>
-      <p:sp>
-        <p:nvSpPr>
-          <p:cNvPr id="26" name="Rectangle 25"/>
-          <p:cNvSpPr/>
-          <p:nvPr/>
-        </p:nvSpPr>
-        <p:spPr>
-          <a:xfrm>
-            <a:off x="365760" y="5440680"/>
-            <a:ext cx="2788920" cy="347472"/>
-          </a:xfrm>
-          <a:prstGeom prst="rect">
-            <a:avLst/>
-          </a:prstGeom>
-          <a:solidFill>
-            <a:srgbClr val="265DC8"/>
-          </a:solidFill>
-          <a:ln>
-            <a:noFill/>
-          </a:ln>
-        </p:spPr>
-        <p:style>
-          <a:lnRef idx="1">
-            <a:schemeClr val="accent1"/>
-          </a:lnRef>
-          <a:fillRef idx="3">
-            <a:schemeClr val="accent1"/>
-          </a:fillRef>
-          <a:effectRef idx="2">
-            <a:schemeClr val="accent1"/>
-          </a:effectRef>
-          <a:fontRef idx="minor">
-            <a:schemeClr val="lt1"/>
-          </a:fontRef>
-        </p:style>
-        <p:txBody>
-          <a:bodyPr rtlCol="0" anchor="ctr"/>
-          <a:lstStyle/>
-          <a:p>
-            <a:pPr algn="ctr"/>
-          </a:p>
-        </p:txBody>
-      </p:sp>
-      <p:sp>
-        <p:nvSpPr>
-          <p:cNvPr id="27" name="TextBox 26"/>
-          <p:cNvSpPr txBox="1"/>
-          <p:nvPr/>
-        </p:nvSpPr>
-        <p:spPr>
-          <a:xfrm>
-            <a:off x="438912" y="5458968"/>
-            <a:ext cx="2651760" cy="320040"/>
-          </a:xfrm>
-          <a:prstGeom prst="rect">
-            <a:avLst/>
-          </a:prstGeom>
-          <a:noFill/>
-        </p:spPr>
-        <p:txBody>
-          <a:bodyPr wrap="square">
-            <a:spAutoFit/>
-          </a:bodyPr>
-          <a:lstStyle/>
-          <a:p>
-            <a:pPr algn="l"/>
-            <a:r>
-              <a:rPr sz="1100" b="1">
-                <a:solidFill>
-                  <a:srgbClr val="FFFFFF"/>
-                </a:solidFill>
-              </a:rPr>
-              <a:t>tools.py</a:t>
-            </a:r>
-          </a:p>
-        </p:txBody>
-      </p:sp>
-      <p:sp>
-        <p:nvSpPr>
-          <p:cNvPr id="28" name="TextBox 27"/>
-          <p:cNvSpPr txBox="1"/>
-          <p:nvPr/>
-        </p:nvSpPr>
-        <p:spPr>
-          <a:xfrm>
-            <a:off x="438912" y="5852160"/>
-            <a:ext cx="2651760" cy="594360"/>
-          </a:xfrm>
-          <a:prstGeom prst="rect">
-            <a:avLst/>
-          </a:prstGeom>
-          <a:noFill/>
-        </p:spPr>
-        <p:txBody>
-          <a:bodyPr wrap="square">
-            <a:spAutoFit/>
-          </a:bodyPr>
-          <a:lstStyle/>
-          <a:p>
-            <a:pPr algn="l"/>
-            <a:r>
-              <a:rPr sz="1000" b="0">
-                <a:solidFill>
-                  <a:srgbClr val="1E1E2E"/>
-                </a:solidFill>
-              </a:rPr>
-              <a:t>10개 함수 + JSON 스키마 + 디스패처</a:t>
-            </a:r>
-          </a:p>
-        </p:txBody>
-      </p:sp>
-      <p:sp>
-        <p:nvSpPr>
-          <p:cNvPr id="29" name="Rectangle 28"/>
-          <p:cNvSpPr/>
-          <p:nvPr/>
-        </p:nvSpPr>
-        <p:spPr>
-          <a:xfrm>
-            <a:off x="3291840" y="5440680"/>
-            <a:ext cx="2788920" cy="1051560"/>
-          </a:xfrm>
-          <a:prstGeom prst="rect">
-            <a:avLst/>
-          </a:prstGeom>
-          <a:solidFill>
-            <a:srgbClr val="FFFFFF"/>
-          </a:solidFill>
-          <a:ln>
-            <a:noFill/>
-          </a:ln>
-        </p:spPr>
-        <p:style>
-          <a:lnRef idx="1">
-            <a:schemeClr val="accent1"/>
-          </a:lnRef>
-          <a:fillRef idx="3">
-            <a:schemeClr val="accent1"/>
-          </a:fillRef>
-          <a:effectRef idx="2">
-            <a:schemeClr val="accent1"/>
-          </a:effectRef>
-          <a:fontRef idx="minor">
-            <a:schemeClr val="lt1"/>
-          </a:fontRef>
-        </p:style>
-        <p:txBody>
-          <a:bodyPr rtlCol="0" anchor="ctr"/>
-          <a:lstStyle/>
-          <a:p>
-            <a:pPr algn="ctr"/>
-          </a:p>
-        </p:txBody>
-      </p:sp>
-      <p:sp>
-        <p:nvSpPr>
-          <p:cNvPr id="30" name="Rectangle 29"/>
-          <p:cNvSpPr/>
-          <p:nvPr/>
-        </p:nvSpPr>
-        <p:spPr>
-          <a:xfrm>
-            <a:off x="3291840" y="5440680"/>
-            <a:ext cx="2788920" cy="347472"/>
-          </a:xfrm>
-          <a:prstGeom prst="rect">
-            <a:avLst/>
-          </a:prstGeom>
-          <a:solidFill>
-            <a:srgbClr val="265DC8"/>
-          </a:solidFill>
-          <a:ln>
-            <a:noFill/>
-          </a:ln>
-        </p:spPr>
-        <p:style>
-          <a:lnRef idx="1">
-            <a:schemeClr val="accent1"/>
-          </a:lnRef>
-          <a:fillRef idx="3">
-            <a:schemeClr val="accent1"/>
-          </a:fillRef>
-          <a:effectRef idx="2">
-            <a:schemeClr val="accent1"/>
-          </a:effectRef>
-          <a:fontRef idx="minor">
-            <a:schemeClr val="lt1"/>
-          </a:fontRef>
-        </p:style>
-        <p:txBody>
-          <a:bodyPr rtlCol="0" anchor="ctr"/>
-          <a:lstStyle/>
-          <a:p>
-            <a:pPr algn="ctr"/>
-          </a:p>
-        </p:txBody>
-      </p:sp>
-      <p:sp>
-        <p:nvSpPr>
-          <p:cNvPr id="31" name="TextBox 30"/>
-          <p:cNvSpPr txBox="1"/>
-          <p:nvPr/>
-        </p:nvSpPr>
-        <p:spPr>
-          <a:xfrm>
-            <a:off x="3364992" y="5458968"/>
-            <a:ext cx="2651760" cy="320040"/>
-          </a:xfrm>
-          <a:prstGeom prst="rect">
-            <a:avLst/>
-          </a:prstGeom>
-          <a:noFill/>
-        </p:spPr>
-        <p:txBody>
-          <a:bodyPr wrap="square">
-            <a:spAutoFit/>
-          </a:bodyPr>
-          <a:lstStyle/>
-          <a:p>
-            <a:pPr algn="l"/>
-            <a:r>
-              <a:rPr sz="1100" b="1">
-                <a:solidFill>
-                  <a:srgbClr val="FFFFFF"/>
-                </a:solidFill>
-              </a:rPr>
-              <a:t>agent.py</a:t>
-            </a:r>
-          </a:p>
-        </p:txBody>
-      </p:sp>
-      <p:sp>
-        <p:nvSpPr>
-          <p:cNvPr id="32" name="TextBox 31"/>
-          <p:cNvSpPr txBox="1"/>
-          <p:nvPr/>
-        </p:nvSpPr>
-        <p:spPr>
-          <a:xfrm>
-            <a:off x="3364992" y="5852160"/>
-            <a:ext cx="2651760" cy="594360"/>
-          </a:xfrm>
-          <a:prstGeom prst="rect">
-            <a:avLst/>
-          </a:prstGeom>
-          <a:noFill/>
-        </p:spPr>
-        <p:txBody>
-          <a:bodyPr wrap="square">
-            <a:spAutoFit/>
-          </a:bodyPr>
-          <a:lstStyle/>
-          <a:p>
-            <a:pPr algn="l"/>
-            <a:r>
-              <a:rPr sz="1000" b="0">
-                <a:solidFill>
-                  <a:srgbClr val="1E1E2E"/>
-                </a:solidFill>
-              </a:rPr>
-              <a:t>plan_phase() + react_execute()</a:t>
-            </a:r>
-          </a:p>
-        </p:txBody>
-      </p:sp>
-      <p:sp>
-        <p:nvSpPr>
-          <p:cNvPr id="33" name="Rectangle 32"/>
-          <p:cNvSpPr/>
-          <p:nvPr/>
-        </p:nvSpPr>
-        <p:spPr>
-          <a:xfrm>
-            <a:off x="6217920" y="5440680"/>
-            <a:ext cx="2788920" cy="1051560"/>
-          </a:xfrm>
-          <a:prstGeom prst="rect">
-            <a:avLst/>
-          </a:prstGeom>
-          <a:solidFill>
-            <a:srgbClr val="FFFFFF"/>
-          </a:solidFill>
-          <a:ln>
-            <a:noFill/>
-          </a:ln>
-        </p:spPr>
-        <p:style>
-          <a:lnRef idx="1">
-            <a:schemeClr val="accent1"/>
-          </a:lnRef>
-          <a:fillRef idx="3">
-            <a:schemeClr val="accent1"/>
-          </a:fillRef>
-          <a:effectRef idx="2">
-            <a:schemeClr val="accent1"/>
-          </a:effectRef>
-          <a:fontRef idx="minor">
-            <a:schemeClr val="lt1"/>
-          </a:fontRef>
-        </p:style>
-        <p:txBody>
-          <a:bodyPr rtlCol="0" anchor="ctr"/>
-          <a:lstStyle/>
-          <a:p>
-            <a:pPr algn="ctr"/>
-          </a:p>
-        </p:txBody>
-      </p:sp>
-      <p:sp>
-        <p:nvSpPr>
-          <p:cNvPr id="34" name="Rectangle 33"/>
-          <p:cNvSpPr/>
-          <p:nvPr/>
-        </p:nvSpPr>
-        <p:spPr>
-          <a:xfrm>
-            <a:off x="6217920" y="5440680"/>
-            <a:ext cx="2788920" cy="347472"/>
-          </a:xfrm>
-          <a:prstGeom prst="rect">
-            <a:avLst/>
-          </a:prstGeom>
-          <a:solidFill>
-            <a:srgbClr val="265DC8"/>
-          </a:solidFill>
-          <a:ln>
-            <a:noFill/>
-          </a:ln>
-        </p:spPr>
-        <p:style>
-          <a:lnRef idx="1">
-            <a:schemeClr val="accent1"/>
-          </a:lnRef>
-          <a:fillRef idx="3">
-            <a:schemeClr val="accent1"/>
-          </a:fillRef>
-          <a:effectRef idx="2">
-            <a:schemeClr val="accent1"/>
-          </a:effectRef>
-          <a:fontRef idx="minor">
-            <a:schemeClr val="lt1"/>
-          </a:fontRef>
-        </p:style>
-        <p:txBody>
-          <a:bodyPr rtlCol="0" anchor="ctr"/>
-          <a:lstStyle/>
-          <a:p>
-            <a:pPr algn="ctr"/>
-          </a:p>
-        </p:txBody>
-      </p:sp>
-      <p:sp>
-        <p:nvSpPr>
-          <p:cNvPr id="35" name="TextBox 34"/>
-          <p:cNvSpPr txBox="1"/>
-          <p:nvPr/>
-        </p:nvSpPr>
-        <p:spPr>
-          <a:xfrm>
-            <a:off x="6291072" y="5458968"/>
-            <a:ext cx="2651760" cy="320040"/>
-          </a:xfrm>
-          <a:prstGeom prst="rect">
-            <a:avLst/>
-          </a:prstGeom>
-          <a:noFill/>
-        </p:spPr>
-        <p:txBody>
-          <a:bodyPr wrap="square">
-            <a:spAutoFit/>
-          </a:bodyPr>
-          <a:lstStyle/>
-          <a:p>
-            <a:pPr algn="l"/>
-            <a:r>
-              <a:rPr sz="1100" b="1">
-                <a:solidFill>
-                  <a:srgbClr val="FFFFFF"/>
-                </a:solidFill>
-              </a:rPr>
-              <a:t>html_generator.py</a:t>
-            </a:r>
-          </a:p>
-        </p:txBody>
-      </p:sp>
-      <p:sp>
-        <p:nvSpPr>
-          <p:cNvPr id="36" name="TextBox 35"/>
-          <p:cNvSpPr txBox="1"/>
-          <p:nvPr/>
-        </p:nvSpPr>
-        <p:spPr>
-          <a:xfrm>
-            <a:off x="6291072" y="5852160"/>
-            <a:ext cx="2651760" cy="594360"/>
-          </a:xfrm>
-          <a:prstGeom prst="rect">
-            <a:avLst/>
-          </a:prstGeom>
-          <a:noFill/>
-        </p:spPr>
-        <p:txBody>
-          <a:bodyPr wrap="square">
-            <a:spAutoFit/>
-          </a:bodyPr>
-          <a:lstStyle/>
-          <a:p>
-            <a:pPr algn="l"/>
-            <a:r>
-              <a:rPr sz="1000" b="0">
-                <a:solidFill>
-                  <a:srgbClr val="1E1E2E"/>
-                </a:solidFill>
-              </a:rPr>
-              <a:t>수집된 데이터 → 아름다운 HTML</a:t>
-            </a:r>
-          </a:p>
-        </p:txBody>
-      </p:sp>
-      <p:sp>
-        <p:nvSpPr>
-          <p:cNvPr id="37" name="Rectangle 36"/>
-          <p:cNvSpPr/>
-          <p:nvPr/>
-        </p:nvSpPr>
-        <p:spPr>
-          <a:xfrm>
-            <a:off x="9144000" y="5440680"/>
-            <a:ext cx="2788920" cy="1051560"/>
-          </a:xfrm>
-          <a:prstGeom prst="rect">
-            <a:avLst/>
-          </a:prstGeom>
-          <a:solidFill>
-            <a:srgbClr val="FFFFFF"/>
-          </a:solidFill>
-          <a:ln>
-            <a:noFill/>
-          </a:ln>
-        </p:spPr>
-        <p:style>
-          <a:lnRef idx="1">
-            <a:schemeClr val="accent1"/>
-          </a:lnRef>
-          <a:fillRef idx="3">
-            <a:schemeClr val="accent1"/>
-          </a:fillRef>
-          <a:effectRef idx="2">
-            <a:schemeClr val="accent1"/>
-          </a:effectRef>
-          <a:fontRef idx="minor">
-            <a:schemeClr val="lt1"/>
-          </a:fontRef>
-        </p:style>
-        <p:txBody>
-          <a:bodyPr rtlCol="0" anchor="ctr"/>
-          <a:lstStyle/>
-          <a:p>
-            <a:pPr algn="ctr"/>
-          </a:p>
-        </p:txBody>
-      </p:sp>
-      <p:sp>
-        <p:nvSpPr>
-          <p:cNvPr id="38" name="Rectangle 37"/>
-          <p:cNvSpPr/>
-          <p:nvPr/>
-        </p:nvSpPr>
-        <p:spPr>
-          <a:xfrm>
-            <a:off x="9144000" y="5440680"/>
-            <a:ext cx="2788920" cy="347472"/>
-          </a:xfrm>
-          <a:prstGeom prst="rect">
-            <a:avLst/>
-          </a:prstGeom>
-          <a:solidFill>
-            <a:srgbClr val="265DC8"/>
-          </a:solidFill>
-          <a:ln>
-            <a:noFill/>
-          </a:ln>
-        </p:spPr>
-        <p:style>
-          <a:lnRef idx="1">
-            <a:schemeClr val="accent1"/>
-          </a:lnRef>
-          <a:fillRef idx="3">
-            <a:schemeClr val="accent1"/>
-          </a:fillRef>
-          <a:effectRef idx="2">
-            <a:schemeClr val="accent1"/>
-          </a:effectRef>
-          <a:fontRef idx="minor">
-            <a:schemeClr val="lt1"/>
-          </a:fontRef>
-        </p:style>
-        <p:txBody>
-          <a:bodyPr rtlCol="0" anchor="ctr"/>
-          <a:lstStyle/>
-          <a:p>
-            <a:pPr algn="ctr"/>
-          </a:p>
-        </p:txBody>
-      </p:sp>
-      <p:sp>
-        <p:nvSpPr>
-          <p:cNvPr id="39" name="TextBox 38"/>
-          <p:cNvSpPr txBox="1"/>
-          <p:nvPr/>
-        </p:nvSpPr>
-        <p:spPr>
-          <a:xfrm>
-            <a:off x="9217152" y="5458968"/>
-            <a:ext cx="2651760" cy="320040"/>
-          </a:xfrm>
-          <a:prstGeom prst="rect">
-            <a:avLst/>
-          </a:prstGeom>
-          <a:noFill/>
-        </p:spPr>
-        <p:txBody>
-          <a:bodyPr wrap="square">
-            <a:spAutoFit/>
-          </a:bodyPr>
-          <a:lstStyle/>
-          <a:p>
-            <a:pPr algn="l"/>
-            <a:r>
-              <a:rPr sz="1100" b="1">
-                <a:solidFill>
-                  <a:srgbClr val="FFFFFF"/>
-                </a:solidFill>
-              </a:rPr>
-              <a:t>app.py</a:t>
-            </a:r>
-          </a:p>
-        </p:txBody>
-      </p:sp>
-      <p:sp>
-        <p:nvSpPr>
-          <p:cNvPr id="40" name="TextBox 39"/>
-          <p:cNvSpPr txBox="1"/>
-          <p:nvPr/>
-        </p:nvSpPr>
-        <p:spPr>
-          <a:xfrm>
-            <a:off x="9217152" y="5852160"/>
-            <a:ext cx="2651760" cy="594360"/>
-          </a:xfrm>
-          <a:prstGeom prst="rect">
-            <a:avLst/>
-          </a:prstGeom>
-          <a:noFill/>
-        </p:spPr>
-        <p:txBody>
-          <a:bodyPr wrap="square">
-            <a:spAutoFit/>
-          </a:bodyPr>
-          <a:lstStyle/>
-          <a:p>
-            <a:pPr algn="l"/>
-            <a:r>
-              <a:rPr sz="1000" b="0">
-                <a:solidFill>
-                  <a:srgbClr val="1E1E2E"/>
-                </a:solidFill>
-              </a:rPr>
-              <a:t>Streamlit 채팅 UI + 실시간 로그</a:t>
+              <a:t>def react_execute(plan, query):
+    while iteration &lt; 25:
+        # Thought
+        response = client.chat(
+            messages=messages,
+            tools=TOOLS
+        )
+        # Action
+        if message.tool_calls:
+            result = execute_tool()
+            messages.append(result)
+        # Observe → 다음 반복
+        # 완료 판단
+        else:
+            break  # 루프 종료
+    return collected_results</a:t>
             </a:r>
           </a:p>
         </p:txBody>
@@ -7278,6 +7102,2521 @@
 </file>
 
 <file path=ppt/slides/slide6.xml><?xml version="1.0" encoding="utf-8"?>
+<p:sld xmlns:a="http://schemas.openxmlformats.org/drawingml/2006/main" xmlns:p="http://schemas.openxmlformats.org/presentationml/2006/main" xmlns:r="http://schemas.openxmlformats.org/officeDocument/2006/relationships">
+  <p:cSld>
+    <p:bg>
+      <p:bgPr>
+        <a:solidFill>
+          <a:srgbClr val="F4F6FF"/>
+        </a:solidFill>
+        <a:effectLst/>
+      </p:bgPr>
+    </p:bg>
+    <p:spTree>
+      <p:nvGrpSpPr>
+        <p:cNvPr id="1" name=""/>
+        <p:cNvGrpSpPr/>
+        <p:nvPr/>
+      </p:nvGrpSpPr>
+      <p:grpSpPr/>
+      <p:sp>
+        <p:nvSpPr>
+          <p:cNvPr id="2" name="Rectangle 1"/>
+          <p:cNvSpPr/>
+          <p:nvPr/>
+        </p:nvSpPr>
+        <p:spPr>
+          <a:xfrm>
+            <a:off x="0" y="0"/>
+            <a:ext cx="12188952" cy="1188720"/>
+          </a:xfrm>
+          <a:prstGeom prst="rect">
+            <a:avLst/>
+          </a:prstGeom>
+          <a:solidFill>
+            <a:srgbClr val="265DC8"/>
+          </a:solidFill>
+          <a:ln>
+            <a:noFill/>
+          </a:ln>
+        </p:spPr>
+        <p:style>
+          <a:lnRef idx="1">
+            <a:schemeClr val="accent1"/>
+          </a:lnRef>
+          <a:fillRef idx="3">
+            <a:schemeClr val="accent1"/>
+          </a:fillRef>
+          <a:effectRef idx="2">
+            <a:schemeClr val="accent1"/>
+          </a:effectRef>
+          <a:fontRef idx="minor">
+            <a:schemeClr val="lt1"/>
+          </a:fontRef>
+        </p:style>
+        <p:txBody>
+          <a:bodyPr rtlCol="0" anchor="ctr"/>
+          <a:lstStyle/>
+          <a:p>
+            <a:pPr algn="ctr"/>
+          </a:p>
+        </p:txBody>
+      </p:sp>
+      <p:sp>
+        <p:nvSpPr>
+          <p:cNvPr id="3" name="TextBox 2"/>
+          <p:cNvSpPr txBox="1"/>
+          <p:nvPr/>
+        </p:nvSpPr>
+        <p:spPr>
+          <a:xfrm>
+            <a:off x="457200" y="182880"/>
+            <a:ext cx="10972800" cy="914400"/>
+          </a:xfrm>
+          <a:prstGeom prst="rect">
+            <a:avLst/>
+          </a:prstGeom>
+          <a:noFill/>
+        </p:spPr>
+        <p:txBody>
+          <a:bodyPr wrap="square">
+            <a:spAutoFit/>
+          </a:bodyPr>
+          <a:lstStyle/>
+          <a:p>
+            <a:pPr algn="l"/>
+            <a:r>
+              <a:rPr sz="3000" b="1">
+                <a:solidFill>
+                  <a:srgbClr val="FFFFFF"/>
+                </a:solidFill>
+              </a:rPr>
+              <a:t>왜 Agent 디자인 패턴이 필요한가?</a:t>
+            </a:r>
+          </a:p>
+        </p:txBody>
+      </p:sp>
+      <p:sp>
+        <p:nvSpPr>
+          <p:cNvPr id="4" name="Rectangle 3"/>
+          <p:cNvSpPr/>
+          <p:nvPr/>
+        </p:nvSpPr>
+        <p:spPr>
+          <a:xfrm>
+            <a:off x="365760" y="1325880"/>
+            <a:ext cx="5303520" cy="5029200"/>
+          </a:xfrm>
+          <a:prstGeom prst="rect">
+            <a:avLst/>
+          </a:prstGeom>
+          <a:solidFill>
+            <a:srgbClr val="FFE5E5"/>
+          </a:solidFill>
+          <a:ln>
+            <a:noFill/>
+          </a:ln>
+        </p:spPr>
+        <p:style>
+          <a:lnRef idx="1">
+            <a:schemeClr val="accent1"/>
+          </a:lnRef>
+          <a:fillRef idx="3">
+            <a:schemeClr val="accent1"/>
+          </a:fillRef>
+          <a:effectRef idx="2">
+            <a:schemeClr val="accent1"/>
+          </a:effectRef>
+          <a:fontRef idx="minor">
+            <a:schemeClr val="lt1"/>
+          </a:fontRef>
+        </p:style>
+        <p:txBody>
+          <a:bodyPr rtlCol="0" anchor="ctr"/>
+          <a:lstStyle/>
+          <a:p>
+            <a:pPr algn="ctr"/>
+          </a:p>
+        </p:txBody>
+      </p:sp>
+      <p:sp>
+        <p:nvSpPr>
+          <p:cNvPr id="5" name="TextBox 4"/>
+          <p:cNvSpPr txBox="1"/>
+          <p:nvPr/>
+        </p:nvSpPr>
+        <p:spPr>
+          <a:xfrm>
+            <a:off x="548640" y="1463040"/>
+            <a:ext cx="4937760" cy="457200"/>
+          </a:xfrm>
+          <a:prstGeom prst="rect">
+            <a:avLst/>
+          </a:prstGeom>
+          <a:noFill/>
+        </p:spPr>
+        <p:txBody>
+          <a:bodyPr wrap="square">
+            <a:spAutoFit/>
+          </a:bodyPr>
+          <a:lstStyle/>
+          <a:p>
+            <a:pPr algn="l"/>
+            <a:r>
+              <a:rPr sz="1500" b="1">
+                <a:solidFill>
+                  <a:srgbClr val="CC0000"/>
+                </a:solidFill>
+              </a:rPr>
+              <a:t>❌  패턴 없이 (그냥 LLM)</a:t>
+            </a:r>
+          </a:p>
+        </p:txBody>
+      </p:sp>
+      <p:sp>
+        <p:nvSpPr>
+          <p:cNvPr id="6" name="TextBox 5"/>
+          <p:cNvSpPr txBox="1"/>
+          <p:nvPr/>
+        </p:nvSpPr>
+        <p:spPr>
+          <a:xfrm>
+            <a:off x="548640" y="1965960"/>
+            <a:ext cx="4937760" cy="411480"/>
+          </a:xfrm>
+          <a:prstGeom prst="rect">
+            <a:avLst/>
+          </a:prstGeom>
+          <a:noFill/>
+        </p:spPr>
+        <p:txBody>
+          <a:bodyPr wrap="square">
+            <a:spAutoFit/>
+          </a:bodyPr>
+          <a:lstStyle/>
+          <a:p>
+            <a:pPr algn="l"/>
+            <a:r>
+              <a:rPr sz="1300" b="0">
+                <a:solidFill>
+                  <a:srgbClr val="1E1E2E"/>
+                </a:solidFill>
+              </a:rPr>
+              <a:t>입력 → 바로 답</a:t>
+            </a:r>
+          </a:p>
+        </p:txBody>
+      </p:sp>
+      <p:sp>
+        <p:nvSpPr>
+          <p:cNvPr id="7" name="Rectangle 6"/>
+          <p:cNvSpPr/>
+          <p:nvPr/>
+        </p:nvSpPr>
+        <p:spPr>
+          <a:xfrm>
+            <a:off x="548640" y="2514600"/>
+            <a:ext cx="4937760" cy="868680"/>
+          </a:xfrm>
+          <a:prstGeom prst="rect">
+            <a:avLst/>
+          </a:prstGeom>
+          <a:solidFill>
+            <a:srgbClr val="FFCCCC"/>
+          </a:solidFill>
+          <a:ln>
+            <a:noFill/>
+          </a:ln>
+        </p:spPr>
+        <p:style>
+          <a:lnRef idx="1">
+            <a:schemeClr val="accent1"/>
+          </a:lnRef>
+          <a:fillRef idx="3">
+            <a:schemeClr val="accent1"/>
+          </a:fillRef>
+          <a:effectRef idx="2">
+            <a:schemeClr val="accent1"/>
+          </a:effectRef>
+          <a:fontRef idx="minor">
+            <a:schemeClr val="lt1"/>
+          </a:fontRef>
+        </p:style>
+        <p:txBody>
+          <a:bodyPr rtlCol="0" anchor="ctr"/>
+          <a:lstStyle/>
+          <a:p>
+            <a:pPr algn="ctr"/>
+          </a:p>
+        </p:txBody>
+      </p:sp>
+      <p:sp>
+        <p:nvSpPr>
+          <p:cNvPr id="8" name="TextBox 7"/>
+          <p:cNvSpPr txBox="1"/>
+          <p:nvPr/>
+        </p:nvSpPr>
+        <p:spPr>
+          <a:xfrm>
+            <a:off x="685800" y="2587752"/>
+            <a:ext cx="4663440" cy="347472"/>
+          </a:xfrm>
+          <a:prstGeom prst="rect">
+            <a:avLst/>
+          </a:prstGeom>
+          <a:noFill/>
+        </p:spPr>
+        <p:txBody>
+          <a:bodyPr wrap="square">
+            <a:spAutoFit/>
+          </a:bodyPr>
+          <a:lstStyle/>
+          <a:p>
+            <a:pPr algn="l"/>
+            <a:r>
+              <a:rPr sz="1300" b="1">
+                <a:solidFill>
+                  <a:srgbClr val="CC0000"/>
+                </a:solidFill>
+              </a:rPr>
+              <a:t>실제 데이터 없음</a:t>
+            </a:r>
+          </a:p>
+        </p:txBody>
+      </p:sp>
+      <p:sp>
+        <p:nvSpPr>
+          <p:cNvPr id="9" name="TextBox 8"/>
+          <p:cNvSpPr txBox="1"/>
+          <p:nvPr/>
+        </p:nvSpPr>
+        <p:spPr>
+          <a:xfrm>
+            <a:off x="685800" y="2935224"/>
+            <a:ext cx="4663440" cy="347472"/>
+          </a:xfrm>
+          <a:prstGeom prst="rect">
+            <a:avLst/>
+          </a:prstGeom>
+          <a:noFill/>
+        </p:spPr>
+        <p:txBody>
+          <a:bodyPr wrap="square">
+            <a:spAutoFit/>
+          </a:bodyPr>
+          <a:lstStyle/>
+          <a:p>
+            <a:pPr algn="l"/>
+            <a:r>
+              <a:rPr sz="1200" b="0">
+                <a:solidFill>
+                  <a:srgbClr val="1E1E2E"/>
+                </a:solidFill>
+              </a:rPr>
+              <a:t>날씨·맛집 정보가 틀릴 수 있음</a:t>
+            </a:r>
+          </a:p>
+        </p:txBody>
+      </p:sp>
+      <p:sp>
+        <p:nvSpPr>
+          <p:cNvPr id="10" name="Rectangle 9"/>
+          <p:cNvSpPr/>
+          <p:nvPr/>
+        </p:nvSpPr>
+        <p:spPr>
+          <a:xfrm>
+            <a:off x="548640" y="3566160"/>
+            <a:ext cx="4937760" cy="868680"/>
+          </a:xfrm>
+          <a:prstGeom prst="rect">
+            <a:avLst/>
+          </a:prstGeom>
+          <a:solidFill>
+            <a:srgbClr val="FFCCCC"/>
+          </a:solidFill>
+          <a:ln>
+            <a:noFill/>
+          </a:ln>
+        </p:spPr>
+        <p:style>
+          <a:lnRef idx="1">
+            <a:schemeClr val="accent1"/>
+          </a:lnRef>
+          <a:fillRef idx="3">
+            <a:schemeClr val="accent1"/>
+          </a:fillRef>
+          <a:effectRef idx="2">
+            <a:schemeClr val="accent1"/>
+          </a:effectRef>
+          <a:fontRef idx="minor">
+            <a:schemeClr val="lt1"/>
+          </a:fontRef>
+        </p:style>
+        <p:txBody>
+          <a:bodyPr rtlCol="0" anchor="ctr"/>
+          <a:lstStyle/>
+          <a:p>
+            <a:pPr algn="ctr"/>
+          </a:p>
+        </p:txBody>
+      </p:sp>
+      <p:sp>
+        <p:nvSpPr>
+          <p:cNvPr id="11" name="TextBox 10"/>
+          <p:cNvSpPr txBox="1"/>
+          <p:nvPr/>
+        </p:nvSpPr>
+        <p:spPr>
+          <a:xfrm>
+            <a:off x="685800" y="3639312"/>
+            <a:ext cx="4663440" cy="347472"/>
+          </a:xfrm>
+          <a:prstGeom prst="rect">
+            <a:avLst/>
+          </a:prstGeom>
+          <a:noFill/>
+        </p:spPr>
+        <p:txBody>
+          <a:bodyPr wrap="square">
+            <a:spAutoFit/>
+          </a:bodyPr>
+          <a:lstStyle/>
+          <a:p>
+            <a:pPr algn="l"/>
+            <a:r>
+              <a:rPr sz="1300" b="1">
+                <a:solidFill>
+                  <a:srgbClr val="CC0000"/>
+                </a:solidFill>
+              </a:rPr>
+              <a:t>중간 수정 불가</a:t>
+            </a:r>
+          </a:p>
+        </p:txBody>
+      </p:sp>
+      <p:sp>
+        <p:nvSpPr>
+          <p:cNvPr id="12" name="TextBox 11"/>
+          <p:cNvSpPr txBox="1"/>
+          <p:nvPr/>
+        </p:nvSpPr>
+        <p:spPr>
+          <a:xfrm>
+            <a:off x="685800" y="3986784"/>
+            <a:ext cx="4663440" cy="347472"/>
+          </a:xfrm>
+          <a:prstGeom prst="rect">
+            <a:avLst/>
+          </a:prstGeom>
+          <a:noFill/>
+        </p:spPr>
+        <p:txBody>
+          <a:bodyPr wrap="square">
+            <a:spAutoFit/>
+          </a:bodyPr>
+          <a:lstStyle/>
+          <a:p>
+            <a:pPr algn="l"/>
+            <a:r>
+              <a:rPr sz="1200" b="0">
+                <a:solidFill>
+                  <a:srgbClr val="1E1E2E"/>
+                </a:solidFill>
+              </a:rPr>
+              <a:t>틀려도 다시 고칠 기회 없음</a:t>
+            </a:r>
+          </a:p>
+        </p:txBody>
+      </p:sp>
+      <p:sp>
+        <p:nvSpPr>
+          <p:cNvPr id="13" name="Rectangle 12"/>
+          <p:cNvSpPr/>
+          <p:nvPr/>
+        </p:nvSpPr>
+        <p:spPr>
+          <a:xfrm>
+            <a:off x="548640" y="4617720"/>
+            <a:ext cx="4937760" cy="868680"/>
+          </a:xfrm>
+          <a:prstGeom prst="rect">
+            <a:avLst/>
+          </a:prstGeom>
+          <a:solidFill>
+            <a:srgbClr val="FFCCCC"/>
+          </a:solidFill>
+          <a:ln>
+            <a:noFill/>
+          </a:ln>
+        </p:spPr>
+        <p:style>
+          <a:lnRef idx="1">
+            <a:schemeClr val="accent1"/>
+          </a:lnRef>
+          <a:fillRef idx="3">
+            <a:schemeClr val="accent1"/>
+          </a:fillRef>
+          <a:effectRef idx="2">
+            <a:schemeClr val="accent1"/>
+          </a:effectRef>
+          <a:fontRef idx="minor">
+            <a:schemeClr val="lt1"/>
+          </a:fontRef>
+        </p:style>
+        <p:txBody>
+          <a:bodyPr rtlCol="0" anchor="ctr"/>
+          <a:lstStyle/>
+          <a:p>
+            <a:pPr algn="ctr"/>
+          </a:p>
+        </p:txBody>
+      </p:sp>
+      <p:sp>
+        <p:nvSpPr>
+          <p:cNvPr id="14" name="TextBox 13"/>
+          <p:cNvSpPr txBox="1"/>
+          <p:nvPr/>
+        </p:nvSpPr>
+        <p:spPr>
+          <a:xfrm>
+            <a:off x="685800" y="4690872"/>
+            <a:ext cx="4663440" cy="347472"/>
+          </a:xfrm>
+          <a:prstGeom prst="rect">
+            <a:avLst/>
+          </a:prstGeom>
+          <a:noFill/>
+        </p:spPr>
+        <p:txBody>
+          <a:bodyPr wrap="square">
+            <a:spAutoFit/>
+          </a:bodyPr>
+          <a:lstStyle/>
+          <a:p>
+            <a:pPr algn="l"/>
+            <a:r>
+              <a:rPr sz="1300" b="1">
+                <a:solidFill>
+                  <a:srgbClr val="CC0000"/>
+                </a:solidFill>
+              </a:rPr>
+              <a:t>복잡한 작업 못함</a:t>
+            </a:r>
+          </a:p>
+        </p:txBody>
+      </p:sp>
+      <p:sp>
+        <p:nvSpPr>
+          <p:cNvPr id="15" name="TextBox 14"/>
+          <p:cNvSpPr txBox="1"/>
+          <p:nvPr/>
+        </p:nvSpPr>
+        <p:spPr>
+          <a:xfrm>
+            <a:off x="685800" y="5038344"/>
+            <a:ext cx="4663440" cy="347472"/>
+          </a:xfrm>
+          <a:prstGeom prst="rect">
+            <a:avLst/>
+          </a:prstGeom>
+          <a:noFill/>
+        </p:spPr>
+        <p:txBody>
+          <a:bodyPr wrap="square">
+            <a:spAutoFit/>
+          </a:bodyPr>
+          <a:lstStyle/>
+          <a:p>
+            <a:pPr algn="l"/>
+            <a:r>
+              <a:rPr sz="1200" b="0">
+                <a:solidFill>
+                  <a:srgbClr val="1E1E2E"/>
+                </a:solidFill>
+              </a:rPr>
+              <a:t>계획→검색→비교→정리 흐름 불가</a:t>
+            </a:r>
+          </a:p>
+        </p:txBody>
+      </p:sp>
+      <p:sp>
+        <p:nvSpPr>
+          <p:cNvPr id="16" name="Rectangle 15"/>
+          <p:cNvSpPr/>
+          <p:nvPr/>
+        </p:nvSpPr>
+        <p:spPr>
+          <a:xfrm>
+            <a:off x="6400800" y="1325880"/>
+            <a:ext cx="5394960" cy="5029200"/>
+          </a:xfrm>
+          <a:prstGeom prst="rect">
+            <a:avLst/>
+          </a:prstGeom>
+          <a:solidFill>
+            <a:srgbClr val="E5FFED"/>
+          </a:solidFill>
+          <a:ln>
+            <a:noFill/>
+          </a:ln>
+        </p:spPr>
+        <p:style>
+          <a:lnRef idx="1">
+            <a:schemeClr val="accent1"/>
+          </a:lnRef>
+          <a:fillRef idx="3">
+            <a:schemeClr val="accent1"/>
+          </a:fillRef>
+          <a:effectRef idx="2">
+            <a:schemeClr val="accent1"/>
+          </a:effectRef>
+          <a:fontRef idx="minor">
+            <a:schemeClr val="lt1"/>
+          </a:fontRef>
+        </p:style>
+        <p:txBody>
+          <a:bodyPr rtlCol="0" anchor="ctr"/>
+          <a:lstStyle/>
+          <a:p>
+            <a:pPr algn="ctr"/>
+          </a:p>
+        </p:txBody>
+      </p:sp>
+      <p:sp>
+        <p:nvSpPr>
+          <p:cNvPr id="17" name="TextBox 16"/>
+          <p:cNvSpPr txBox="1"/>
+          <p:nvPr/>
+        </p:nvSpPr>
+        <p:spPr>
+          <a:xfrm>
+            <a:off x="6583680" y="1463040"/>
+            <a:ext cx="5029200" cy="457200"/>
+          </a:xfrm>
+          <a:prstGeom prst="rect">
+            <a:avLst/>
+          </a:prstGeom>
+          <a:noFill/>
+        </p:spPr>
+        <p:txBody>
+          <a:bodyPr wrap="square">
+            <a:spAutoFit/>
+          </a:bodyPr>
+          <a:lstStyle/>
+          <a:p>
+            <a:pPr algn="l"/>
+            <a:r>
+              <a:rPr sz="1500" b="1">
+                <a:solidFill>
+                  <a:srgbClr val="16A34A"/>
+                </a:solidFill>
+              </a:rPr>
+              <a:t>✅  패턴 사용 (Agent)</a:t>
+            </a:r>
+          </a:p>
+        </p:txBody>
+      </p:sp>
+      <p:sp>
+        <p:nvSpPr>
+          <p:cNvPr id="18" name="TextBox 17"/>
+          <p:cNvSpPr txBox="1"/>
+          <p:nvPr/>
+        </p:nvSpPr>
+        <p:spPr>
+          <a:xfrm>
+            <a:off x="6583680" y="1965960"/>
+            <a:ext cx="5029200" cy="411480"/>
+          </a:xfrm>
+          <a:prstGeom prst="rect">
+            <a:avLst/>
+          </a:prstGeom>
+          <a:noFill/>
+        </p:spPr>
+        <p:txBody>
+          <a:bodyPr wrap="square">
+            <a:spAutoFit/>
+          </a:bodyPr>
+          <a:lstStyle/>
+          <a:p>
+            <a:pPr algn="l"/>
+            <a:r>
+              <a:rPr sz="1300" b="0">
+                <a:solidFill>
+                  <a:srgbClr val="1E1E2E"/>
+                </a:solidFill>
+              </a:rPr>
+              <a:t>계획 → 실행 → 확인 → 수정 → 결과</a:t>
+            </a:r>
+          </a:p>
+        </p:txBody>
+      </p:sp>
+      <p:sp>
+        <p:nvSpPr>
+          <p:cNvPr id="19" name="Rectangle 18"/>
+          <p:cNvSpPr/>
+          <p:nvPr/>
+        </p:nvSpPr>
+        <p:spPr>
+          <a:xfrm>
+            <a:off x="6583680" y="2514600"/>
+            <a:ext cx="5029200" cy="868680"/>
+          </a:xfrm>
+          <a:prstGeom prst="rect">
+            <a:avLst/>
+          </a:prstGeom>
+          <a:solidFill>
+            <a:srgbClr val="BBF7D0"/>
+          </a:solidFill>
+          <a:ln>
+            <a:noFill/>
+          </a:ln>
+        </p:spPr>
+        <p:style>
+          <a:lnRef idx="1">
+            <a:schemeClr val="accent1"/>
+          </a:lnRef>
+          <a:fillRef idx="3">
+            <a:schemeClr val="accent1"/>
+          </a:fillRef>
+          <a:effectRef idx="2">
+            <a:schemeClr val="accent1"/>
+          </a:effectRef>
+          <a:fontRef idx="minor">
+            <a:schemeClr val="lt1"/>
+          </a:fontRef>
+        </p:style>
+        <p:txBody>
+          <a:bodyPr rtlCol="0" anchor="ctr"/>
+          <a:lstStyle/>
+          <a:p>
+            <a:pPr algn="ctr"/>
+          </a:p>
+        </p:txBody>
+      </p:sp>
+      <p:sp>
+        <p:nvSpPr>
+          <p:cNvPr id="20" name="TextBox 19"/>
+          <p:cNvSpPr txBox="1"/>
+          <p:nvPr/>
+        </p:nvSpPr>
+        <p:spPr>
+          <a:xfrm>
+            <a:off x="6720840" y="2587752"/>
+            <a:ext cx="4663440" cy="347472"/>
+          </a:xfrm>
+          <a:prstGeom prst="rect">
+            <a:avLst/>
+          </a:prstGeom>
+          <a:noFill/>
+        </p:spPr>
+        <p:txBody>
+          <a:bodyPr wrap="square">
+            <a:spAutoFit/>
+          </a:bodyPr>
+          <a:lstStyle/>
+          <a:p>
+            <a:pPr algn="l"/>
+            <a:r>
+              <a:rPr sz="1300" b="1">
+                <a:solidFill>
+                  <a:srgbClr val="16A34A"/>
+                </a:solidFill>
+              </a:rPr>
+              <a:t>ReAct</a:t>
+            </a:r>
+          </a:p>
+        </p:txBody>
+      </p:sp>
+      <p:sp>
+        <p:nvSpPr>
+          <p:cNvPr id="21" name="TextBox 20"/>
+          <p:cNvSpPr txBox="1"/>
+          <p:nvPr/>
+        </p:nvSpPr>
+        <p:spPr>
+          <a:xfrm>
+            <a:off x="6720840" y="2935224"/>
+            <a:ext cx="4663440" cy="347472"/>
+          </a:xfrm>
+          <a:prstGeom prst="rect">
+            <a:avLst/>
+          </a:prstGeom>
+          <a:noFill/>
+        </p:spPr>
+        <p:txBody>
+          <a:bodyPr wrap="square">
+            <a:spAutoFit/>
+          </a:bodyPr>
+          <a:lstStyle/>
+          <a:p>
+            <a:pPr algn="l"/>
+            <a:r>
+              <a:rPr sz="1200" b="0">
+                <a:solidFill>
+                  <a:srgbClr val="1E1E2E"/>
+                </a:solidFill>
+              </a:rPr>
+              <a:t>나눠서 단계별 해결, 중간 수정 가능</a:t>
+            </a:r>
+          </a:p>
+        </p:txBody>
+      </p:sp>
+      <p:sp>
+        <p:nvSpPr>
+          <p:cNvPr id="22" name="Rectangle 21"/>
+          <p:cNvSpPr/>
+          <p:nvPr/>
+        </p:nvSpPr>
+        <p:spPr>
+          <a:xfrm>
+            <a:off x="6583680" y="3566160"/>
+            <a:ext cx="5029200" cy="868680"/>
+          </a:xfrm>
+          <a:prstGeom prst="rect">
+            <a:avLst/>
+          </a:prstGeom>
+          <a:solidFill>
+            <a:srgbClr val="BBF7D0"/>
+          </a:solidFill>
+          <a:ln>
+            <a:noFill/>
+          </a:ln>
+        </p:spPr>
+        <p:style>
+          <a:lnRef idx="1">
+            <a:schemeClr val="accent1"/>
+          </a:lnRef>
+          <a:fillRef idx="3">
+            <a:schemeClr val="accent1"/>
+          </a:fillRef>
+          <a:effectRef idx="2">
+            <a:schemeClr val="accent1"/>
+          </a:effectRef>
+          <a:fontRef idx="minor">
+            <a:schemeClr val="lt1"/>
+          </a:fontRef>
+        </p:style>
+        <p:txBody>
+          <a:bodyPr rtlCol="0" anchor="ctr"/>
+          <a:lstStyle/>
+          <a:p>
+            <a:pPr algn="ctr"/>
+          </a:p>
+        </p:txBody>
+      </p:sp>
+      <p:sp>
+        <p:nvSpPr>
+          <p:cNvPr id="23" name="TextBox 22"/>
+          <p:cNvSpPr txBox="1"/>
+          <p:nvPr/>
+        </p:nvSpPr>
+        <p:spPr>
+          <a:xfrm>
+            <a:off x="6720840" y="3639312"/>
+            <a:ext cx="4663440" cy="347472"/>
+          </a:xfrm>
+          <a:prstGeom prst="rect">
+            <a:avLst/>
+          </a:prstGeom>
+          <a:noFill/>
+        </p:spPr>
+        <p:txBody>
+          <a:bodyPr wrap="square">
+            <a:spAutoFit/>
+          </a:bodyPr>
+          <a:lstStyle/>
+          <a:p>
+            <a:pPr algn="l"/>
+            <a:r>
+              <a:rPr sz="1300" b="1">
+                <a:solidFill>
+                  <a:srgbClr val="16A34A"/>
+                </a:solidFill>
+              </a:rPr>
+              <a:t>Plan-and-Execute</a:t>
+            </a:r>
+          </a:p>
+        </p:txBody>
+      </p:sp>
+      <p:sp>
+        <p:nvSpPr>
+          <p:cNvPr id="24" name="TextBox 23"/>
+          <p:cNvSpPr txBox="1"/>
+          <p:nvPr/>
+        </p:nvSpPr>
+        <p:spPr>
+          <a:xfrm>
+            <a:off x="6720840" y="3986784"/>
+            <a:ext cx="4663440" cy="347472"/>
+          </a:xfrm>
+          <a:prstGeom prst="rect">
+            <a:avLst/>
+          </a:prstGeom>
+          <a:noFill/>
+        </p:spPr>
+        <p:txBody>
+          <a:bodyPr wrap="square">
+            <a:spAutoFit/>
+          </a:bodyPr>
+          <a:lstStyle/>
+          <a:p>
+            <a:pPr algn="l"/>
+            <a:r>
+              <a:rPr sz="1200" b="0">
+                <a:solidFill>
+                  <a:srgbClr val="1E1E2E"/>
+                </a:solidFill>
+              </a:rPr>
+              <a:t>계획 먼저 → 방향 안 잃음</a:t>
+            </a:r>
+          </a:p>
+        </p:txBody>
+      </p:sp>
+      <p:sp>
+        <p:nvSpPr>
+          <p:cNvPr id="25" name="Rectangle 24"/>
+          <p:cNvSpPr/>
+          <p:nvPr/>
+        </p:nvSpPr>
+        <p:spPr>
+          <a:xfrm>
+            <a:off x="6583680" y="4617720"/>
+            <a:ext cx="5029200" cy="868680"/>
+          </a:xfrm>
+          <a:prstGeom prst="rect">
+            <a:avLst/>
+          </a:prstGeom>
+          <a:solidFill>
+            <a:srgbClr val="BBF7D0"/>
+          </a:solidFill>
+          <a:ln>
+            <a:noFill/>
+          </a:ln>
+        </p:spPr>
+        <p:style>
+          <a:lnRef idx="1">
+            <a:schemeClr val="accent1"/>
+          </a:lnRef>
+          <a:fillRef idx="3">
+            <a:schemeClr val="accent1"/>
+          </a:fillRef>
+          <a:effectRef idx="2">
+            <a:schemeClr val="accent1"/>
+          </a:effectRef>
+          <a:fontRef idx="minor">
+            <a:schemeClr val="lt1"/>
+          </a:fontRef>
+        </p:style>
+        <p:txBody>
+          <a:bodyPr rtlCol="0" anchor="ctr"/>
+          <a:lstStyle/>
+          <a:p>
+            <a:pPr algn="ctr"/>
+          </a:p>
+        </p:txBody>
+      </p:sp>
+      <p:sp>
+        <p:nvSpPr>
+          <p:cNvPr id="26" name="TextBox 25"/>
+          <p:cNvSpPr txBox="1"/>
+          <p:nvPr/>
+        </p:nvSpPr>
+        <p:spPr>
+          <a:xfrm>
+            <a:off x="6720840" y="4690872"/>
+            <a:ext cx="4663440" cy="347472"/>
+          </a:xfrm>
+          <a:prstGeom prst="rect">
+            <a:avLst/>
+          </a:prstGeom>
+          <a:noFill/>
+        </p:spPr>
+        <p:txBody>
+          <a:bodyPr wrap="square">
+            <a:spAutoFit/>
+          </a:bodyPr>
+          <a:lstStyle/>
+          <a:p>
+            <a:pPr algn="l"/>
+            <a:r>
+              <a:rPr sz="1300" b="1">
+                <a:solidFill>
+                  <a:srgbClr val="16A34A"/>
+                </a:solidFill>
+              </a:rPr>
+              <a:t>Tool Use</a:t>
+            </a:r>
+          </a:p>
+        </p:txBody>
+      </p:sp>
+      <p:sp>
+        <p:nvSpPr>
+          <p:cNvPr id="27" name="TextBox 26"/>
+          <p:cNvSpPr txBox="1"/>
+          <p:nvPr/>
+        </p:nvSpPr>
+        <p:spPr>
+          <a:xfrm>
+            <a:off x="6720840" y="5038344"/>
+            <a:ext cx="4663440" cy="347472"/>
+          </a:xfrm>
+          <a:prstGeom prst="rect">
+            <a:avLst/>
+          </a:prstGeom>
+          <a:noFill/>
+        </p:spPr>
+        <p:txBody>
+          <a:bodyPr wrap="square">
+            <a:spAutoFit/>
+          </a:bodyPr>
+          <a:lstStyle/>
+          <a:p>
+            <a:pPr algn="l"/>
+            <a:r>
+              <a:rPr sz="1200" b="0">
+                <a:solidFill>
+                  <a:srgbClr val="1E1E2E"/>
+                </a:solidFill>
+              </a:rPr>
+              <a:t>도구 써서 실제 데이터 사용</a:t>
+            </a:r>
+          </a:p>
+        </p:txBody>
+      </p:sp>
+      <p:sp>
+        <p:nvSpPr>
+          <p:cNvPr id="28" name="TextBox 27"/>
+          <p:cNvSpPr txBox="1"/>
+          <p:nvPr/>
+        </p:nvSpPr>
+        <p:spPr>
+          <a:xfrm>
+            <a:off x="365760" y="6446520"/>
+            <a:ext cx="11430000" cy="320040"/>
+          </a:xfrm>
+          <a:prstGeom prst="rect">
+            <a:avLst/>
+          </a:prstGeom>
+          <a:noFill/>
+        </p:spPr>
+        <p:txBody>
+          <a:bodyPr wrap="square">
+            <a:spAutoFit/>
+          </a:bodyPr>
+          <a:lstStyle/>
+          <a:p>
+            <a:pPr algn="ctr"/>
+            <a:r>
+              <a:rPr sz="1400" b="1">
+                <a:solidFill>
+                  <a:srgbClr val="265DC8"/>
+                </a:solidFill>
+              </a:rPr>
+              <a:t>디자인 패턴은 AI를 똑똑하게 만드는 게 아니라 → 똑똑함을 제대로 쓰게 만드는 것</a:t>
+            </a:r>
+          </a:p>
+        </p:txBody>
+      </p:sp>
+    </p:spTree>
+  </p:cSld>
+  <p:clrMapOvr>
+    <a:masterClrMapping/>
+  </p:clrMapOvr>
+</p:sld>
+</file>
+
+<file path=ppt/slides/slide7.xml><?xml version="1.0" encoding="utf-8"?>
+<p:sld xmlns:a="http://schemas.openxmlformats.org/drawingml/2006/main" xmlns:p="http://schemas.openxmlformats.org/presentationml/2006/main" xmlns:r="http://schemas.openxmlformats.org/officeDocument/2006/relationships">
+  <p:cSld>
+    <p:bg>
+      <p:bgPr>
+        <a:solidFill>
+          <a:srgbClr val="F4F6FF"/>
+        </a:solidFill>
+        <a:effectLst/>
+      </p:bgPr>
+    </p:bg>
+    <p:spTree>
+      <p:nvGrpSpPr>
+        <p:cNvPr id="1" name=""/>
+        <p:cNvGrpSpPr/>
+        <p:nvPr/>
+      </p:nvGrpSpPr>
+      <p:grpSpPr/>
+      <p:sp>
+        <p:nvSpPr>
+          <p:cNvPr id="2" name="Rectangle 1"/>
+          <p:cNvSpPr/>
+          <p:nvPr/>
+        </p:nvSpPr>
+        <p:spPr>
+          <a:xfrm>
+            <a:off x="0" y="0"/>
+            <a:ext cx="12188952" cy="1188720"/>
+          </a:xfrm>
+          <a:prstGeom prst="rect">
+            <a:avLst/>
+          </a:prstGeom>
+          <a:solidFill>
+            <a:srgbClr val="265DC8"/>
+          </a:solidFill>
+          <a:ln>
+            <a:noFill/>
+          </a:ln>
+        </p:spPr>
+        <p:style>
+          <a:lnRef idx="1">
+            <a:schemeClr val="accent1"/>
+          </a:lnRef>
+          <a:fillRef idx="3">
+            <a:schemeClr val="accent1"/>
+          </a:fillRef>
+          <a:effectRef idx="2">
+            <a:schemeClr val="accent1"/>
+          </a:effectRef>
+          <a:fontRef idx="minor">
+            <a:schemeClr val="lt1"/>
+          </a:fontRef>
+        </p:style>
+        <p:txBody>
+          <a:bodyPr rtlCol="0" anchor="ctr"/>
+          <a:lstStyle/>
+          <a:p>
+            <a:pPr algn="ctr"/>
+          </a:p>
+        </p:txBody>
+      </p:sp>
+      <p:sp>
+        <p:nvSpPr>
+          <p:cNvPr id="3" name="TextBox 2"/>
+          <p:cNvSpPr txBox="1"/>
+          <p:nvPr/>
+        </p:nvSpPr>
+        <p:spPr>
+          <a:xfrm>
+            <a:off x="457200" y="182880"/>
+            <a:ext cx="10972800" cy="914400"/>
+          </a:xfrm>
+          <a:prstGeom prst="rect">
+            <a:avLst/>
+          </a:prstGeom>
+          <a:noFill/>
+        </p:spPr>
+        <p:txBody>
+          <a:bodyPr wrap="square">
+            <a:spAutoFit/>
+          </a:bodyPr>
+          <a:lstStyle/>
+          <a:p>
+            <a:pPr algn="l"/>
+            <a:r>
+              <a:rPr sz="3000" b="1">
+                <a:solidFill>
+                  <a:srgbClr val="FFFFFF"/>
+                </a:solidFill>
+              </a:rPr>
+              <a:t>전체 흐름 &amp; 파일 구조</a:t>
+            </a:r>
+          </a:p>
+        </p:txBody>
+      </p:sp>
+      <p:sp>
+        <p:nvSpPr>
+          <p:cNvPr id="4" name="Rectangle 3"/>
+          <p:cNvSpPr/>
+          <p:nvPr/>
+        </p:nvSpPr>
+        <p:spPr>
+          <a:xfrm>
+            <a:off x="365760" y="1371600"/>
+            <a:ext cx="3657600" cy="3474720"/>
+          </a:xfrm>
+          <a:prstGeom prst="rect">
+            <a:avLst/>
+          </a:prstGeom>
+          <a:solidFill>
+            <a:srgbClr val="E8F0FF"/>
+          </a:solidFill>
+          <a:ln>
+            <a:noFill/>
+          </a:ln>
+        </p:spPr>
+        <p:style>
+          <a:lnRef idx="1">
+            <a:schemeClr val="accent1"/>
+          </a:lnRef>
+          <a:fillRef idx="3">
+            <a:schemeClr val="accent1"/>
+          </a:fillRef>
+          <a:effectRef idx="2">
+            <a:schemeClr val="accent1"/>
+          </a:effectRef>
+          <a:fontRef idx="minor">
+            <a:schemeClr val="lt1"/>
+          </a:fontRef>
+        </p:style>
+        <p:txBody>
+          <a:bodyPr rtlCol="0" anchor="ctr"/>
+          <a:lstStyle/>
+          <a:p>
+            <a:pPr algn="ctr"/>
+          </a:p>
+        </p:txBody>
+      </p:sp>
+      <p:sp>
+        <p:nvSpPr>
+          <p:cNvPr id="5" name="TextBox 4"/>
+          <p:cNvSpPr txBox="1"/>
+          <p:nvPr/>
+        </p:nvSpPr>
+        <p:spPr>
+          <a:xfrm>
+            <a:off x="502920" y="1508760"/>
+            <a:ext cx="3383280" cy="411480"/>
+          </a:xfrm>
+          <a:prstGeom prst="rect">
+            <a:avLst/>
+          </a:prstGeom>
+          <a:noFill/>
+        </p:spPr>
+        <p:txBody>
+          <a:bodyPr wrap="square">
+            <a:spAutoFit/>
+          </a:bodyPr>
+          <a:lstStyle/>
+          <a:p>
+            <a:pPr algn="l"/>
+            <a:r>
+              <a:rPr sz="1200" b="1">
+                <a:solidFill>
+                  <a:srgbClr val="265DC8"/>
+                </a:solidFill>
+              </a:rPr>
+              <a:t>Phase 1</a:t>
+            </a:r>
+          </a:p>
+        </p:txBody>
+      </p:sp>
+      <p:sp>
+        <p:nvSpPr>
+          <p:cNvPr id="6" name="TextBox 5"/>
+          <p:cNvSpPr txBox="1"/>
+          <p:nvPr/>
+        </p:nvSpPr>
+        <p:spPr>
+          <a:xfrm>
+            <a:off x="502920" y="1920240"/>
+            <a:ext cx="3383280" cy="640080"/>
+          </a:xfrm>
+          <a:prstGeom prst="rect">
+            <a:avLst/>
+          </a:prstGeom>
+          <a:noFill/>
+        </p:spPr>
+        <p:txBody>
+          <a:bodyPr wrap="square">
+            <a:spAutoFit/>
+          </a:bodyPr>
+          <a:lstStyle/>
+          <a:p>
+            <a:pPr algn="l"/>
+            <a:r>
+              <a:rPr sz="2400" b="1">
+                <a:solidFill>
+                  <a:srgbClr val="1E1E2E"/>
+                </a:solidFill>
+              </a:rPr>
+              <a:t>Plan</a:t>
+            </a:r>
+          </a:p>
+        </p:txBody>
+      </p:sp>
+      <p:sp>
+        <p:nvSpPr>
+          <p:cNvPr id="7" name="Rectangle 6"/>
+          <p:cNvSpPr/>
+          <p:nvPr/>
+        </p:nvSpPr>
+        <p:spPr>
+          <a:xfrm>
+            <a:off x="502920" y="2606040"/>
+            <a:ext cx="3383280" cy="457200"/>
+          </a:xfrm>
+          <a:prstGeom prst="rect">
+            <a:avLst/>
+          </a:prstGeom>
+          <a:solidFill>
+            <a:srgbClr val="1E1E2E"/>
+          </a:solidFill>
+          <a:ln>
+            <a:noFill/>
+          </a:ln>
+        </p:spPr>
+        <p:style>
+          <a:lnRef idx="1">
+            <a:schemeClr val="accent1"/>
+          </a:lnRef>
+          <a:fillRef idx="3">
+            <a:schemeClr val="accent1"/>
+          </a:fillRef>
+          <a:effectRef idx="2">
+            <a:schemeClr val="accent1"/>
+          </a:effectRef>
+          <a:fontRef idx="minor">
+            <a:schemeClr val="lt1"/>
+          </a:fontRef>
+        </p:style>
+        <p:txBody>
+          <a:bodyPr rtlCol="0" anchor="ctr"/>
+          <a:lstStyle/>
+          <a:p>
+            <a:pPr algn="ctr"/>
+          </a:p>
+        </p:txBody>
+      </p:sp>
+      <p:sp>
+        <p:nvSpPr>
+          <p:cNvPr id="8" name="TextBox 7"/>
+          <p:cNvSpPr txBox="1"/>
+          <p:nvPr/>
+        </p:nvSpPr>
+        <p:spPr>
+          <a:xfrm>
+            <a:off x="548640" y="2633472"/>
+            <a:ext cx="3291840" cy="402336"/>
+          </a:xfrm>
+          <a:prstGeom prst="rect">
+            <a:avLst/>
+          </a:prstGeom>
+          <a:noFill/>
+        </p:spPr>
+        <p:txBody>
+          <a:bodyPr wrap="square">
+            <a:spAutoFit/>
+          </a:bodyPr>
+          <a:lstStyle/>
+          <a:p>
+            <a:pPr algn="l"/>
+            <a:r>
+              <a:rPr sz="1200" b="1">
+                <a:solidFill>
+                  <a:srgbClr val="A8E6FF"/>
+                </a:solidFill>
+              </a:rPr>
+              <a:t>plan_phase()</a:t>
+            </a:r>
+          </a:p>
+        </p:txBody>
+      </p:sp>
+      <p:sp>
+        <p:nvSpPr>
+          <p:cNvPr id="9" name="TextBox 8"/>
+          <p:cNvSpPr txBox="1"/>
+          <p:nvPr/>
+        </p:nvSpPr>
+        <p:spPr>
+          <a:xfrm>
+            <a:off x="502920" y="3154680"/>
+            <a:ext cx="3383280" cy="822960"/>
+          </a:xfrm>
+          <a:prstGeom prst="rect">
+            <a:avLst/>
+          </a:prstGeom>
+          <a:noFill/>
+        </p:spPr>
+        <p:txBody>
+          <a:bodyPr wrap="square">
+            <a:spAutoFit/>
+          </a:bodyPr>
+          <a:lstStyle/>
+          <a:p>
+            <a:pPr algn="l"/>
+            <a:r>
+              <a:rPr sz="1300" b="0">
+                <a:solidFill>
+                  <a:srgbClr val="1E1E2E"/>
+                </a:solidFill>
+              </a:rPr>
+              <a:t>계획 수립
+JSON 반환</a:t>
+            </a:r>
+          </a:p>
+        </p:txBody>
+      </p:sp>
+      <p:sp>
+        <p:nvSpPr>
+          <p:cNvPr id="10" name="TextBox 9"/>
+          <p:cNvSpPr txBox="1"/>
+          <p:nvPr/>
+        </p:nvSpPr>
+        <p:spPr>
+          <a:xfrm>
+            <a:off x="4069080" y="2651760"/>
+            <a:ext cx="457200" cy="457200"/>
+          </a:xfrm>
+          <a:prstGeom prst="rect">
+            <a:avLst/>
+          </a:prstGeom>
+          <a:noFill/>
+        </p:spPr>
+        <p:txBody>
+          <a:bodyPr wrap="square">
+            <a:spAutoFit/>
+          </a:bodyPr>
+          <a:lstStyle/>
+          <a:p>
+            <a:pPr algn="l"/>
+            <a:r>
+              <a:rPr sz="2800" b="1">
+                <a:solidFill>
+                  <a:srgbClr val="265DC8"/>
+                </a:solidFill>
+              </a:rPr>
+              <a:t>→</a:t>
+            </a:r>
+          </a:p>
+        </p:txBody>
+      </p:sp>
+      <p:sp>
+        <p:nvSpPr>
+          <p:cNvPr id="11" name="Rectangle 10"/>
+          <p:cNvSpPr/>
+          <p:nvPr/>
+        </p:nvSpPr>
+        <p:spPr>
+          <a:xfrm>
+            <a:off x="4297680" y="1371600"/>
+            <a:ext cx="3657600" cy="3474720"/>
+          </a:xfrm>
+          <a:prstGeom prst="rect">
+            <a:avLst/>
+          </a:prstGeom>
+          <a:solidFill>
+            <a:srgbClr val="E8FFF0"/>
+          </a:solidFill>
+          <a:ln>
+            <a:noFill/>
+          </a:ln>
+        </p:spPr>
+        <p:style>
+          <a:lnRef idx="1">
+            <a:schemeClr val="accent1"/>
+          </a:lnRef>
+          <a:fillRef idx="3">
+            <a:schemeClr val="accent1"/>
+          </a:fillRef>
+          <a:effectRef idx="2">
+            <a:schemeClr val="accent1"/>
+          </a:effectRef>
+          <a:fontRef idx="minor">
+            <a:schemeClr val="lt1"/>
+          </a:fontRef>
+        </p:style>
+        <p:txBody>
+          <a:bodyPr rtlCol="0" anchor="ctr"/>
+          <a:lstStyle/>
+          <a:p>
+            <a:pPr algn="ctr"/>
+          </a:p>
+        </p:txBody>
+      </p:sp>
+      <p:sp>
+        <p:nvSpPr>
+          <p:cNvPr id="12" name="TextBox 11"/>
+          <p:cNvSpPr txBox="1"/>
+          <p:nvPr/>
+        </p:nvSpPr>
+        <p:spPr>
+          <a:xfrm>
+            <a:off x="4434840" y="1508760"/>
+            <a:ext cx="3383280" cy="411480"/>
+          </a:xfrm>
+          <a:prstGeom prst="rect">
+            <a:avLst/>
+          </a:prstGeom>
+          <a:noFill/>
+        </p:spPr>
+        <p:txBody>
+          <a:bodyPr wrap="square">
+            <a:spAutoFit/>
+          </a:bodyPr>
+          <a:lstStyle/>
+          <a:p>
+            <a:pPr algn="l"/>
+            <a:r>
+              <a:rPr sz="1200" b="1">
+                <a:solidFill>
+                  <a:srgbClr val="265DC8"/>
+                </a:solidFill>
+              </a:rPr>
+              <a:t>Phase 2</a:t>
+            </a:r>
+          </a:p>
+        </p:txBody>
+      </p:sp>
+      <p:sp>
+        <p:nvSpPr>
+          <p:cNvPr id="13" name="TextBox 12"/>
+          <p:cNvSpPr txBox="1"/>
+          <p:nvPr/>
+        </p:nvSpPr>
+        <p:spPr>
+          <a:xfrm>
+            <a:off x="4434840" y="1920240"/>
+            <a:ext cx="3383280" cy="640080"/>
+          </a:xfrm>
+          <a:prstGeom prst="rect">
+            <a:avLst/>
+          </a:prstGeom>
+          <a:noFill/>
+        </p:spPr>
+        <p:txBody>
+          <a:bodyPr wrap="square">
+            <a:spAutoFit/>
+          </a:bodyPr>
+          <a:lstStyle/>
+          <a:p>
+            <a:pPr algn="l"/>
+            <a:r>
+              <a:rPr sz="2400" b="1">
+                <a:solidFill>
+                  <a:srgbClr val="1E1E2E"/>
+                </a:solidFill>
+              </a:rPr>
+              <a:t>ReAct</a:t>
+            </a:r>
+          </a:p>
+        </p:txBody>
+      </p:sp>
+      <p:sp>
+        <p:nvSpPr>
+          <p:cNvPr id="14" name="Rectangle 13"/>
+          <p:cNvSpPr/>
+          <p:nvPr/>
+        </p:nvSpPr>
+        <p:spPr>
+          <a:xfrm>
+            <a:off x="4434840" y="2606040"/>
+            <a:ext cx="3383280" cy="457200"/>
+          </a:xfrm>
+          <a:prstGeom prst="rect">
+            <a:avLst/>
+          </a:prstGeom>
+          <a:solidFill>
+            <a:srgbClr val="1E1E2E"/>
+          </a:solidFill>
+          <a:ln>
+            <a:noFill/>
+          </a:ln>
+        </p:spPr>
+        <p:style>
+          <a:lnRef idx="1">
+            <a:schemeClr val="accent1"/>
+          </a:lnRef>
+          <a:fillRef idx="3">
+            <a:schemeClr val="accent1"/>
+          </a:fillRef>
+          <a:effectRef idx="2">
+            <a:schemeClr val="accent1"/>
+          </a:effectRef>
+          <a:fontRef idx="minor">
+            <a:schemeClr val="lt1"/>
+          </a:fontRef>
+        </p:style>
+        <p:txBody>
+          <a:bodyPr rtlCol="0" anchor="ctr"/>
+          <a:lstStyle/>
+          <a:p>
+            <a:pPr algn="ctr"/>
+          </a:p>
+        </p:txBody>
+      </p:sp>
+      <p:sp>
+        <p:nvSpPr>
+          <p:cNvPr id="15" name="TextBox 14"/>
+          <p:cNvSpPr txBox="1"/>
+          <p:nvPr/>
+        </p:nvSpPr>
+        <p:spPr>
+          <a:xfrm>
+            <a:off x="4480560" y="2633472"/>
+            <a:ext cx="3291840" cy="402336"/>
+          </a:xfrm>
+          <a:prstGeom prst="rect">
+            <a:avLst/>
+          </a:prstGeom>
+          <a:noFill/>
+        </p:spPr>
+        <p:txBody>
+          <a:bodyPr wrap="square">
+            <a:spAutoFit/>
+          </a:bodyPr>
+          <a:lstStyle/>
+          <a:p>
+            <a:pPr algn="l"/>
+            <a:r>
+              <a:rPr sz="1200" b="1">
+                <a:solidFill>
+                  <a:srgbClr val="A8E6FF"/>
+                </a:solidFill>
+              </a:rPr>
+              <a:t>react_execute()</a:t>
+            </a:r>
+          </a:p>
+        </p:txBody>
+      </p:sp>
+      <p:sp>
+        <p:nvSpPr>
+          <p:cNvPr id="16" name="TextBox 15"/>
+          <p:cNvSpPr txBox="1"/>
+          <p:nvPr/>
+        </p:nvSpPr>
+        <p:spPr>
+          <a:xfrm>
+            <a:off x="4434840" y="3154680"/>
+            <a:ext cx="3383280" cy="822960"/>
+          </a:xfrm>
+          <a:prstGeom prst="rect">
+            <a:avLst/>
+          </a:prstGeom>
+          <a:noFill/>
+        </p:spPr>
+        <p:txBody>
+          <a:bodyPr wrap="square">
+            <a:spAutoFit/>
+          </a:bodyPr>
+          <a:lstStyle/>
+          <a:p>
+            <a:pPr algn="l"/>
+            <a:r>
+              <a:rPr sz="1300" b="0">
+                <a:solidFill>
+                  <a:srgbClr val="1E1E2E"/>
+                </a:solidFill>
+              </a:rPr>
+              <a:t>10개 도구
+자율 호출</a:t>
+            </a:r>
+          </a:p>
+        </p:txBody>
+      </p:sp>
+      <p:sp>
+        <p:nvSpPr>
+          <p:cNvPr id="17" name="TextBox 16"/>
+          <p:cNvSpPr txBox="1"/>
+          <p:nvPr/>
+        </p:nvSpPr>
+        <p:spPr>
+          <a:xfrm>
+            <a:off x="8001000" y="2651760"/>
+            <a:ext cx="457200" cy="457200"/>
+          </a:xfrm>
+          <a:prstGeom prst="rect">
+            <a:avLst/>
+          </a:prstGeom>
+          <a:noFill/>
+        </p:spPr>
+        <p:txBody>
+          <a:bodyPr wrap="square">
+            <a:spAutoFit/>
+          </a:bodyPr>
+          <a:lstStyle/>
+          <a:p>
+            <a:pPr algn="l"/>
+            <a:r>
+              <a:rPr sz="2800" b="1">
+                <a:solidFill>
+                  <a:srgbClr val="265DC8"/>
+                </a:solidFill>
+              </a:rPr>
+              <a:t>→</a:t>
+            </a:r>
+          </a:p>
+        </p:txBody>
+      </p:sp>
+      <p:sp>
+        <p:nvSpPr>
+          <p:cNvPr id="18" name="Rectangle 17"/>
+          <p:cNvSpPr/>
+          <p:nvPr/>
+        </p:nvSpPr>
+        <p:spPr>
+          <a:xfrm>
+            <a:off x="8229600" y="1371600"/>
+            <a:ext cx="3657600" cy="3474720"/>
+          </a:xfrm>
+          <a:prstGeom prst="rect">
+            <a:avLst/>
+          </a:prstGeom>
+          <a:solidFill>
+            <a:srgbClr val="FFF7E6"/>
+          </a:solidFill>
+          <a:ln>
+            <a:noFill/>
+          </a:ln>
+        </p:spPr>
+        <p:style>
+          <a:lnRef idx="1">
+            <a:schemeClr val="accent1"/>
+          </a:lnRef>
+          <a:fillRef idx="3">
+            <a:schemeClr val="accent1"/>
+          </a:fillRef>
+          <a:effectRef idx="2">
+            <a:schemeClr val="accent1"/>
+          </a:effectRef>
+          <a:fontRef idx="minor">
+            <a:schemeClr val="lt1"/>
+          </a:fontRef>
+        </p:style>
+        <p:txBody>
+          <a:bodyPr rtlCol="0" anchor="ctr"/>
+          <a:lstStyle/>
+          <a:p>
+            <a:pPr algn="ctr"/>
+          </a:p>
+        </p:txBody>
+      </p:sp>
+      <p:sp>
+        <p:nvSpPr>
+          <p:cNvPr id="19" name="TextBox 18"/>
+          <p:cNvSpPr txBox="1"/>
+          <p:nvPr/>
+        </p:nvSpPr>
+        <p:spPr>
+          <a:xfrm>
+            <a:off x="8366760" y="1508760"/>
+            <a:ext cx="3383280" cy="411480"/>
+          </a:xfrm>
+          <a:prstGeom prst="rect">
+            <a:avLst/>
+          </a:prstGeom>
+          <a:noFill/>
+        </p:spPr>
+        <p:txBody>
+          <a:bodyPr wrap="square">
+            <a:spAutoFit/>
+          </a:bodyPr>
+          <a:lstStyle/>
+          <a:p>
+            <a:pPr algn="l"/>
+            <a:r>
+              <a:rPr sz="1200" b="1">
+                <a:solidFill>
+                  <a:srgbClr val="265DC8"/>
+                </a:solidFill>
+              </a:rPr>
+              <a:t>Phase 3</a:t>
+            </a:r>
+          </a:p>
+        </p:txBody>
+      </p:sp>
+      <p:sp>
+        <p:nvSpPr>
+          <p:cNvPr id="20" name="TextBox 19"/>
+          <p:cNvSpPr txBox="1"/>
+          <p:nvPr/>
+        </p:nvSpPr>
+        <p:spPr>
+          <a:xfrm>
+            <a:off x="8366760" y="1920240"/>
+            <a:ext cx="3383280" cy="640080"/>
+          </a:xfrm>
+          <a:prstGeom prst="rect">
+            <a:avLst/>
+          </a:prstGeom>
+          <a:noFill/>
+        </p:spPr>
+        <p:txBody>
+          <a:bodyPr wrap="square">
+            <a:spAutoFit/>
+          </a:bodyPr>
+          <a:lstStyle/>
+          <a:p>
+            <a:pPr algn="l"/>
+            <a:r>
+              <a:rPr sz="2400" b="1">
+                <a:solidFill>
+                  <a:srgbClr val="1E1E2E"/>
+                </a:solidFill>
+              </a:rPr>
+              <a:t>Output</a:t>
+            </a:r>
+          </a:p>
+        </p:txBody>
+      </p:sp>
+      <p:sp>
+        <p:nvSpPr>
+          <p:cNvPr id="21" name="Rectangle 20"/>
+          <p:cNvSpPr/>
+          <p:nvPr/>
+        </p:nvSpPr>
+        <p:spPr>
+          <a:xfrm>
+            <a:off x="8366760" y="2606040"/>
+            <a:ext cx="3383280" cy="457200"/>
+          </a:xfrm>
+          <a:prstGeom prst="rect">
+            <a:avLst/>
+          </a:prstGeom>
+          <a:solidFill>
+            <a:srgbClr val="1E1E2E"/>
+          </a:solidFill>
+          <a:ln>
+            <a:noFill/>
+          </a:ln>
+        </p:spPr>
+        <p:style>
+          <a:lnRef idx="1">
+            <a:schemeClr val="accent1"/>
+          </a:lnRef>
+          <a:fillRef idx="3">
+            <a:schemeClr val="accent1"/>
+          </a:fillRef>
+          <a:effectRef idx="2">
+            <a:schemeClr val="accent1"/>
+          </a:effectRef>
+          <a:fontRef idx="minor">
+            <a:schemeClr val="lt1"/>
+          </a:fontRef>
+        </p:style>
+        <p:txBody>
+          <a:bodyPr rtlCol="0" anchor="ctr"/>
+          <a:lstStyle/>
+          <a:p>
+            <a:pPr algn="ctr"/>
+          </a:p>
+        </p:txBody>
+      </p:sp>
+      <p:sp>
+        <p:nvSpPr>
+          <p:cNvPr id="22" name="TextBox 21"/>
+          <p:cNvSpPr txBox="1"/>
+          <p:nvPr/>
+        </p:nvSpPr>
+        <p:spPr>
+          <a:xfrm>
+            <a:off x="8412480" y="2633472"/>
+            <a:ext cx="3291840" cy="402336"/>
+          </a:xfrm>
+          <a:prstGeom prst="rect">
+            <a:avLst/>
+          </a:prstGeom>
+          <a:noFill/>
+        </p:spPr>
+        <p:txBody>
+          <a:bodyPr wrap="square">
+            <a:spAutoFit/>
+          </a:bodyPr>
+          <a:lstStyle/>
+          <a:p>
+            <a:pPr algn="l"/>
+            <a:r>
+              <a:rPr sz="1200" b="1">
+                <a:solidFill>
+                  <a:srgbClr val="A8E6FF"/>
+                </a:solidFill>
+              </a:rPr>
+              <a:t>generate_html()</a:t>
+            </a:r>
+          </a:p>
+        </p:txBody>
+      </p:sp>
+      <p:sp>
+        <p:nvSpPr>
+          <p:cNvPr id="23" name="TextBox 22"/>
+          <p:cNvSpPr txBox="1"/>
+          <p:nvPr/>
+        </p:nvSpPr>
+        <p:spPr>
+          <a:xfrm>
+            <a:off x="8366760" y="3154680"/>
+            <a:ext cx="3383280" cy="822960"/>
+          </a:xfrm>
+          <a:prstGeom prst="rect">
+            <a:avLst/>
+          </a:prstGeom>
+          <a:noFill/>
+        </p:spPr>
+        <p:txBody>
+          <a:bodyPr wrap="square">
+            <a:spAutoFit/>
+          </a:bodyPr>
+          <a:lstStyle/>
+          <a:p>
+            <a:pPr algn="l"/>
+            <a:r>
+              <a:rPr sz="1300" b="0">
+                <a:solidFill>
+                  <a:srgbClr val="1E1E2E"/>
+                </a:solidFill>
+              </a:rPr>
+              <a:t>HTML
+보고서 생성</a:t>
+            </a:r>
+          </a:p>
+        </p:txBody>
+      </p:sp>
+      <p:sp>
+        <p:nvSpPr>
+          <p:cNvPr id="24" name="TextBox 23"/>
+          <p:cNvSpPr txBox="1"/>
+          <p:nvPr/>
+        </p:nvSpPr>
+        <p:spPr>
+          <a:xfrm>
+            <a:off x="365760" y="5074920"/>
+            <a:ext cx="2743200" cy="365760"/>
+          </a:xfrm>
+          <a:prstGeom prst="rect">
+            <a:avLst/>
+          </a:prstGeom>
+          <a:noFill/>
+        </p:spPr>
+        <p:txBody>
+          <a:bodyPr wrap="square">
+            <a:spAutoFit/>
+          </a:bodyPr>
+          <a:lstStyle/>
+          <a:p>
+            <a:pPr algn="l"/>
+            <a:r>
+              <a:rPr sz="1400" b="1">
+                <a:solidFill>
+                  <a:srgbClr val="1E1E2E"/>
+                </a:solidFill>
+              </a:rPr>
+              <a:t>파일 구조</a:t>
+            </a:r>
+          </a:p>
+        </p:txBody>
+      </p:sp>
+      <p:sp>
+        <p:nvSpPr>
+          <p:cNvPr id="25" name="Rectangle 24"/>
+          <p:cNvSpPr/>
+          <p:nvPr/>
+        </p:nvSpPr>
+        <p:spPr>
+          <a:xfrm>
+            <a:off x="365760" y="5440680"/>
+            <a:ext cx="2788920" cy="1051560"/>
+          </a:xfrm>
+          <a:prstGeom prst="rect">
+            <a:avLst/>
+          </a:prstGeom>
+          <a:solidFill>
+            <a:srgbClr val="FFFFFF"/>
+          </a:solidFill>
+          <a:ln>
+            <a:noFill/>
+          </a:ln>
+        </p:spPr>
+        <p:style>
+          <a:lnRef idx="1">
+            <a:schemeClr val="accent1"/>
+          </a:lnRef>
+          <a:fillRef idx="3">
+            <a:schemeClr val="accent1"/>
+          </a:fillRef>
+          <a:effectRef idx="2">
+            <a:schemeClr val="accent1"/>
+          </a:effectRef>
+          <a:fontRef idx="minor">
+            <a:schemeClr val="lt1"/>
+          </a:fontRef>
+        </p:style>
+        <p:txBody>
+          <a:bodyPr rtlCol="0" anchor="ctr"/>
+          <a:lstStyle/>
+          <a:p>
+            <a:pPr algn="ctr"/>
+          </a:p>
+        </p:txBody>
+      </p:sp>
+      <p:sp>
+        <p:nvSpPr>
+          <p:cNvPr id="26" name="Rectangle 25"/>
+          <p:cNvSpPr/>
+          <p:nvPr/>
+        </p:nvSpPr>
+        <p:spPr>
+          <a:xfrm>
+            <a:off x="365760" y="5440680"/>
+            <a:ext cx="2788920" cy="347472"/>
+          </a:xfrm>
+          <a:prstGeom prst="rect">
+            <a:avLst/>
+          </a:prstGeom>
+          <a:solidFill>
+            <a:srgbClr val="265DC8"/>
+          </a:solidFill>
+          <a:ln>
+            <a:noFill/>
+          </a:ln>
+        </p:spPr>
+        <p:style>
+          <a:lnRef idx="1">
+            <a:schemeClr val="accent1"/>
+          </a:lnRef>
+          <a:fillRef idx="3">
+            <a:schemeClr val="accent1"/>
+          </a:fillRef>
+          <a:effectRef idx="2">
+            <a:schemeClr val="accent1"/>
+          </a:effectRef>
+          <a:fontRef idx="minor">
+            <a:schemeClr val="lt1"/>
+          </a:fontRef>
+        </p:style>
+        <p:txBody>
+          <a:bodyPr rtlCol="0" anchor="ctr"/>
+          <a:lstStyle/>
+          <a:p>
+            <a:pPr algn="ctr"/>
+          </a:p>
+        </p:txBody>
+      </p:sp>
+      <p:sp>
+        <p:nvSpPr>
+          <p:cNvPr id="27" name="TextBox 26"/>
+          <p:cNvSpPr txBox="1"/>
+          <p:nvPr/>
+        </p:nvSpPr>
+        <p:spPr>
+          <a:xfrm>
+            <a:off x="438912" y="5458968"/>
+            <a:ext cx="2651760" cy="320040"/>
+          </a:xfrm>
+          <a:prstGeom prst="rect">
+            <a:avLst/>
+          </a:prstGeom>
+          <a:noFill/>
+        </p:spPr>
+        <p:txBody>
+          <a:bodyPr wrap="square">
+            <a:spAutoFit/>
+          </a:bodyPr>
+          <a:lstStyle/>
+          <a:p>
+            <a:pPr algn="l"/>
+            <a:r>
+              <a:rPr sz="1100" b="1">
+                <a:solidFill>
+                  <a:srgbClr val="FFFFFF"/>
+                </a:solidFill>
+              </a:rPr>
+              <a:t>tools.py</a:t>
+            </a:r>
+          </a:p>
+        </p:txBody>
+      </p:sp>
+      <p:sp>
+        <p:nvSpPr>
+          <p:cNvPr id="28" name="TextBox 27"/>
+          <p:cNvSpPr txBox="1"/>
+          <p:nvPr/>
+        </p:nvSpPr>
+        <p:spPr>
+          <a:xfrm>
+            <a:off x="438912" y="5852160"/>
+            <a:ext cx="2651760" cy="594360"/>
+          </a:xfrm>
+          <a:prstGeom prst="rect">
+            <a:avLst/>
+          </a:prstGeom>
+          <a:noFill/>
+        </p:spPr>
+        <p:txBody>
+          <a:bodyPr wrap="square">
+            <a:spAutoFit/>
+          </a:bodyPr>
+          <a:lstStyle/>
+          <a:p>
+            <a:pPr algn="l"/>
+            <a:r>
+              <a:rPr sz="1000" b="0">
+                <a:solidFill>
+                  <a:srgbClr val="1E1E2E"/>
+                </a:solidFill>
+              </a:rPr>
+              <a:t>10개 함수 + JSON 스키마 + 디스패처</a:t>
+            </a:r>
+          </a:p>
+        </p:txBody>
+      </p:sp>
+      <p:sp>
+        <p:nvSpPr>
+          <p:cNvPr id="29" name="Rectangle 28"/>
+          <p:cNvSpPr/>
+          <p:nvPr/>
+        </p:nvSpPr>
+        <p:spPr>
+          <a:xfrm>
+            <a:off x="3291840" y="5440680"/>
+            <a:ext cx="2788920" cy="1051560"/>
+          </a:xfrm>
+          <a:prstGeom prst="rect">
+            <a:avLst/>
+          </a:prstGeom>
+          <a:solidFill>
+            <a:srgbClr val="FFFFFF"/>
+          </a:solidFill>
+          <a:ln>
+            <a:noFill/>
+          </a:ln>
+        </p:spPr>
+        <p:style>
+          <a:lnRef idx="1">
+            <a:schemeClr val="accent1"/>
+          </a:lnRef>
+          <a:fillRef idx="3">
+            <a:schemeClr val="accent1"/>
+          </a:fillRef>
+          <a:effectRef idx="2">
+            <a:schemeClr val="accent1"/>
+          </a:effectRef>
+          <a:fontRef idx="minor">
+            <a:schemeClr val="lt1"/>
+          </a:fontRef>
+        </p:style>
+        <p:txBody>
+          <a:bodyPr rtlCol="0" anchor="ctr"/>
+          <a:lstStyle/>
+          <a:p>
+            <a:pPr algn="ctr"/>
+          </a:p>
+        </p:txBody>
+      </p:sp>
+      <p:sp>
+        <p:nvSpPr>
+          <p:cNvPr id="30" name="Rectangle 29"/>
+          <p:cNvSpPr/>
+          <p:nvPr/>
+        </p:nvSpPr>
+        <p:spPr>
+          <a:xfrm>
+            <a:off x="3291840" y="5440680"/>
+            <a:ext cx="2788920" cy="347472"/>
+          </a:xfrm>
+          <a:prstGeom prst="rect">
+            <a:avLst/>
+          </a:prstGeom>
+          <a:solidFill>
+            <a:srgbClr val="265DC8"/>
+          </a:solidFill>
+          <a:ln>
+            <a:noFill/>
+          </a:ln>
+        </p:spPr>
+        <p:style>
+          <a:lnRef idx="1">
+            <a:schemeClr val="accent1"/>
+          </a:lnRef>
+          <a:fillRef idx="3">
+            <a:schemeClr val="accent1"/>
+          </a:fillRef>
+          <a:effectRef idx="2">
+            <a:schemeClr val="accent1"/>
+          </a:effectRef>
+          <a:fontRef idx="minor">
+            <a:schemeClr val="lt1"/>
+          </a:fontRef>
+        </p:style>
+        <p:txBody>
+          <a:bodyPr rtlCol="0" anchor="ctr"/>
+          <a:lstStyle/>
+          <a:p>
+            <a:pPr algn="ctr"/>
+          </a:p>
+        </p:txBody>
+      </p:sp>
+      <p:sp>
+        <p:nvSpPr>
+          <p:cNvPr id="31" name="TextBox 30"/>
+          <p:cNvSpPr txBox="1"/>
+          <p:nvPr/>
+        </p:nvSpPr>
+        <p:spPr>
+          <a:xfrm>
+            <a:off x="3364992" y="5458968"/>
+            <a:ext cx="2651760" cy="320040"/>
+          </a:xfrm>
+          <a:prstGeom prst="rect">
+            <a:avLst/>
+          </a:prstGeom>
+          <a:noFill/>
+        </p:spPr>
+        <p:txBody>
+          <a:bodyPr wrap="square">
+            <a:spAutoFit/>
+          </a:bodyPr>
+          <a:lstStyle/>
+          <a:p>
+            <a:pPr algn="l"/>
+            <a:r>
+              <a:rPr sz="1100" b="1">
+                <a:solidFill>
+                  <a:srgbClr val="FFFFFF"/>
+                </a:solidFill>
+              </a:rPr>
+              <a:t>agent.py</a:t>
+            </a:r>
+          </a:p>
+        </p:txBody>
+      </p:sp>
+      <p:sp>
+        <p:nvSpPr>
+          <p:cNvPr id="32" name="TextBox 31"/>
+          <p:cNvSpPr txBox="1"/>
+          <p:nvPr/>
+        </p:nvSpPr>
+        <p:spPr>
+          <a:xfrm>
+            <a:off x="3364992" y="5852160"/>
+            <a:ext cx="2651760" cy="594360"/>
+          </a:xfrm>
+          <a:prstGeom prst="rect">
+            <a:avLst/>
+          </a:prstGeom>
+          <a:noFill/>
+        </p:spPr>
+        <p:txBody>
+          <a:bodyPr wrap="square">
+            <a:spAutoFit/>
+          </a:bodyPr>
+          <a:lstStyle/>
+          <a:p>
+            <a:pPr algn="l"/>
+            <a:r>
+              <a:rPr sz="1000" b="0">
+                <a:solidFill>
+                  <a:srgbClr val="1E1E2E"/>
+                </a:solidFill>
+              </a:rPr>
+              <a:t>plan_phase() + react_execute()</a:t>
+            </a:r>
+          </a:p>
+        </p:txBody>
+      </p:sp>
+      <p:sp>
+        <p:nvSpPr>
+          <p:cNvPr id="33" name="Rectangle 32"/>
+          <p:cNvSpPr/>
+          <p:nvPr/>
+        </p:nvSpPr>
+        <p:spPr>
+          <a:xfrm>
+            <a:off x="6217920" y="5440680"/>
+            <a:ext cx="2788920" cy="1051560"/>
+          </a:xfrm>
+          <a:prstGeom prst="rect">
+            <a:avLst/>
+          </a:prstGeom>
+          <a:solidFill>
+            <a:srgbClr val="FFFFFF"/>
+          </a:solidFill>
+          <a:ln>
+            <a:noFill/>
+          </a:ln>
+        </p:spPr>
+        <p:style>
+          <a:lnRef idx="1">
+            <a:schemeClr val="accent1"/>
+          </a:lnRef>
+          <a:fillRef idx="3">
+            <a:schemeClr val="accent1"/>
+          </a:fillRef>
+          <a:effectRef idx="2">
+            <a:schemeClr val="accent1"/>
+          </a:effectRef>
+          <a:fontRef idx="minor">
+            <a:schemeClr val="lt1"/>
+          </a:fontRef>
+        </p:style>
+        <p:txBody>
+          <a:bodyPr rtlCol="0" anchor="ctr"/>
+          <a:lstStyle/>
+          <a:p>
+            <a:pPr algn="ctr"/>
+          </a:p>
+        </p:txBody>
+      </p:sp>
+      <p:sp>
+        <p:nvSpPr>
+          <p:cNvPr id="34" name="Rectangle 33"/>
+          <p:cNvSpPr/>
+          <p:nvPr/>
+        </p:nvSpPr>
+        <p:spPr>
+          <a:xfrm>
+            <a:off x="6217920" y="5440680"/>
+            <a:ext cx="2788920" cy="347472"/>
+          </a:xfrm>
+          <a:prstGeom prst="rect">
+            <a:avLst/>
+          </a:prstGeom>
+          <a:solidFill>
+            <a:srgbClr val="265DC8"/>
+          </a:solidFill>
+          <a:ln>
+            <a:noFill/>
+          </a:ln>
+        </p:spPr>
+        <p:style>
+          <a:lnRef idx="1">
+            <a:schemeClr val="accent1"/>
+          </a:lnRef>
+          <a:fillRef idx="3">
+            <a:schemeClr val="accent1"/>
+          </a:fillRef>
+          <a:effectRef idx="2">
+            <a:schemeClr val="accent1"/>
+          </a:effectRef>
+          <a:fontRef idx="minor">
+            <a:schemeClr val="lt1"/>
+          </a:fontRef>
+        </p:style>
+        <p:txBody>
+          <a:bodyPr rtlCol="0" anchor="ctr"/>
+          <a:lstStyle/>
+          <a:p>
+            <a:pPr algn="ctr"/>
+          </a:p>
+        </p:txBody>
+      </p:sp>
+      <p:sp>
+        <p:nvSpPr>
+          <p:cNvPr id="35" name="TextBox 34"/>
+          <p:cNvSpPr txBox="1"/>
+          <p:nvPr/>
+        </p:nvSpPr>
+        <p:spPr>
+          <a:xfrm>
+            <a:off x="6291072" y="5458968"/>
+            <a:ext cx="2651760" cy="320040"/>
+          </a:xfrm>
+          <a:prstGeom prst="rect">
+            <a:avLst/>
+          </a:prstGeom>
+          <a:noFill/>
+        </p:spPr>
+        <p:txBody>
+          <a:bodyPr wrap="square">
+            <a:spAutoFit/>
+          </a:bodyPr>
+          <a:lstStyle/>
+          <a:p>
+            <a:pPr algn="l"/>
+            <a:r>
+              <a:rPr sz="1100" b="1">
+                <a:solidFill>
+                  <a:srgbClr val="FFFFFF"/>
+                </a:solidFill>
+              </a:rPr>
+              <a:t>html_generator.py</a:t>
+            </a:r>
+          </a:p>
+        </p:txBody>
+      </p:sp>
+      <p:sp>
+        <p:nvSpPr>
+          <p:cNvPr id="36" name="TextBox 35"/>
+          <p:cNvSpPr txBox="1"/>
+          <p:nvPr/>
+        </p:nvSpPr>
+        <p:spPr>
+          <a:xfrm>
+            <a:off x="6291072" y="5852160"/>
+            <a:ext cx="2651760" cy="594360"/>
+          </a:xfrm>
+          <a:prstGeom prst="rect">
+            <a:avLst/>
+          </a:prstGeom>
+          <a:noFill/>
+        </p:spPr>
+        <p:txBody>
+          <a:bodyPr wrap="square">
+            <a:spAutoFit/>
+          </a:bodyPr>
+          <a:lstStyle/>
+          <a:p>
+            <a:pPr algn="l"/>
+            <a:r>
+              <a:rPr sz="1000" b="0">
+                <a:solidFill>
+                  <a:srgbClr val="1E1E2E"/>
+                </a:solidFill>
+              </a:rPr>
+              <a:t>수집된 데이터 → 아름다운 HTML</a:t>
+            </a:r>
+          </a:p>
+        </p:txBody>
+      </p:sp>
+      <p:sp>
+        <p:nvSpPr>
+          <p:cNvPr id="37" name="Rectangle 36"/>
+          <p:cNvSpPr/>
+          <p:nvPr/>
+        </p:nvSpPr>
+        <p:spPr>
+          <a:xfrm>
+            <a:off x="9144000" y="5440680"/>
+            <a:ext cx="2788920" cy="1051560"/>
+          </a:xfrm>
+          <a:prstGeom prst="rect">
+            <a:avLst/>
+          </a:prstGeom>
+          <a:solidFill>
+            <a:srgbClr val="FFFFFF"/>
+          </a:solidFill>
+          <a:ln>
+            <a:noFill/>
+          </a:ln>
+        </p:spPr>
+        <p:style>
+          <a:lnRef idx="1">
+            <a:schemeClr val="accent1"/>
+          </a:lnRef>
+          <a:fillRef idx="3">
+            <a:schemeClr val="accent1"/>
+          </a:fillRef>
+          <a:effectRef idx="2">
+            <a:schemeClr val="accent1"/>
+          </a:effectRef>
+          <a:fontRef idx="minor">
+            <a:schemeClr val="lt1"/>
+          </a:fontRef>
+        </p:style>
+        <p:txBody>
+          <a:bodyPr rtlCol="0" anchor="ctr"/>
+          <a:lstStyle/>
+          <a:p>
+            <a:pPr algn="ctr"/>
+          </a:p>
+        </p:txBody>
+      </p:sp>
+      <p:sp>
+        <p:nvSpPr>
+          <p:cNvPr id="38" name="Rectangle 37"/>
+          <p:cNvSpPr/>
+          <p:nvPr/>
+        </p:nvSpPr>
+        <p:spPr>
+          <a:xfrm>
+            <a:off x="9144000" y="5440680"/>
+            <a:ext cx="2788920" cy="347472"/>
+          </a:xfrm>
+          <a:prstGeom prst="rect">
+            <a:avLst/>
+          </a:prstGeom>
+          <a:solidFill>
+            <a:srgbClr val="265DC8"/>
+          </a:solidFill>
+          <a:ln>
+            <a:noFill/>
+          </a:ln>
+        </p:spPr>
+        <p:style>
+          <a:lnRef idx="1">
+            <a:schemeClr val="accent1"/>
+          </a:lnRef>
+          <a:fillRef idx="3">
+            <a:schemeClr val="accent1"/>
+          </a:fillRef>
+          <a:effectRef idx="2">
+            <a:schemeClr val="accent1"/>
+          </a:effectRef>
+          <a:fontRef idx="minor">
+            <a:schemeClr val="lt1"/>
+          </a:fontRef>
+        </p:style>
+        <p:txBody>
+          <a:bodyPr rtlCol="0" anchor="ctr"/>
+          <a:lstStyle/>
+          <a:p>
+            <a:pPr algn="ctr"/>
+          </a:p>
+        </p:txBody>
+      </p:sp>
+      <p:sp>
+        <p:nvSpPr>
+          <p:cNvPr id="39" name="TextBox 38"/>
+          <p:cNvSpPr txBox="1"/>
+          <p:nvPr/>
+        </p:nvSpPr>
+        <p:spPr>
+          <a:xfrm>
+            <a:off x="9217152" y="5458968"/>
+            <a:ext cx="2651760" cy="320040"/>
+          </a:xfrm>
+          <a:prstGeom prst="rect">
+            <a:avLst/>
+          </a:prstGeom>
+          <a:noFill/>
+        </p:spPr>
+        <p:txBody>
+          <a:bodyPr wrap="square">
+            <a:spAutoFit/>
+          </a:bodyPr>
+          <a:lstStyle/>
+          <a:p>
+            <a:pPr algn="l"/>
+            <a:r>
+              <a:rPr sz="1100" b="1">
+                <a:solidFill>
+                  <a:srgbClr val="FFFFFF"/>
+                </a:solidFill>
+              </a:rPr>
+              <a:t>app.py</a:t>
+            </a:r>
+          </a:p>
+        </p:txBody>
+      </p:sp>
+      <p:sp>
+        <p:nvSpPr>
+          <p:cNvPr id="40" name="TextBox 39"/>
+          <p:cNvSpPr txBox="1"/>
+          <p:nvPr/>
+        </p:nvSpPr>
+        <p:spPr>
+          <a:xfrm>
+            <a:off x="9217152" y="5852160"/>
+            <a:ext cx="2651760" cy="594360"/>
+          </a:xfrm>
+          <a:prstGeom prst="rect">
+            <a:avLst/>
+          </a:prstGeom>
+          <a:noFill/>
+        </p:spPr>
+        <p:txBody>
+          <a:bodyPr wrap="square">
+            <a:spAutoFit/>
+          </a:bodyPr>
+          <a:lstStyle/>
+          <a:p>
+            <a:pPr algn="l"/>
+            <a:r>
+              <a:rPr sz="1000" b="0">
+                <a:solidFill>
+                  <a:srgbClr val="1E1E2E"/>
+                </a:solidFill>
+              </a:rPr>
+              <a:t>Streamlit 채팅 UI + 실시간 로그</a:t>
+            </a:r>
+          </a:p>
+        </p:txBody>
+      </p:sp>
+    </p:spTree>
+  </p:cSld>
+  <p:clrMapOvr>
+    <a:masterClrMapping/>
+  </p:clrMapOvr>
+</p:sld>
+</file>
+
+<file path=ppt/slides/slide8.xml><?xml version="1.0" encoding="utf-8"?>
 <p:sld xmlns:a="http://schemas.openxmlformats.org/drawingml/2006/main" xmlns:p="http://schemas.openxmlformats.org/presentationml/2006/main" xmlns:r="http://schemas.openxmlformats.org/officeDocument/2006/relationships">
   <p:cSld>
     <p:bg>
